--- a/2. ORM/EF_Core.pptx
+++ b/2. ORM/EF_Core.pptx
@@ -2913,38 +2913,10 @@
                 <a:ea typeface="Courier New" pitchFamily="34" charset="-122"/>
                 <a:cs typeface="Courier New" pitchFamily="34" charset="-120"/>
               </a:rPr>
-              <a:t>dotnet ef migrations add CrearTablaLibros</a:t>
-            </a:r>
-            <a:endParaRPr lang="en-US" sz="1250" dirty="0"/>
-          </a:p>
-        </p:txBody>
-      </p:sp>
-      <p:sp>
-        <p:nvSpPr>
-          <p:cNvPr id="18" name="Text 16"/>
-          <p:cNvSpPr/>
-          <p:nvPr/>
-        </p:nvSpPr>
-        <p:spPr>
-          <a:xfrm>
-            <a:off x="822960" y="5349240"/>
-            <a:ext cx="10543032" cy="320040"/>
-          </a:xfrm>
-          <a:prstGeom prst="rect">
-            <a:avLst/>
-          </a:prstGeom>
-          <a:noFill/>
-          <a:ln/>
-        </p:spPr>
-        <p:txBody>
-          <a:bodyPr wrap="square" lIns="0" tIns="0" rIns="0" bIns="0" rtlCol="0" anchor="ctr"/>
-          <a:lstStyle/>
-          <a:p>
-            <a:pPr marL="0" indent="0" algn="l">
-              <a:buNone/>
-            </a:pPr>
-            <a:r>
-              <a:rPr lang="en-US" sz="1250" dirty="0">
+              <a:t>Add-Migration </a:t>
+            </a:r>
+            <a:r>
+              <a:rPr lang="en-US" sz="1250" dirty="0" err="1">
                 <a:solidFill>
                   <a:srgbClr val="8FD694"/>
                 </a:solidFill>
@@ -2952,7 +2924,46 @@
                 <a:ea typeface="Courier New" pitchFamily="34" charset="-122"/>
                 <a:cs typeface="Courier New" pitchFamily="34" charset="-120"/>
               </a:rPr>
-              <a:t>dotnet ef database update</a:t>
+              <a:t>CrearTablaLibros</a:t>
+            </a:r>
+            <a:endParaRPr lang="en-US" sz="1250" dirty="0"/>
+          </a:p>
+        </p:txBody>
+      </p:sp>
+      <p:sp>
+        <p:nvSpPr>
+          <p:cNvPr id="18" name="Text 16"/>
+          <p:cNvSpPr/>
+          <p:nvPr/>
+        </p:nvSpPr>
+        <p:spPr>
+          <a:xfrm>
+            <a:off x="822960" y="5349240"/>
+            <a:ext cx="10543032" cy="320040"/>
+          </a:xfrm>
+          <a:prstGeom prst="rect">
+            <a:avLst/>
+          </a:prstGeom>
+          <a:noFill/>
+          <a:ln/>
+        </p:spPr>
+        <p:txBody>
+          <a:bodyPr wrap="square" lIns="0" tIns="0" rIns="0" bIns="0" rtlCol="0" anchor="ctr"/>
+          <a:lstStyle/>
+          <a:p>
+            <a:pPr marL="0" indent="0" algn="l">
+              <a:buNone/>
+            </a:pPr>
+            <a:r>
+              <a:rPr lang="en-US" sz="1250" dirty="0">
+                <a:solidFill>
+                  <a:srgbClr val="8FD694"/>
+                </a:solidFill>
+                <a:latin typeface="Courier New" pitchFamily="34" charset="0"/>
+                <a:ea typeface="Courier New" pitchFamily="34" charset="-122"/>
+                <a:cs typeface="Courier New" pitchFamily="34" charset="-120"/>
+              </a:rPr>
+              <a:t>Update-Database</a:t>
             </a:r>
             <a:endParaRPr lang="en-US" sz="1250" dirty="0"/>
           </a:p>
@@ -3534,7 +3545,7 @@
         </p:nvSpPr>
         <p:spPr>
           <a:xfrm>
-            <a:off x="822960" y="4965192"/>
+            <a:off x="822960" y="5349240"/>
             <a:ext cx="10543032" cy="228600"/>
           </a:xfrm>
           <a:prstGeom prst="rect">
@@ -3559,38 +3570,10 @@
                 <a:ea typeface="Courier New" pitchFamily="34" charset="-122"/>
                 <a:cs typeface="Courier New" pitchFamily="34" charset="-120"/>
               </a:rPr>
-              <a:t>dotnet ef dbcontext scaffold \</a:t>
-            </a:r>
-            <a:endParaRPr lang="en-US" sz="1100" dirty="0"/>
-          </a:p>
-        </p:txBody>
-      </p:sp>
-      <p:sp>
-        <p:nvSpPr>
-          <p:cNvPr id="18" name="Text 16"/>
-          <p:cNvSpPr/>
-          <p:nvPr/>
-        </p:nvSpPr>
-        <p:spPr>
-          <a:xfrm>
-            <a:off x="822960" y="5202936"/>
-            <a:ext cx="10543032" cy="228600"/>
-          </a:xfrm>
-          <a:prstGeom prst="rect">
-            <a:avLst/>
-          </a:prstGeom>
-          <a:noFill/>
-          <a:ln/>
-        </p:spPr>
-        <p:txBody>
-          <a:bodyPr wrap="square" lIns="0" tIns="0" rIns="0" bIns="0" rtlCol="0" anchor="ctr"/>
-          <a:lstStyle/>
-          <a:p>
-            <a:pPr marL="0" indent="0" algn="l">
-              <a:buNone/>
-            </a:pPr>
-            <a:r>
-              <a:rPr lang="en-US" sz="1100" dirty="0">
+              <a:t>Scaffold-</a:t>
+            </a:r>
+            <a:r>
+              <a:rPr lang="en-US" sz="1100" dirty="0" err="1">
                 <a:solidFill>
                   <a:srgbClr val="8FD694"/>
                 </a:solidFill>
@@ -3598,36 +3581,8 @@
                 <a:ea typeface="Courier New" pitchFamily="34" charset="-122"/>
                 <a:cs typeface="Courier New" pitchFamily="34" charset="-120"/>
               </a:rPr>
-              <a:t>  "Server=...;Database=Libreria;Trusted_Connection=True;" \</a:t>
-            </a:r>
-            <a:endParaRPr lang="en-US" sz="1100" dirty="0"/>
-          </a:p>
-        </p:txBody>
-      </p:sp>
-      <p:sp>
-        <p:nvSpPr>
-          <p:cNvPr id="19" name="Text 17"/>
-          <p:cNvSpPr/>
-          <p:nvPr/>
-        </p:nvSpPr>
-        <p:spPr>
-          <a:xfrm>
-            <a:off x="822960" y="5440680"/>
-            <a:ext cx="10543032" cy="228600"/>
-          </a:xfrm>
-          <a:prstGeom prst="rect">
-            <a:avLst/>
-          </a:prstGeom>
-          <a:noFill/>
-          <a:ln/>
-        </p:spPr>
-        <p:txBody>
-          <a:bodyPr wrap="square" lIns="0" tIns="0" rIns="0" bIns="0" rtlCol="0" anchor="ctr"/>
-          <a:lstStyle/>
-          <a:p>
-            <a:pPr marL="0" indent="0" algn="l">
-              <a:buNone/>
-            </a:pPr>
+              <a:t>DbContext</a:t>
+            </a:r>
             <a:r>
               <a:rPr lang="en-US" sz="1100" dirty="0">
                 <a:solidFill>
@@ -3637,38 +3592,10 @@
                 <a:ea typeface="Courier New" pitchFamily="34" charset="-122"/>
                 <a:cs typeface="Courier New" pitchFamily="34" charset="-120"/>
               </a:rPr>
-              <a:t>  Microsoft.EntityFrameworkCore.SqlServer \</a:t>
-            </a:r>
-            <a:endParaRPr lang="en-US" sz="1100" dirty="0"/>
-          </a:p>
-        </p:txBody>
-      </p:sp>
-      <p:sp>
-        <p:nvSpPr>
-          <p:cNvPr id="20" name="Text 18"/>
-          <p:cNvSpPr/>
-          <p:nvPr/>
-        </p:nvSpPr>
-        <p:spPr>
-          <a:xfrm>
-            <a:off x="822960" y="5678424"/>
-            <a:ext cx="10543032" cy="228600"/>
-          </a:xfrm>
-          <a:prstGeom prst="rect">
-            <a:avLst/>
-          </a:prstGeom>
-          <a:noFill/>
-          <a:ln/>
-        </p:spPr>
-        <p:txBody>
-          <a:bodyPr wrap="square" lIns="0" tIns="0" rIns="0" bIns="0" rtlCol="0" anchor="ctr"/>
-          <a:lstStyle/>
-          <a:p>
-            <a:pPr marL="0" indent="0" algn="l">
-              <a:buNone/>
-            </a:pPr>
-            <a:r>
-              <a:rPr lang="en-US" sz="1100" dirty="0">
+              <a:t> "Server=...;Database=</a:t>
+            </a:r>
+            <a:r>
+              <a:rPr lang="en-US" sz="1100" dirty="0" err="1">
                 <a:solidFill>
                   <a:srgbClr val="8FD694"/>
                 </a:solidFill>
@@ -3676,7 +3603,84 @@
                 <a:ea typeface="Courier New" pitchFamily="34" charset="-122"/>
                 <a:cs typeface="Courier New" pitchFamily="34" charset="-120"/>
               </a:rPr>
-              <a:t>  -o Models -c LibreriaContext</a:t>
+              <a:t>Libreria;Trusted_Connection</a:t>
+            </a:r>
+            <a:r>
+              <a:rPr lang="en-US" sz="1100" dirty="0">
+                <a:solidFill>
+                  <a:srgbClr val="8FD694"/>
+                </a:solidFill>
+                <a:latin typeface="Courier New" pitchFamily="34" charset="0"/>
+                <a:ea typeface="Courier New" pitchFamily="34" charset="-122"/>
+                <a:cs typeface="Courier New" pitchFamily="34" charset="-120"/>
+              </a:rPr>
+              <a:t>=</a:t>
+            </a:r>
+            <a:r>
+              <a:rPr lang="en-US" sz="1100" dirty="0" err="1">
+                <a:solidFill>
+                  <a:srgbClr val="8FD694"/>
+                </a:solidFill>
+                <a:latin typeface="Courier New" pitchFamily="34" charset="0"/>
+                <a:ea typeface="Courier New" pitchFamily="34" charset="-122"/>
+                <a:cs typeface="Courier New" pitchFamily="34" charset="-120"/>
+              </a:rPr>
+              <a:t>True;TrustServerCertificate</a:t>
+            </a:r>
+            <a:r>
+              <a:rPr lang="en-US" sz="1100" dirty="0">
+                <a:solidFill>
+                  <a:srgbClr val="8FD694"/>
+                </a:solidFill>
+                <a:latin typeface="Courier New" pitchFamily="34" charset="0"/>
+                <a:ea typeface="Courier New" pitchFamily="34" charset="-122"/>
+                <a:cs typeface="Courier New" pitchFamily="34" charset="-120"/>
+              </a:rPr>
+              <a:t>=True;" </a:t>
+            </a:r>
+            <a:r>
+              <a:rPr lang="en-US" sz="1100" dirty="0" err="1">
+                <a:solidFill>
+                  <a:srgbClr val="8FD694"/>
+                </a:solidFill>
+                <a:latin typeface="Courier New" pitchFamily="34" charset="0"/>
+                <a:ea typeface="Courier New" pitchFamily="34" charset="-122"/>
+                <a:cs typeface="Courier New" pitchFamily="34" charset="-120"/>
+              </a:rPr>
+              <a:t>Microsoft.EntityFrameworkCore.SqlServer</a:t>
+            </a:r>
+            <a:r>
+              <a:rPr lang="en-US" sz="1100" dirty="0">
+                <a:solidFill>
+                  <a:srgbClr val="8FD694"/>
+                </a:solidFill>
+                <a:latin typeface="Courier New" pitchFamily="34" charset="0"/>
+                <a:ea typeface="Courier New" pitchFamily="34" charset="-122"/>
+                <a:cs typeface="Courier New" pitchFamily="34" charset="-120"/>
+              </a:rPr>
+              <a:t> -</a:t>
+            </a:r>
+            <a:r>
+              <a:rPr lang="en-US" sz="1100" dirty="0" err="1">
+                <a:solidFill>
+                  <a:srgbClr val="8FD694"/>
+                </a:solidFill>
+                <a:latin typeface="Courier New" pitchFamily="34" charset="0"/>
+                <a:ea typeface="Courier New" pitchFamily="34" charset="-122"/>
+                <a:cs typeface="Courier New" pitchFamily="34" charset="-120"/>
+              </a:rPr>
+              <a:t>OutputDir</a:t>
+            </a:r>
+            <a:r>
+              <a:rPr lang="en-US" sz="1100" dirty="0">
+                <a:solidFill>
+                  <a:srgbClr val="8FD694"/>
+                </a:solidFill>
+                <a:latin typeface="Courier New" pitchFamily="34" charset="0"/>
+                <a:ea typeface="Courier New" pitchFamily="34" charset="-122"/>
+                <a:cs typeface="Courier New" pitchFamily="34" charset="-120"/>
+              </a:rPr>
+              <a:t> Models</a:t>
             </a:r>
             <a:endParaRPr lang="en-US" sz="1100" dirty="0"/>
           </a:p>
@@ -10413,7 +10417,7 @@
         </p:nvSpPr>
         <p:spPr>
           <a:xfrm>
-            <a:off x="822960" y="2468880"/>
+            <a:off x="960120" y="3136392"/>
             <a:ext cx="4846320" cy="310896"/>
           </a:xfrm>
           <a:prstGeom prst="rect">
@@ -10438,38 +10442,10 @@
                 <a:ea typeface="Courier New" pitchFamily="34" charset="-122"/>
                 <a:cs typeface="Courier New" pitchFamily="34" charset="-120"/>
               </a:rPr>
-              <a:t>dotnet add package</a:t>
-            </a:r>
-            <a:endParaRPr lang="en-US" sz="1150" dirty="0"/>
-          </a:p>
-        </p:txBody>
-      </p:sp>
-      <p:sp>
-        <p:nvSpPr>
-          <p:cNvPr id="7" name="Text 5"/>
-          <p:cNvSpPr/>
-          <p:nvPr/>
-        </p:nvSpPr>
-        <p:spPr>
-          <a:xfrm>
-            <a:off x="822960" y="2798064"/>
-            <a:ext cx="4846320" cy="310896"/>
-          </a:xfrm>
-          <a:prstGeom prst="rect">
-            <a:avLst/>
-          </a:prstGeom>
-          <a:noFill/>
-          <a:ln/>
-        </p:spPr>
-        <p:txBody>
-          <a:bodyPr wrap="square" lIns="0" tIns="0" rIns="0" bIns="0" rtlCol="0" anchor="ctr"/>
-          <a:lstStyle/>
-          <a:p>
-            <a:pPr marL="0" indent="0" algn="l">
-              <a:buNone/>
-            </a:pPr>
-            <a:r>
-              <a:rPr lang="en-US" sz="1150" dirty="0">
+              <a:t>Install-Package </a:t>
+            </a:r>
+            <a:r>
+              <a:rPr lang="en-US" sz="1150" dirty="0" err="1">
                 <a:solidFill>
                   <a:srgbClr val="8FD694"/>
                 </a:solidFill>
@@ -10477,7 +10453,7 @@
                 <a:ea typeface="Courier New" pitchFamily="34" charset="-122"/>
                 <a:cs typeface="Courier New" pitchFamily="34" charset="-120"/>
               </a:rPr>
-              <a:t>  Microsoft.EntityFrameworkCore.SqlServer</a:t>
+              <a:t>Microsoft.EntityFrameworkCore.SqlServer</a:t>
             </a:r>
             <a:endParaRPr lang="en-US" sz="1150" dirty="0"/>
           </a:p>
@@ -10513,13 +10489,13 @@
       </p:sp>
       <p:sp>
         <p:nvSpPr>
-          <p:cNvPr id="9" name="Text 7"/>
-          <p:cNvSpPr/>
-          <p:nvPr/>
-        </p:nvSpPr>
-        <p:spPr>
-          <a:xfrm>
-            <a:off x="822960" y="3456432"/>
+          <p:cNvPr id="10" name="Text 8"/>
+          <p:cNvSpPr/>
+          <p:nvPr/>
+        </p:nvSpPr>
+        <p:spPr>
+          <a:xfrm>
+            <a:off x="807720" y="3785616"/>
             <a:ext cx="4846320" cy="310896"/>
           </a:xfrm>
           <a:prstGeom prst="rect">
@@ -10544,46 +10520,7 @@
                 <a:ea typeface="Courier New" pitchFamily="34" charset="-122"/>
                 <a:cs typeface="Courier New" pitchFamily="34" charset="-120"/>
               </a:rPr>
-              <a:t>dotnet add package</a:t>
-            </a:r>
-            <a:endParaRPr lang="en-US" sz="1150" dirty="0"/>
-          </a:p>
-        </p:txBody>
-      </p:sp>
-      <p:sp>
-        <p:nvSpPr>
-          <p:cNvPr id="10" name="Text 8"/>
-          <p:cNvSpPr/>
-          <p:nvPr/>
-        </p:nvSpPr>
-        <p:spPr>
-          <a:xfrm>
-            <a:off x="822960" y="3785616"/>
-            <a:ext cx="4846320" cy="310896"/>
-          </a:xfrm>
-          <a:prstGeom prst="rect">
-            <a:avLst/>
-          </a:prstGeom>
-          <a:noFill/>
-          <a:ln/>
-        </p:spPr>
-        <p:txBody>
-          <a:bodyPr wrap="square" lIns="0" tIns="0" rIns="0" bIns="0" rtlCol="0" anchor="ctr"/>
-          <a:lstStyle/>
-          <a:p>
-            <a:pPr marL="0" indent="0" algn="l">
-              <a:buNone/>
-            </a:pPr>
-            <a:r>
-              <a:rPr lang="en-US" sz="1150" dirty="0">
-                <a:solidFill>
-                  <a:srgbClr val="8FD694"/>
-                </a:solidFill>
-                <a:latin typeface="Courier New" pitchFamily="34" charset="0"/>
-                <a:ea typeface="Courier New" pitchFamily="34" charset="-122"/>
-                <a:cs typeface="Courier New" pitchFamily="34" charset="-120"/>
-              </a:rPr>
-              <a:t>  </a:t>
+              <a:t>  Install-Package </a:t>
             </a:r>
             <a:r>
               <a:rPr lang="en-US" sz="1150" dirty="0" err="1">

--- a/2. ORM/EF_Core.pptx
+++ b/2. ORM/EF_Core.pptx
@@ -5,7 +5,7 @@
     <p:sldMasterId id="2147483648" r:id="rId1"/>
   </p:sldMasterIdLst>
   <p:notesMasterIdLst>
-    <p:notesMasterId r:id="rId18"/>
+    <p:notesMasterId r:id="rId19"/>
   </p:notesMasterIdLst>
   <p:sldIdLst>
     <p:sldId id="256" r:id="rId2"/>
@@ -20,10 +20,11 @@
     <p:sldId id="266" r:id="rId11"/>
     <p:sldId id="267" r:id="rId12"/>
     <p:sldId id="268" r:id="rId13"/>
-    <p:sldId id="271" r:id="rId14"/>
-    <p:sldId id="272" r:id="rId15"/>
-    <p:sldId id="269" r:id="rId16"/>
-    <p:sldId id="270" r:id="rId17"/>
+    <p:sldId id="274" r:id="rId14"/>
+    <p:sldId id="275" r:id="rId15"/>
+    <p:sldId id="272" r:id="rId16"/>
+    <p:sldId id="269" r:id="rId17"/>
+    <p:sldId id="270" r:id="rId18"/>
   </p:sldIdLst>
   <p:sldSz cx="12192000" cy="6858000"/>
   <p:notesSz cx="6858000" cy="12192000"/>
@@ -632,7 +633,10 @@
           <a:bodyPr/>
           <a:lstStyle/>
           <a:p>
-            <a:endParaRPr lang="en-US" dirty="0"/>
+            <a:r>
+              <a:rPr lang="en-US" dirty="0"/>
+              <a:t>Antes de llegar a AutoMapper, quiero dedicarle una diapositiva completa a un concepto que ya veníamos mencionando de pasada: los DTOs, sigla de Data Transfer Object. Un DTO es, en esencia, una clase simple, sin ningún comportamiento ni lógica de negocio, cuyo único propósito es transportar datos entre capas — típicamente entre nuestra API y el mundo exterior. La distinción clave que quiero que les quede clara es esta: un DTO no es una entidad de EF Core, es una copia con exactamente la forma que el cliente necesita ver o enviar, ni una propiedad más, ni una menos. Miren el ejemplo en pantalla: la entidad Libro tiene un campo CostoInterno, que es información de gestión que jamás debería llegar al cliente final de nuestra API, y tiene una propiedad de navegación Autor que apunta al objeto completo del autor. El LibroDto, en cambio, no tiene CostoInterno para nada, y en vez de exponer el objeto Autor completo —con el riesgo de arrastrar de vuelta la lista de libros de ese autor, y de ahí otra vez al autor, en un ciclo infinito— simplemente aplana esa relación en un campo de texto, NombreAutor. Repasemos las razones concretas para hacer esto. Primero, ocultamos datos sensibles: costos internos, flags administrativos, cualquier columna que exista en la base por necesidades internas pero que el cliente no debería ver jamás. Segundo, evitamos referencias circulares: si intentan serializar a JSON una entidad con navegaciones bidireccionales tal cual viene de la base, el serializador entra en un ciclo infinito entre Libro y Autor y falla, o en el mejor de los casos genera una respuesta enorme y redundante. Tercero, desacoplamos el contrato público de la API del esquema interno de la base: si mañana renombran una columna o reorganizan una tabla, mientras el DTO se mantenga igual, ningún cliente de la API se entera de ese cambio interno. Y cuarto, un mismo dominio puede necesitar varios DTOs distintos según el caso de uso: un DTO de creación que no incluye el Id porque todavía no existe, un DTO de listado con solo los campos necesarios para una grilla, y un DTO de detalle con toda la información completa para una pantalla individual. Con esta idea bien clara, ahora sí podemos ver cómo automatizar el proceso de convertir entidades en estos DTOs, que es exactamente lo que hace AutoMapper.</a:t>
+            </a:r>
           </a:p>
         </p:txBody>
       </p:sp>
@@ -716,7 +720,10 @@
           <a:bodyPr/>
           <a:lstStyle/>
           <a:p>
-            <a:endParaRPr lang="en-US" dirty="0"/>
+            <a:r>
+              <a:rPr lang="en-US" dirty="0"/>
+              <a:t>Ya vimos qué son los DTOs y por qué los necesitamos; ahora falta resolver un problema práctico: escribir a mano el código que copia cada propiedad de la entidad al DTO, propiedad por propiedad, es tedioso, repetitivo, y propenso a errores — es muy fácil, meses después, agregar una propiedad nueva a la entidad y olvidarse de agregarla también al mapeo manual en cada lugar donde se usa. Ahí es exactamente donde entra AutoMapper: una librería de mapeo objeto-objeto para .NET que automatiza esa conversión. Por convención, mapea automáticamente las propiedades que tienen el mismo nombre en el origen y en el destino — así que para el caso simple, como Id o Titulo, no hace falta configurar absolutamente nada. Para el resto de los casos, como aplanar Autor.Nombre al campo NombreAutor que vimos en la diapositiva anterior, o calcular un valor que no existe directamente en la entidad, AutoMapper permite definir reglas explícitas, que vamos a ver en la próxima diapositiva con el método ForMember. Y como beneficio extra que también vamos a ver enseguida, se integra directamente con las consultas LINQ de EF Core a través de un método llamado ProjectTo, que traduce el mapeo directamente a la consulta SQL, en vez de traer la entidad completa y recién después convertirla en memoria.</a:t>
+            </a:r>
           </a:p>
         </p:txBody>
       </p:sp>
@@ -906,6 +913,90 @@
             <a:fld id="{F7021451-1387-4CA6-816F-3879F97B5CBC}" type="slidenum">
               <a:rPr lang="en-US"/>
               <a:t>16</a:t>
+            </a:fld>
+            <a:endParaRPr lang="en-US"/>
+          </a:p>
+        </p:txBody>
+      </p:sp>
+    </p:spTree>
+    <p:extLst>
+      <p:ext uri="{BB962C8B-B14F-4D97-AF65-F5344CB8AC3E}">
+        <p14:creationId xmlns:p14="http://schemas.microsoft.com/office/powerpoint/2010/main" val="1024086991"/>
+      </p:ext>
+    </p:extLst>
+  </p:cSld>
+  <p:clrMapOvr>
+    <a:masterClrMapping/>
+  </p:clrMapOvr>
+</p:notes>
+</file>
+
+<file path=ppt/notesSlides/notesSlide17.xml><?xml version="1.0" encoding="utf-8"?>
+<p:notes xmlns:a="http://schemas.openxmlformats.org/drawingml/2006/main" xmlns:r="http://schemas.openxmlformats.org/officeDocument/2006/relationships" xmlns:p="http://schemas.openxmlformats.org/presentationml/2006/main">
+  <p:cSld>
+    <p:spTree>
+      <p:nvGrpSpPr>
+        <p:cNvPr id="1" name=""/>
+        <p:cNvGrpSpPr/>
+        <p:nvPr/>
+      </p:nvGrpSpPr>
+      <p:grpSpPr>
+        <a:xfrm>
+          <a:off x="0" y="0"/>
+          <a:ext cx="0" cy="0"/>
+          <a:chOff x="0" y="0"/>
+          <a:chExt cx="0" cy="0"/>
+        </a:xfrm>
+      </p:grpSpPr>
+      <p:sp>
+        <p:nvSpPr>
+          <p:cNvPr id="2" name="Slide Image Placeholder 1"/>
+          <p:cNvSpPr>
+            <a:spLocks noGrp="1" noRot="1" noChangeAspect="1"/>
+          </p:cNvSpPr>
+          <p:nvPr>
+            <p:ph type="sldImg"/>
+          </p:nvPr>
+        </p:nvSpPr>
+        <p:spPr/>
+      </p:sp>
+      <p:sp>
+        <p:nvSpPr>
+          <p:cNvPr id="3" name="Notes Placeholder 2"/>
+          <p:cNvSpPr>
+            <a:spLocks noGrp="1"/>
+          </p:cNvSpPr>
+          <p:nvPr>
+            <p:ph type="body" idx="1"/>
+          </p:nvPr>
+        </p:nvSpPr>
+        <p:spPr/>
+        <p:txBody>
+          <a:bodyPr/>
+          <a:lstStyle/>
+          <a:p>
+            <a:endParaRPr lang="en-US" dirty="0"/>
+          </a:p>
+        </p:txBody>
+      </p:sp>
+      <p:sp>
+        <p:nvSpPr>
+          <p:cNvPr id="4" name="Slide Number Placeholder 3"/>
+          <p:cNvSpPr>
+            <a:spLocks noGrp="1"/>
+          </p:cNvSpPr>
+          <p:nvPr>
+            <p:ph type="sldNum" sz="quarter" idx="10"/>
+          </p:nvPr>
+        </p:nvSpPr>
+        <p:spPr/>
+        <p:txBody>
+          <a:bodyPr/>
+          <a:lstStyle/>
+          <a:p>
+            <a:fld id="{F7021451-1387-4CA6-816F-3879F97B5CBC}" type="slidenum">
+              <a:rPr lang="en-US"/>
+              <a:t>17</a:t>
             </a:fld>
             <a:endParaRPr lang="en-US"/>
           </a:p>
@@ -2378,7 +2469,7 @@
                 <a:ea typeface="Cambria" pitchFamily="34" charset="-122"/>
                 <a:cs typeface="Cambria" pitchFamily="34" charset="-120"/>
               </a:rPr>
-              <a:t>Code First: flujo completo</a:t>
+              <a:t>Code First</a:t>
             </a:r>
             <a:endParaRPr lang="en-US" sz="3000" dirty="0"/>
           </a:p>
@@ -3035,7 +3126,7 @@
                 <a:ea typeface="Cambria" pitchFamily="34" charset="-122"/>
                 <a:cs typeface="Cambria" pitchFamily="34" charset="-120"/>
               </a:rPr>
-              <a:t>Database First: flujo completo</a:t>
+              <a:t>Database First</a:t>
             </a:r>
             <a:endParaRPr lang="en-US" sz="3000" dirty="0"/>
           </a:p>
@@ -4893,7 +4984,7 @@
                 <a:ea typeface="Cambria" pitchFamily="34" charset="-122"/>
                 <a:cs typeface="Cambria" pitchFamily="34" charset="-120"/>
               </a:rPr>
-              <a:t>AutoMapper: mapeando entidades a DTOs</a:t>
+              <a:t>DTOs</a:t>
             </a:r>
             <a:endParaRPr lang="en-US" sz="3000" dirty="0"/>
           </a:p>
@@ -4901,57 +4992,846 @@
       </p:sp>
       <p:sp>
         <p:nvSpPr>
-          <p:cNvPr id="3" name="Text 1"/>
-          <p:cNvSpPr/>
-          <p:nvPr/>
-        </p:nvSpPr>
-        <p:spPr>
-          <a:xfrm>
-            <a:off x="548640" y="1024128"/>
-            <a:ext cx="11091672" cy="365760"/>
-          </a:xfrm>
-          <a:prstGeom prst="rect">
-            <a:avLst/>
-          </a:prstGeom>
-          <a:noFill/>
-          <a:ln/>
-        </p:spPr>
-        <p:txBody>
-          <a:bodyPr wrap="square" lIns="0" tIns="0" rIns="0" bIns="0" rtlCol="0" anchor="ctr"/>
-          <a:lstStyle/>
-          <a:p>
-            <a:pPr marL="0" indent="0" algn="l">
-              <a:buNone/>
-            </a:pPr>
-            <a:r>
-              <a:rPr lang="en-US" sz="1400" i="1" dirty="0">
-                <a:solidFill>
-                  <a:srgbClr val="1C7293"/>
+          <p:cNvPr id="4" name="Shape 2"/>
+          <p:cNvSpPr/>
+          <p:nvPr/>
+        </p:nvSpPr>
+        <p:spPr>
+          <a:xfrm>
+            <a:off x="548640" y="1411716"/>
+            <a:ext cx="11091672" cy="822960"/>
+          </a:xfrm>
+          <a:prstGeom prst="roundRect">
+            <a:avLst>
+              <a:gd name="adj" fmla="val 8889"/>
+            </a:avLst>
+          </a:prstGeom>
+          <a:solidFill>
+            <a:srgbClr val="E7F1F6"/>
+          </a:solidFill>
+          <a:ln/>
+        </p:spPr>
+        <p:txBody>
+          <a:bodyPr/>
+          <a:lstStyle/>
+          <a:p>
+            <a:endParaRPr lang="es-AR"/>
+          </a:p>
+        </p:txBody>
+      </p:sp>
+      <p:sp>
+        <p:nvSpPr>
+          <p:cNvPr id="5" name="Text 3"/>
+          <p:cNvSpPr/>
+          <p:nvPr/>
+        </p:nvSpPr>
+        <p:spPr>
+          <a:xfrm>
+            <a:off x="868680" y="1411716"/>
+            <a:ext cx="10451592" cy="822960"/>
+          </a:xfrm>
+          <a:prstGeom prst="rect">
+            <a:avLst/>
+          </a:prstGeom>
+          <a:noFill/>
+          <a:ln/>
+        </p:spPr>
+        <p:txBody>
+          <a:bodyPr wrap="square" lIns="0" tIns="0" rIns="0" bIns="0" rtlCol="0" anchor="ctr"/>
+          <a:lstStyle/>
+          <a:p>
+            <a:pPr marL="0" indent="0" algn="l">
+              <a:buNone/>
+            </a:pPr>
+            <a:r>
+              <a:rPr lang="en-US" sz="1250" b="1" dirty="0">
+                <a:solidFill>
+                  <a:srgbClr val="065A82"/>
                 </a:solidFill>
                 <a:latin typeface="Calibri" pitchFamily="34" charset="0"/>
                 <a:ea typeface="Calibri" pitchFamily="34" charset="-122"/>
                 <a:cs typeface="Calibri" pitchFamily="34" charset="-120"/>
               </a:rPr>
-              <a:t>La pieza que conecta EF Core con una API bien diseñada</a:t>
-            </a:r>
-            <a:endParaRPr lang="en-US" sz="1400" dirty="0"/>
-          </a:p>
-        </p:txBody>
-      </p:sp>
-      <p:sp>
-        <p:nvSpPr>
-          <p:cNvPr id="4" name="Shape 2"/>
-          <p:cNvSpPr/>
-          <p:nvPr/>
-        </p:nvSpPr>
-        <p:spPr>
-          <a:xfrm>
-            <a:off x="548640" y="1737360"/>
-            <a:ext cx="11091672" cy="868680"/>
+              <a:t>Un DTO (Data Transfer Object)</a:t>
+            </a:r>
+            <a:r>
+              <a:rPr lang="en-US" sz="1250" dirty="0">
+                <a:solidFill>
+                  <a:srgbClr val="21295C"/>
+                </a:solidFill>
+                <a:latin typeface="Calibri" pitchFamily="34" charset="0"/>
+                <a:ea typeface="Calibri" pitchFamily="34" charset="-122"/>
+                <a:cs typeface="Calibri" pitchFamily="34" charset="-120"/>
+              </a:rPr>
+              <a:t> es un objeto simple, sin lógica de negocio, que se usa exclusivamente para transportar datos entre capas. No es una entidad de EF Core: es una copia con la forma exacta de lo que el cliente necesita ver o enviar.</a:t>
+            </a:r>
+            <a:endParaRPr lang="en-US" sz="1250" dirty="0"/>
+          </a:p>
+        </p:txBody>
+      </p:sp>
+      <p:sp>
+        <p:nvSpPr>
+          <p:cNvPr id="6" name="Shape 4"/>
+          <p:cNvSpPr/>
+          <p:nvPr/>
+        </p:nvSpPr>
+        <p:spPr>
+          <a:xfrm>
+            <a:off x="548640" y="2417558"/>
+            <a:ext cx="5394960" cy="2468880"/>
           </a:xfrm>
           <a:prstGeom prst="roundRect">
             <a:avLst>
-              <a:gd name="adj" fmla="val 8421"/>
+              <a:gd name="adj" fmla="val 2963"/>
+            </a:avLst>
+          </a:prstGeom>
+          <a:solidFill>
+            <a:srgbClr val="132139"/>
+          </a:solidFill>
+          <a:ln/>
+        </p:spPr>
+        <p:txBody>
+          <a:bodyPr/>
+          <a:lstStyle/>
+          <a:p>
+            <a:endParaRPr lang="es-AR"/>
+          </a:p>
+        </p:txBody>
+      </p:sp>
+      <p:sp>
+        <p:nvSpPr>
+          <p:cNvPr id="7" name="Text 5"/>
+          <p:cNvSpPr/>
+          <p:nvPr/>
+        </p:nvSpPr>
+        <p:spPr>
+          <a:xfrm>
+            <a:off x="822960" y="2563862"/>
+            <a:ext cx="4846320" cy="256032"/>
+          </a:xfrm>
+          <a:prstGeom prst="rect">
+            <a:avLst/>
+          </a:prstGeom>
+          <a:noFill/>
+          <a:ln/>
+        </p:spPr>
+        <p:txBody>
+          <a:bodyPr wrap="square" lIns="0" tIns="0" rIns="0" bIns="0" rtlCol="0" anchor="ctr"/>
+          <a:lstStyle/>
+          <a:p>
+            <a:pPr marL="0" indent="0" algn="l">
+              <a:buNone/>
+            </a:pPr>
+            <a:r>
+              <a:rPr lang="en-US" sz="1100" b="1" dirty="0">
+                <a:solidFill>
+                  <a:srgbClr val="8FA3C9"/>
+                </a:solidFill>
+                <a:latin typeface="Calibri" pitchFamily="34" charset="0"/>
+                <a:ea typeface="Calibri" pitchFamily="34" charset="-122"/>
+                <a:cs typeface="Calibri" pitchFamily="34" charset="-120"/>
+              </a:rPr>
+              <a:t>Entidad (EF Core) — uso interno</a:t>
+            </a:r>
+            <a:endParaRPr lang="en-US" sz="1100" dirty="0"/>
+          </a:p>
+        </p:txBody>
+      </p:sp>
+      <p:sp>
+        <p:nvSpPr>
+          <p:cNvPr id="8" name="Text 6"/>
+          <p:cNvSpPr/>
+          <p:nvPr/>
+        </p:nvSpPr>
+        <p:spPr>
+          <a:xfrm>
+            <a:off x="822960" y="2874758"/>
+            <a:ext cx="4846320" cy="228600"/>
+          </a:xfrm>
+          <a:prstGeom prst="rect">
+            <a:avLst/>
+          </a:prstGeom>
+          <a:noFill/>
+          <a:ln/>
+        </p:spPr>
+        <p:txBody>
+          <a:bodyPr wrap="square" lIns="0" tIns="0" rIns="0" bIns="0" rtlCol="0" anchor="ctr"/>
+          <a:lstStyle/>
+          <a:p>
+            <a:pPr marL="0" indent="0" algn="l">
+              <a:buNone/>
+            </a:pPr>
+            <a:r>
+              <a:rPr lang="en-US" sz="970" dirty="0">
+                <a:solidFill>
+                  <a:srgbClr val="8FC7E8"/>
+                </a:solidFill>
+                <a:latin typeface="Courier New" pitchFamily="34" charset="0"/>
+                <a:ea typeface="Courier New" pitchFamily="34" charset="-122"/>
+                <a:cs typeface="Courier New" pitchFamily="34" charset="-120"/>
+              </a:rPr>
+              <a:t>public class Libro</a:t>
+            </a:r>
+            <a:endParaRPr lang="en-US" sz="970" dirty="0"/>
+          </a:p>
+        </p:txBody>
+      </p:sp>
+      <p:sp>
+        <p:nvSpPr>
+          <p:cNvPr id="9" name="Text 7"/>
+          <p:cNvSpPr/>
+          <p:nvPr/>
+        </p:nvSpPr>
+        <p:spPr>
+          <a:xfrm>
+            <a:off x="822960" y="3117074"/>
+            <a:ext cx="4846320" cy="228600"/>
+          </a:xfrm>
+          <a:prstGeom prst="rect">
+            <a:avLst/>
+          </a:prstGeom>
+          <a:noFill/>
+          <a:ln/>
+        </p:spPr>
+        <p:txBody>
+          <a:bodyPr wrap="square" lIns="0" tIns="0" rIns="0" bIns="0" rtlCol="0" anchor="ctr"/>
+          <a:lstStyle/>
+          <a:p>
+            <a:pPr marL="0" indent="0" algn="l">
+              <a:buNone/>
+            </a:pPr>
+            <a:r>
+              <a:rPr lang="en-US" sz="970" dirty="0">
+                <a:solidFill>
+                  <a:srgbClr val="E8EEF2"/>
+                </a:solidFill>
+                <a:latin typeface="Courier New" pitchFamily="34" charset="0"/>
+                <a:ea typeface="Courier New" pitchFamily="34" charset="-122"/>
+                <a:cs typeface="Courier New" pitchFamily="34" charset="-120"/>
+              </a:rPr>
+              <a:t>{</a:t>
+            </a:r>
+            <a:endParaRPr lang="en-US" sz="970" dirty="0"/>
+          </a:p>
+        </p:txBody>
+      </p:sp>
+      <p:sp>
+        <p:nvSpPr>
+          <p:cNvPr id="10" name="Text 8"/>
+          <p:cNvSpPr/>
+          <p:nvPr/>
+        </p:nvSpPr>
+        <p:spPr>
+          <a:xfrm>
+            <a:off x="822960" y="3359390"/>
+            <a:ext cx="4846320" cy="228600"/>
+          </a:xfrm>
+          <a:prstGeom prst="rect">
+            <a:avLst/>
+          </a:prstGeom>
+          <a:noFill/>
+          <a:ln/>
+        </p:spPr>
+        <p:txBody>
+          <a:bodyPr wrap="square" lIns="0" tIns="0" rIns="0" bIns="0" rtlCol="0" anchor="ctr"/>
+          <a:lstStyle/>
+          <a:p>
+            <a:pPr marL="0" indent="0" algn="l">
+              <a:buNone/>
+            </a:pPr>
+            <a:r>
+              <a:rPr lang="en-US" sz="970" dirty="0">
+                <a:solidFill>
+                  <a:srgbClr val="E8EEF2"/>
+                </a:solidFill>
+                <a:latin typeface="Courier New" pitchFamily="34" charset="0"/>
+                <a:ea typeface="Courier New" pitchFamily="34" charset="-122"/>
+                <a:cs typeface="Courier New" pitchFamily="34" charset="-120"/>
+              </a:rPr>
+              <a:t>  public int Id { get; set; }</a:t>
+            </a:r>
+            <a:endParaRPr lang="en-US" sz="970" dirty="0"/>
+          </a:p>
+        </p:txBody>
+      </p:sp>
+      <p:sp>
+        <p:nvSpPr>
+          <p:cNvPr id="11" name="Text 9"/>
+          <p:cNvSpPr/>
+          <p:nvPr/>
+        </p:nvSpPr>
+        <p:spPr>
+          <a:xfrm>
+            <a:off x="822960" y="3601706"/>
+            <a:ext cx="4846320" cy="228600"/>
+          </a:xfrm>
+          <a:prstGeom prst="rect">
+            <a:avLst/>
+          </a:prstGeom>
+          <a:noFill/>
+          <a:ln/>
+        </p:spPr>
+        <p:txBody>
+          <a:bodyPr wrap="square" lIns="0" tIns="0" rIns="0" bIns="0" rtlCol="0" anchor="ctr"/>
+          <a:lstStyle/>
+          <a:p>
+            <a:pPr marL="0" indent="0" algn="l">
+              <a:buNone/>
+            </a:pPr>
+            <a:r>
+              <a:rPr lang="en-US" sz="970" dirty="0">
+                <a:solidFill>
+                  <a:srgbClr val="E8EEF2"/>
+                </a:solidFill>
+                <a:latin typeface="Courier New" pitchFamily="34" charset="0"/>
+                <a:ea typeface="Courier New" pitchFamily="34" charset="-122"/>
+                <a:cs typeface="Courier New" pitchFamily="34" charset="-120"/>
+              </a:rPr>
+              <a:t>  public string Titulo { get; set; }</a:t>
+            </a:r>
+            <a:endParaRPr lang="en-US" sz="970" dirty="0"/>
+          </a:p>
+        </p:txBody>
+      </p:sp>
+      <p:sp>
+        <p:nvSpPr>
+          <p:cNvPr id="12" name="Text 10"/>
+          <p:cNvSpPr/>
+          <p:nvPr/>
+        </p:nvSpPr>
+        <p:spPr>
+          <a:xfrm>
+            <a:off x="822960" y="3844022"/>
+            <a:ext cx="4846320" cy="228600"/>
+          </a:xfrm>
+          <a:prstGeom prst="rect">
+            <a:avLst/>
+          </a:prstGeom>
+          <a:noFill/>
+          <a:ln/>
+        </p:spPr>
+        <p:txBody>
+          <a:bodyPr wrap="square" lIns="0" tIns="0" rIns="0" bIns="0" rtlCol="0" anchor="ctr"/>
+          <a:lstStyle/>
+          <a:p>
+            <a:pPr marL="0" indent="0" algn="l">
+              <a:buNone/>
+            </a:pPr>
+            <a:r>
+              <a:rPr lang="en-US" sz="970" dirty="0">
+                <a:solidFill>
+                  <a:srgbClr val="8FD694"/>
+                </a:solidFill>
+                <a:latin typeface="Courier New" pitchFamily="34" charset="0"/>
+                <a:ea typeface="Courier New" pitchFamily="34" charset="-122"/>
+                <a:cs typeface="Courier New" pitchFamily="34" charset="-120"/>
+              </a:rPr>
+              <a:t>  public decimal CostoInterno { get; set; }</a:t>
+            </a:r>
+            <a:endParaRPr lang="en-US" sz="970" dirty="0"/>
+          </a:p>
+        </p:txBody>
+      </p:sp>
+      <p:sp>
+        <p:nvSpPr>
+          <p:cNvPr id="13" name="Text 11"/>
+          <p:cNvSpPr/>
+          <p:nvPr/>
+        </p:nvSpPr>
+        <p:spPr>
+          <a:xfrm>
+            <a:off x="822960" y="4086338"/>
+            <a:ext cx="4846320" cy="228600"/>
+          </a:xfrm>
+          <a:prstGeom prst="rect">
+            <a:avLst/>
+          </a:prstGeom>
+          <a:noFill/>
+          <a:ln/>
+        </p:spPr>
+        <p:txBody>
+          <a:bodyPr wrap="square" lIns="0" tIns="0" rIns="0" bIns="0" rtlCol="0" anchor="ctr"/>
+          <a:lstStyle/>
+          <a:p>
+            <a:pPr marL="0" indent="0" algn="l">
+              <a:buNone/>
+            </a:pPr>
+            <a:r>
+              <a:rPr lang="en-US" sz="970" dirty="0">
+                <a:solidFill>
+                  <a:srgbClr val="E8EEF2"/>
+                </a:solidFill>
+                <a:latin typeface="Courier New" pitchFamily="34" charset="0"/>
+                <a:ea typeface="Courier New" pitchFamily="34" charset="-122"/>
+                <a:cs typeface="Courier New" pitchFamily="34" charset="-120"/>
+              </a:rPr>
+              <a:t>  public int AutorId { get; set; }</a:t>
+            </a:r>
+            <a:endParaRPr lang="en-US" sz="970" dirty="0"/>
+          </a:p>
+        </p:txBody>
+      </p:sp>
+      <p:sp>
+        <p:nvSpPr>
+          <p:cNvPr id="14" name="Text 12"/>
+          <p:cNvSpPr/>
+          <p:nvPr/>
+        </p:nvSpPr>
+        <p:spPr>
+          <a:xfrm>
+            <a:off x="822960" y="4328654"/>
+            <a:ext cx="4846320" cy="228600"/>
+          </a:xfrm>
+          <a:prstGeom prst="rect">
+            <a:avLst/>
+          </a:prstGeom>
+          <a:noFill/>
+          <a:ln/>
+        </p:spPr>
+        <p:txBody>
+          <a:bodyPr wrap="square" lIns="0" tIns="0" rIns="0" bIns="0" rtlCol="0" anchor="ctr"/>
+          <a:lstStyle/>
+          <a:p>
+            <a:pPr marL="0" indent="0" algn="l">
+              <a:buNone/>
+            </a:pPr>
+            <a:r>
+              <a:rPr lang="en-US" sz="970" dirty="0">
+                <a:solidFill>
+                  <a:srgbClr val="8FD694"/>
+                </a:solidFill>
+                <a:latin typeface="Courier New" pitchFamily="34" charset="0"/>
+                <a:ea typeface="Courier New" pitchFamily="34" charset="-122"/>
+                <a:cs typeface="Courier New" pitchFamily="34" charset="-120"/>
+              </a:rPr>
+              <a:t>  public Autor Autor { get; set; }</a:t>
+            </a:r>
+            <a:endParaRPr lang="en-US" sz="970" dirty="0"/>
+          </a:p>
+        </p:txBody>
+      </p:sp>
+      <p:sp>
+        <p:nvSpPr>
+          <p:cNvPr id="15" name="Text 13"/>
+          <p:cNvSpPr/>
+          <p:nvPr/>
+        </p:nvSpPr>
+        <p:spPr>
+          <a:xfrm>
+            <a:off x="822960" y="4570970"/>
+            <a:ext cx="4846320" cy="228600"/>
+          </a:xfrm>
+          <a:prstGeom prst="rect">
+            <a:avLst/>
+          </a:prstGeom>
+          <a:noFill/>
+          <a:ln/>
+        </p:spPr>
+        <p:txBody>
+          <a:bodyPr wrap="square" lIns="0" tIns="0" rIns="0" bIns="0" rtlCol="0" anchor="ctr"/>
+          <a:lstStyle/>
+          <a:p>
+            <a:pPr marL="0" indent="0" algn="l">
+              <a:buNone/>
+            </a:pPr>
+            <a:r>
+              <a:rPr lang="en-US" sz="970" dirty="0">
+                <a:solidFill>
+                  <a:srgbClr val="E8EEF2"/>
+                </a:solidFill>
+                <a:latin typeface="Courier New" pitchFamily="34" charset="0"/>
+                <a:ea typeface="Courier New" pitchFamily="34" charset="-122"/>
+                <a:cs typeface="Courier New" pitchFamily="34" charset="-120"/>
+              </a:rPr>
+              <a:t>}</a:t>
+            </a:r>
+            <a:endParaRPr lang="en-US" sz="970" dirty="0"/>
+          </a:p>
+        </p:txBody>
+      </p:sp>
+      <p:sp>
+        <p:nvSpPr>
+          <p:cNvPr id="16" name="Shape 14"/>
+          <p:cNvSpPr/>
+          <p:nvPr/>
+        </p:nvSpPr>
+        <p:spPr>
+          <a:xfrm>
+            <a:off x="6263640" y="2417558"/>
+            <a:ext cx="5394960" cy="2468880"/>
+          </a:xfrm>
+          <a:prstGeom prst="roundRect">
+            <a:avLst>
+              <a:gd name="adj" fmla="val 2963"/>
+            </a:avLst>
+          </a:prstGeom>
+          <a:solidFill>
+            <a:srgbClr val="132139"/>
+          </a:solidFill>
+          <a:ln/>
+        </p:spPr>
+        <p:txBody>
+          <a:bodyPr/>
+          <a:lstStyle/>
+          <a:p>
+            <a:endParaRPr lang="es-AR"/>
+          </a:p>
+        </p:txBody>
+      </p:sp>
+      <p:sp>
+        <p:nvSpPr>
+          <p:cNvPr id="17" name="Text 15"/>
+          <p:cNvSpPr/>
+          <p:nvPr/>
+        </p:nvSpPr>
+        <p:spPr>
+          <a:xfrm>
+            <a:off x="6537960" y="2563862"/>
+            <a:ext cx="4846320" cy="256032"/>
+          </a:xfrm>
+          <a:prstGeom prst="rect">
+            <a:avLst/>
+          </a:prstGeom>
+          <a:noFill/>
+          <a:ln/>
+        </p:spPr>
+        <p:txBody>
+          <a:bodyPr wrap="square" lIns="0" tIns="0" rIns="0" bIns="0" rtlCol="0" anchor="ctr"/>
+          <a:lstStyle/>
+          <a:p>
+            <a:pPr marL="0" indent="0" algn="l">
+              <a:buNone/>
+            </a:pPr>
+            <a:r>
+              <a:rPr lang="en-US" sz="1100" b="1" dirty="0">
+                <a:solidFill>
+                  <a:srgbClr val="8FA3C9"/>
+                </a:solidFill>
+                <a:latin typeface="Calibri" pitchFamily="34" charset="0"/>
+                <a:ea typeface="Calibri" pitchFamily="34" charset="-122"/>
+                <a:cs typeface="Calibri" pitchFamily="34" charset="-120"/>
+              </a:rPr>
+              <a:t>DTO — contrato público de la API</a:t>
+            </a:r>
+            <a:endParaRPr lang="en-US" sz="1100" dirty="0"/>
+          </a:p>
+        </p:txBody>
+      </p:sp>
+      <p:sp>
+        <p:nvSpPr>
+          <p:cNvPr id="18" name="Text 16"/>
+          <p:cNvSpPr/>
+          <p:nvPr/>
+        </p:nvSpPr>
+        <p:spPr>
+          <a:xfrm>
+            <a:off x="6537960" y="2874758"/>
+            <a:ext cx="4846320" cy="228600"/>
+          </a:xfrm>
+          <a:prstGeom prst="rect">
+            <a:avLst/>
+          </a:prstGeom>
+          <a:noFill/>
+          <a:ln/>
+        </p:spPr>
+        <p:txBody>
+          <a:bodyPr wrap="square" lIns="0" tIns="0" rIns="0" bIns="0" rtlCol="0" anchor="ctr"/>
+          <a:lstStyle/>
+          <a:p>
+            <a:pPr marL="0" indent="0" algn="l">
+              <a:buNone/>
+            </a:pPr>
+            <a:r>
+              <a:rPr lang="en-US" sz="970" dirty="0">
+                <a:solidFill>
+                  <a:srgbClr val="8FC7E8"/>
+                </a:solidFill>
+                <a:latin typeface="Courier New" pitchFamily="34" charset="0"/>
+                <a:ea typeface="Courier New" pitchFamily="34" charset="-122"/>
+                <a:cs typeface="Courier New" pitchFamily="34" charset="-120"/>
+              </a:rPr>
+              <a:t>public class LibroDto</a:t>
+            </a:r>
+            <a:endParaRPr lang="en-US" sz="970" dirty="0"/>
+          </a:p>
+        </p:txBody>
+      </p:sp>
+      <p:sp>
+        <p:nvSpPr>
+          <p:cNvPr id="19" name="Text 17"/>
+          <p:cNvSpPr/>
+          <p:nvPr/>
+        </p:nvSpPr>
+        <p:spPr>
+          <a:xfrm>
+            <a:off x="6537960" y="3117074"/>
+            <a:ext cx="4846320" cy="228600"/>
+          </a:xfrm>
+          <a:prstGeom prst="rect">
+            <a:avLst/>
+          </a:prstGeom>
+          <a:noFill/>
+          <a:ln/>
+        </p:spPr>
+        <p:txBody>
+          <a:bodyPr wrap="square" lIns="0" tIns="0" rIns="0" bIns="0" rtlCol="0" anchor="ctr"/>
+          <a:lstStyle/>
+          <a:p>
+            <a:pPr marL="0" indent="0" algn="l">
+              <a:buNone/>
+            </a:pPr>
+            <a:r>
+              <a:rPr lang="en-US" sz="970" dirty="0">
+                <a:solidFill>
+                  <a:srgbClr val="E8EEF2"/>
+                </a:solidFill>
+                <a:latin typeface="Courier New" pitchFamily="34" charset="0"/>
+                <a:ea typeface="Courier New" pitchFamily="34" charset="-122"/>
+                <a:cs typeface="Courier New" pitchFamily="34" charset="-120"/>
+              </a:rPr>
+              <a:t>{</a:t>
+            </a:r>
+            <a:endParaRPr lang="en-US" sz="970" dirty="0"/>
+          </a:p>
+        </p:txBody>
+      </p:sp>
+      <p:sp>
+        <p:nvSpPr>
+          <p:cNvPr id="20" name="Text 18"/>
+          <p:cNvSpPr/>
+          <p:nvPr/>
+        </p:nvSpPr>
+        <p:spPr>
+          <a:xfrm>
+            <a:off x="6537960" y="3359390"/>
+            <a:ext cx="4846320" cy="228600"/>
+          </a:xfrm>
+          <a:prstGeom prst="rect">
+            <a:avLst/>
+          </a:prstGeom>
+          <a:noFill/>
+          <a:ln/>
+        </p:spPr>
+        <p:txBody>
+          <a:bodyPr wrap="square" lIns="0" tIns="0" rIns="0" bIns="0" rtlCol="0" anchor="ctr"/>
+          <a:lstStyle/>
+          <a:p>
+            <a:pPr marL="0" indent="0" algn="l">
+              <a:buNone/>
+            </a:pPr>
+            <a:r>
+              <a:rPr lang="en-US" sz="970" dirty="0">
+                <a:solidFill>
+                  <a:srgbClr val="E8EEF2"/>
+                </a:solidFill>
+                <a:latin typeface="Courier New" pitchFamily="34" charset="0"/>
+                <a:ea typeface="Courier New" pitchFamily="34" charset="-122"/>
+                <a:cs typeface="Courier New" pitchFamily="34" charset="-120"/>
+              </a:rPr>
+              <a:t>  public int Id { get; set; }</a:t>
+            </a:r>
+            <a:endParaRPr lang="en-US" sz="970" dirty="0"/>
+          </a:p>
+        </p:txBody>
+      </p:sp>
+      <p:sp>
+        <p:nvSpPr>
+          <p:cNvPr id="21" name="Text 19"/>
+          <p:cNvSpPr/>
+          <p:nvPr/>
+        </p:nvSpPr>
+        <p:spPr>
+          <a:xfrm>
+            <a:off x="6537960" y="3601706"/>
+            <a:ext cx="4846320" cy="228600"/>
+          </a:xfrm>
+          <a:prstGeom prst="rect">
+            <a:avLst/>
+          </a:prstGeom>
+          <a:noFill/>
+          <a:ln/>
+        </p:spPr>
+        <p:txBody>
+          <a:bodyPr wrap="square" lIns="0" tIns="0" rIns="0" bIns="0" rtlCol="0" anchor="ctr"/>
+          <a:lstStyle/>
+          <a:p>
+            <a:pPr marL="0" indent="0" algn="l">
+              <a:buNone/>
+            </a:pPr>
+            <a:r>
+              <a:rPr lang="en-US" sz="970" dirty="0">
+                <a:solidFill>
+                  <a:srgbClr val="E8EEF2"/>
+                </a:solidFill>
+                <a:latin typeface="Courier New" pitchFamily="34" charset="0"/>
+                <a:ea typeface="Courier New" pitchFamily="34" charset="-122"/>
+                <a:cs typeface="Courier New" pitchFamily="34" charset="-120"/>
+              </a:rPr>
+              <a:t>  public string Titulo { get; set; }</a:t>
+            </a:r>
+            <a:endParaRPr lang="en-US" sz="970" dirty="0"/>
+          </a:p>
+        </p:txBody>
+      </p:sp>
+      <p:sp>
+        <p:nvSpPr>
+          <p:cNvPr id="22" name="Text 20"/>
+          <p:cNvSpPr/>
+          <p:nvPr/>
+        </p:nvSpPr>
+        <p:spPr>
+          <a:xfrm>
+            <a:off x="6537960" y="3844022"/>
+            <a:ext cx="4846320" cy="228600"/>
+          </a:xfrm>
+          <a:prstGeom prst="rect">
+            <a:avLst/>
+          </a:prstGeom>
+          <a:noFill/>
+          <a:ln/>
+        </p:spPr>
+        <p:txBody>
+          <a:bodyPr wrap="square" lIns="0" tIns="0" rIns="0" bIns="0" rtlCol="0" anchor="ctr"/>
+          <a:lstStyle/>
+          <a:p>
+            <a:pPr marL="0" indent="0" algn="l">
+              <a:buNone/>
+            </a:pPr>
+            <a:r>
+              <a:rPr lang="en-US" sz="970" dirty="0">
+                <a:solidFill>
+                  <a:srgbClr val="8FD694"/>
+                </a:solidFill>
+                <a:latin typeface="Courier New" pitchFamily="34" charset="0"/>
+                <a:ea typeface="Courier New" pitchFamily="34" charset="-122"/>
+                <a:cs typeface="Courier New" pitchFamily="34" charset="-120"/>
+              </a:rPr>
+              <a:t>  public string NombreAutor { get; set; }</a:t>
+            </a:r>
+            <a:endParaRPr lang="en-US" sz="970" dirty="0"/>
+          </a:p>
+        </p:txBody>
+      </p:sp>
+      <p:sp>
+        <p:nvSpPr>
+          <p:cNvPr id="23" name="Text 21"/>
+          <p:cNvSpPr/>
+          <p:nvPr/>
+        </p:nvSpPr>
+        <p:spPr>
+          <a:xfrm>
+            <a:off x="6537960" y="4086338"/>
+            <a:ext cx="4846320" cy="228600"/>
+          </a:xfrm>
+          <a:prstGeom prst="rect">
+            <a:avLst/>
+          </a:prstGeom>
+          <a:noFill/>
+          <a:ln/>
+        </p:spPr>
+        <p:txBody>
+          <a:bodyPr wrap="square" lIns="0" tIns="0" rIns="0" bIns="0" rtlCol="0" anchor="ctr"/>
+          <a:lstStyle/>
+          <a:p>
+            <a:pPr marL="0" indent="0" algn="l">
+              <a:buNone/>
+            </a:pPr>
+            <a:r>
+              <a:rPr lang="en-US" sz="970" dirty="0">
+                <a:solidFill>
+                  <a:srgbClr val="E8EEF2"/>
+                </a:solidFill>
+                <a:latin typeface="Courier New" pitchFamily="34" charset="0"/>
+                <a:ea typeface="Courier New" pitchFamily="34" charset="-122"/>
+                <a:cs typeface="Courier New" pitchFamily="34" charset="-120"/>
+              </a:rPr>
+              <a:t>}</a:t>
+            </a:r>
+            <a:endParaRPr lang="en-US" sz="970" dirty="0"/>
+          </a:p>
+        </p:txBody>
+      </p:sp>
+      <p:sp>
+        <p:nvSpPr>
+          <p:cNvPr id="24" name="Text 22"/>
+          <p:cNvSpPr/>
+          <p:nvPr/>
+        </p:nvSpPr>
+        <p:spPr>
+          <a:xfrm>
+            <a:off x="6537960" y="4328654"/>
+            <a:ext cx="4846320" cy="228600"/>
+          </a:xfrm>
+          <a:prstGeom prst="rect">
+            <a:avLst/>
+          </a:prstGeom>
+          <a:noFill/>
+          <a:ln/>
+        </p:spPr>
+        <p:txBody>
+          <a:bodyPr wrap="square" lIns="0" tIns="0" rIns="0" bIns="0" rtlCol="0" anchor="ctr"/>
+          <a:lstStyle/>
+          <a:p>
+            <a:pPr marL="0" indent="0" algn="l">
+              <a:buNone/>
+            </a:pPr>
+            <a:endParaRPr lang="en-US" sz="970" dirty="0"/>
+          </a:p>
+        </p:txBody>
+      </p:sp>
+      <p:sp>
+        <p:nvSpPr>
+          <p:cNvPr id="25" name="Text 23"/>
+          <p:cNvSpPr/>
+          <p:nvPr/>
+        </p:nvSpPr>
+        <p:spPr>
+          <a:xfrm>
+            <a:off x="6537960" y="4570970"/>
+            <a:ext cx="4846320" cy="228600"/>
+          </a:xfrm>
+          <a:prstGeom prst="rect">
+            <a:avLst/>
+          </a:prstGeom>
+          <a:noFill/>
+          <a:ln/>
+        </p:spPr>
+        <p:txBody>
+          <a:bodyPr wrap="square" lIns="0" tIns="0" rIns="0" bIns="0" rtlCol="0" anchor="ctr"/>
+          <a:lstStyle/>
+          <a:p>
+            <a:pPr marL="0" indent="0" algn="l">
+              <a:buNone/>
+            </a:pPr>
+            <a:r>
+              <a:rPr lang="en-US" sz="970" dirty="0">
+                <a:solidFill>
+                  <a:srgbClr val="8FA3C9"/>
+                </a:solidFill>
+                <a:latin typeface="Courier New" pitchFamily="34" charset="0"/>
+                <a:ea typeface="Courier New" pitchFamily="34" charset="-122"/>
+                <a:cs typeface="Courier New" pitchFamily="34" charset="-120"/>
+              </a:rPr>
+              <a:t>// Sin CostoInterno, sin ciclos</a:t>
+            </a:r>
+            <a:endParaRPr lang="en-US" sz="970" dirty="0"/>
+          </a:p>
+        </p:txBody>
+      </p:sp>
+      <p:sp>
+        <p:nvSpPr>
+          <p:cNvPr id="26" name="Shape 24"/>
+          <p:cNvSpPr/>
+          <p:nvPr/>
+        </p:nvSpPr>
+        <p:spPr>
+          <a:xfrm>
+            <a:off x="548640" y="5088915"/>
+            <a:ext cx="2606040" cy="960120"/>
+          </a:xfrm>
+          <a:prstGeom prst="roundRect">
+            <a:avLst>
+              <a:gd name="adj" fmla="val 6667"/>
             </a:avLst>
           </a:prstGeom>
           <a:solidFill>
@@ -4969,72 +5849,207 @@
       </p:sp>
       <p:sp>
         <p:nvSpPr>
-          <p:cNvPr id="5" name="Text 3"/>
-          <p:cNvSpPr/>
-          <p:nvPr/>
-        </p:nvSpPr>
-        <p:spPr>
-          <a:xfrm>
-            <a:off x="868680" y="1737360"/>
-            <a:ext cx="10451592" cy="868680"/>
-          </a:xfrm>
-          <a:prstGeom prst="rect">
-            <a:avLst/>
-          </a:prstGeom>
-          <a:noFill/>
-          <a:ln/>
-        </p:spPr>
-        <p:txBody>
-          <a:bodyPr wrap="square" lIns="0" tIns="0" rIns="0" bIns="0" rtlCol="0" anchor="ctr"/>
-          <a:lstStyle/>
-          <a:p>
-            <a:pPr marL="0" indent="0" algn="l">
-              <a:buNone/>
-            </a:pPr>
-            <a:r>
-              <a:rPr lang="en-US" sz="1300" b="1" dirty="0">
+          <p:cNvPr id="27" name="Text 25"/>
+          <p:cNvSpPr/>
+          <p:nvPr/>
+        </p:nvSpPr>
+        <p:spPr>
+          <a:xfrm>
+            <a:off x="676656" y="5180355"/>
+            <a:ext cx="2350008" cy="274320"/>
+          </a:xfrm>
+          <a:prstGeom prst="rect">
+            <a:avLst/>
+          </a:prstGeom>
+          <a:noFill/>
+          <a:ln/>
+        </p:spPr>
+        <p:txBody>
+          <a:bodyPr wrap="square" lIns="0" tIns="0" rIns="0" bIns="0" rtlCol="0" anchor="ctr"/>
+          <a:lstStyle/>
+          <a:p>
+            <a:pPr marL="0" indent="0" algn="l">
+              <a:buNone/>
+            </a:pPr>
+            <a:r>
+              <a:rPr lang="en-US" sz="1050" b="1" dirty="0">
                 <a:solidFill>
                   <a:srgbClr val="065A82"/>
+                </a:solidFill>
+                <a:latin typeface="Cambria" pitchFamily="34" charset="0"/>
+                <a:ea typeface="Cambria" pitchFamily="34" charset="-122"/>
+                <a:cs typeface="Cambria" pitchFamily="34" charset="-120"/>
+              </a:rPr>
+              <a:t>Oculta datos sensibles</a:t>
+            </a:r>
+            <a:endParaRPr lang="en-US" sz="1050" dirty="0"/>
+          </a:p>
+        </p:txBody>
+      </p:sp>
+      <p:sp>
+        <p:nvSpPr>
+          <p:cNvPr id="28" name="Text 26"/>
+          <p:cNvSpPr/>
+          <p:nvPr/>
+        </p:nvSpPr>
+        <p:spPr>
+          <a:xfrm>
+            <a:off x="676656" y="5454675"/>
+            <a:ext cx="2350008" cy="548640"/>
+          </a:xfrm>
+          <a:prstGeom prst="rect">
+            <a:avLst/>
+          </a:prstGeom>
+          <a:noFill/>
+          <a:ln/>
+        </p:spPr>
+        <p:txBody>
+          <a:bodyPr wrap="square" lIns="0" tIns="0" rIns="0" bIns="0" rtlCol="0" anchor="ctr"/>
+          <a:lstStyle/>
+          <a:p>
+            <a:pPr marL="0" indent="0" algn="l">
+              <a:buNone/>
+            </a:pPr>
+            <a:r>
+              <a:rPr lang="en-US" sz="830" dirty="0">
+                <a:solidFill>
+                  <a:srgbClr val="5C6B73"/>
                 </a:solidFill>
                 <a:latin typeface="Calibri" pitchFamily="34" charset="0"/>
                 <a:ea typeface="Calibri" pitchFamily="34" charset="-122"/>
                 <a:cs typeface="Calibri" pitchFamily="34" charset="-120"/>
               </a:rPr>
-              <a:t>AutoMapper</a:t>
-            </a:r>
-            <a:r>
-              <a:rPr lang="en-US" sz="1300" dirty="0">
-                <a:solidFill>
-                  <a:srgbClr val="21295C"/>
+              <a:t>Costos internos, flags administrativos o cualquier columna que el cliente no debería ver.</a:t>
+            </a:r>
+            <a:endParaRPr lang="en-US" sz="830" dirty="0"/>
+          </a:p>
+        </p:txBody>
+      </p:sp>
+      <p:sp>
+        <p:nvSpPr>
+          <p:cNvPr id="29" name="Shape 27"/>
+          <p:cNvSpPr/>
+          <p:nvPr/>
+        </p:nvSpPr>
+        <p:spPr>
+          <a:xfrm>
+            <a:off x="3410712" y="5088915"/>
+            <a:ext cx="2606040" cy="960120"/>
+          </a:xfrm>
+          <a:prstGeom prst="roundRect">
+            <a:avLst>
+              <a:gd name="adj" fmla="val 6667"/>
+            </a:avLst>
+          </a:prstGeom>
+          <a:solidFill>
+            <a:srgbClr val="E7F1F6"/>
+          </a:solidFill>
+          <a:ln/>
+        </p:spPr>
+        <p:txBody>
+          <a:bodyPr/>
+          <a:lstStyle/>
+          <a:p>
+            <a:endParaRPr lang="es-AR"/>
+          </a:p>
+        </p:txBody>
+      </p:sp>
+      <p:sp>
+        <p:nvSpPr>
+          <p:cNvPr id="30" name="Text 28"/>
+          <p:cNvSpPr/>
+          <p:nvPr/>
+        </p:nvSpPr>
+        <p:spPr>
+          <a:xfrm>
+            <a:off x="3538728" y="5180355"/>
+            <a:ext cx="2350008" cy="274320"/>
+          </a:xfrm>
+          <a:prstGeom prst="rect">
+            <a:avLst/>
+          </a:prstGeom>
+          <a:noFill/>
+          <a:ln/>
+        </p:spPr>
+        <p:txBody>
+          <a:bodyPr wrap="square" lIns="0" tIns="0" rIns="0" bIns="0" rtlCol="0" anchor="ctr"/>
+          <a:lstStyle/>
+          <a:p>
+            <a:pPr marL="0" indent="0" algn="l">
+              <a:buNone/>
+            </a:pPr>
+            <a:r>
+              <a:rPr lang="en-US" sz="1050" b="1" dirty="0">
+                <a:solidFill>
+                  <a:srgbClr val="065A82"/>
+                </a:solidFill>
+                <a:latin typeface="Cambria" pitchFamily="34" charset="0"/>
+                <a:ea typeface="Cambria" pitchFamily="34" charset="-122"/>
+                <a:cs typeface="Cambria" pitchFamily="34" charset="-120"/>
+              </a:rPr>
+              <a:t>Evita referencias circulares</a:t>
+            </a:r>
+            <a:endParaRPr lang="en-US" sz="1050" dirty="0"/>
+          </a:p>
+        </p:txBody>
+      </p:sp>
+      <p:sp>
+        <p:nvSpPr>
+          <p:cNvPr id="31" name="Text 29"/>
+          <p:cNvSpPr/>
+          <p:nvPr/>
+        </p:nvSpPr>
+        <p:spPr>
+          <a:xfrm>
+            <a:off x="3538728" y="5454675"/>
+            <a:ext cx="2350008" cy="548640"/>
+          </a:xfrm>
+          <a:prstGeom prst="rect">
+            <a:avLst/>
+          </a:prstGeom>
+          <a:noFill/>
+          <a:ln/>
+        </p:spPr>
+        <p:txBody>
+          <a:bodyPr wrap="square" lIns="0" tIns="0" rIns="0" bIns="0" rtlCol="0" anchor="ctr"/>
+          <a:lstStyle/>
+          <a:p>
+            <a:pPr marL="0" indent="0" algn="l">
+              <a:buNone/>
+            </a:pPr>
+            <a:r>
+              <a:rPr lang="en-US" sz="830" dirty="0">
+                <a:solidFill>
+                  <a:srgbClr val="5C6B73"/>
                 </a:solidFill>
                 <a:latin typeface="Calibri" pitchFamily="34" charset="0"/>
                 <a:ea typeface="Calibri" pitchFamily="34" charset="-122"/>
                 <a:cs typeface="Calibri" pitchFamily="34" charset="-120"/>
               </a:rPr>
-              <a:t> es una librería de mapeo objeto-objeto para .NET. Se usa junto con EF Core para convertir automáticamente entidades del modelo en DTOs (Data Transfer Objects), evitando escribir a mano el mismo código de asignación de propiedades una y otra vez.</a:t>
-            </a:r>
-            <a:endParaRPr lang="en-US" sz="1300" dirty="0"/>
-          </a:p>
-        </p:txBody>
-      </p:sp>
-      <p:sp>
-        <p:nvSpPr>
-          <p:cNvPr id="6" name="Shape 4"/>
-          <p:cNvSpPr/>
-          <p:nvPr/>
-        </p:nvSpPr>
-        <p:spPr>
-          <a:xfrm>
-            <a:off x="1156716" y="2880360"/>
-            <a:ext cx="2743200" cy="822960"/>
+              <a:t>Serializar Libro→Autor→Libros→Autor... rompe el serializador JSON.</a:t>
+            </a:r>
+            <a:endParaRPr lang="en-US" sz="830" dirty="0"/>
+          </a:p>
+        </p:txBody>
+      </p:sp>
+      <p:sp>
+        <p:nvSpPr>
+          <p:cNvPr id="32" name="Shape 30"/>
+          <p:cNvSpPr/>
+          <p:nvPr/>
+        </p:nvSpPr>
+        <p:spPr>
+          <a:xfrm>
+            <a:off x="6272784" y="5088915"/>
+            <a:ext cx="2606040" cy="960120"/>
           </a:xfrm>
           <a:prstGeom prst="roundRect">
             <a:avLst>
-              <a:gd name="adj" fmla="val 11111"/>
+              <a:gd name="adj" fmla="val 6667"/>
             </a:avLst>
           </a:prstGeom>
           <a:solidFill>
-            <a:srgbClr val="065A82"/>
+            <a:srgbClr val="E7F1F6"/>
           </a:solidFill>
           <a:ln/>
         </p:spPr>
@@ -5048,100 +6063,100 @@
       </p:sp>
       <p:sp>
         <p:nvSpPr>
-          <p:cNvPr id="7" name="Text 5"/>
-          <p:cNvSpPr/>
-          <p:nvPr/>
-        </p:nvSpPr>
-        <p:spPr>
-          <a:xfrm>
-            <a:off x="1156716" y="2880360"/>
-            <a:ext cx="2743200" cy="822960"/>
-          </a:xfrm>
-          <a:prstGeom prst="rect">
-            <a:avLst/>
-          </a:prstGeom>
-          <a:noFill/>
-          <a:ln/>
-        </p:spPr>
-        <p:txBody>
-          <a:bodyPr wrap="square" lIns="0" tIns="0" rIns="0" bIns="0" rtlCol="0" anchor="ctr"/>
-          <a:lstStyle/>
-          <a:p>
-            <a:pPr marL="0" indent="0" algn="ctr">
-              <a:buNone/>
-            </a:pPr>
-            <a:r>
-              <a:rPr lang="en-US" sz="1200" dirty="0">
-                <a:solidFill>
-                  <a:srgbClr val="E8EEF2"/>
-                </a:solidFill>
-                <a:latin typeface="Courier New" pitchFamily="34" charset="0"/>
-                <a:ea typeface="Courier New" pitchFamily="34" charset="-122"/>
-                <a:cs typeface="Courier New" pitchFamily="34" charset="-120"/>
-              </a:rPr>
-              <a:t>class Libro (Entity)</a:t>
-            </a:r>
-            <a:endParaRPr lang="en-US" sz="1200" dirty="0"/>
-          </a:p>
-        </p:txBody>
-      </p:sp>
-      <p:sp>
-        <p:nvSpPr>
-          <p:cNvPr id="8" name="Text 6"/>
-          <p:cNvSpPr/>
-          <p:nvPr/>
-        </p:nvSpPr>
-        <p:spPr>
-          <a:xfrm>
-            <a:off x="3899916" y="2880360"/>
-            <a:ext cx="822960" cy="822960"/>
-          </a:xfrm>
-          <a:prstGeom prst="rect">
-            <a:avLst/>
-          </a:prstGeom>
-          <a:noFill/>
-          <a:ln/>
-        </p:spPr>
-        <p:txBody>
-          <a:bodyPr wrap="square" lIns="0" tIns="0" rIns="0" bIns="0" rtlCol="0" anchor="ctr"/>
-          <a:lstStyle/>
-          <a:p>
-            <a:pPr marL="0" indent="0" algn="ctr">
-              <a:buNone/>
-            </a:pPr>
-            <a:r>
-              <a:rPr lang="en-US" sz="2200" dirty="0">
-                <a:solidFill>
-                  <a:srgbClr val="1C7293"/>
+          <p:cNvPr id="33" name="Text 31"/>
+          <p:cNvSpPr/>
+          <p:nvPr/>
+        </p:nvSpPr>
+        <p:spPr>
+          <a:xfrm>
+            <a:off x="6400800" y="5180355"/>
+            <a:ext cx="2350008" cy="274320"/>
+          </a:xfrm>
+          <a:prstGeom prst="rect">
+            <a:avLst/>
+          </a:prstGeom>
+          <a:noFill/>
+          <a:ln/>
+        </p:spPr>
+        <p:txBody>
+          <a:bodyPr wrap="square" lIns="0" tIns="0" rIns="0" bIns="0" rtlCol="0" anchor="ctr"/>
+          <a:lstStyle/>
+          <a:p>
+            <a:pPr marL="0" indent="0" algn="l">
+              <a:buNone/>
+            </a:pPr>
+            <a:r>
+              <a:rPr lang="en-US" sz="1050" b="1" dirty="0">
+                <a:solidFill>
+                  <a:srgbClr val="065A82"/>
+                </a:solidFill>
+                <a:latin typeface="Cambria" pitchFamily="34" charset="0"/>
+                <a:ea typeface="Cambria" pitchFamily="34" charset="-122"/>
+                <a:cs typeface="Cambria" pitchFamily="34" charset="-120"/>
+              </a:rPr>
+              <a:t>Desacopla el contrato de la API</a:t>
+            </a:r>
+            <a:endParaRPr lang="en-US" sz="1050" dirty="0"/>
+          </a:p>
+        </p:txBody>
+      </p:sp>
+      <p:sp>
+        <p:nvSpPr>
+          <p:cNvPr id="34" name="Text 32"/>
+          <p:cNvSpPr/>
+          <p:nvPr/>
+        </p:nvSpPr>
+        <p:spPr>
+          <a:xfrm>
+            <a:off x="6400800" y="5454675"/>
+            <a:ext cx="2350008" cy="548640"/>
+          </a:xfrm>
+          <a:prstGeom prst="rect">
+            <a:avLst/>
+          </a:prstGeom>
+          <a:noFill/>
+          <a:ln/>
+        </p:spPr>
+        <p:txBody>
+          <a:bodyPr wrap="square" lIns="0" tIns="0" rIns="0" bIns="0" rtlCol="0" anchor="ctr"/>
+          <a:lstStyle/>
+          <a:p>
+            <a:pPr marL="0" indent="0" algn="l">
+              <a:buNone/>
+            </a:pPr>
+            <a:r>
+              <a:rPr lang="en-US" sz="830" dirty="0">
+                <a:solidFill>
+                  <a:srgbClr val="5C6B73"/>
                 </a:solidFill>
                 <a:latin typeface="Calibri" pitchFamily="34" charset="0"/>
                 <a:ea typeface="Calibri" pitchFamily="34" charset="-122"/>
                 <a:cs typeface="Calibri" pitchFamily="34" charset="-120"/>
               </a:rPr>
-              <a:t>→</a:t>
-            </a:r>
-            <a:endParaRPr lang="en-US" sz="2200" dirty="0"/>
-          </a:p>
-        </p:txBody>
-      </p:sp>
-      <p:sp>
-        <p:nvSpPr>
-          <p:cNvPr id="9" name="Shape 7"/>
-          <p:cNvSpPr/>
-          <p:nvPr/>
-        </p:nvSpPr>
-        <p:spPr>
-          <a:xfrm>
-            <a:off x="4722876" y="2880360"/>
-            <a:ext cx="2743200" cy="822960"/>
+              <a:t>Cambiar el esquema interno no debería romper a los clientes que la consumen.</a:t>
+            </a:r>
+            <a:endParaRPr lang="en-US" sz="830" dirty="0"/>
+          </a:p>
+        </p:txBody>
+      </p:sp>
+      <p:sp>
+        <p:nvSpPr>
+          <p:cNvPr id="35" name="Shape 33"/>
+          <p:cNvSpPr/>
+          <p:nvPr/>
+        </p:nvSpPr>
+        <p:spPr>
+          <a:xfrm>
+            <a:off x="9134856" y="5088915"/>
+            <a:ext cx="2606040" cy="960120"/>
           </a:xfrm>
           <a:prstGeom prst="roundRect">
             <a:avLst>
-              <a:gd name="adj" fmla="val 11111"/>
+              <a:gd name="adj" fmla="val 6667"/>
             </a:avLst>
           </a:prstGeom>
           <a:solidFill>
-            <a:srgbClr val="1C7293"/>
+            <a:srgbClr val="E7F1F6"/>
           </a:solidFill>
           <a:ln/>
         </p:spPr>
@@ -5155,575 +6170,79 @@
       </p:sp>
       <p:sp>
         <p:nvSpPr>
-          <p:cNvPr id="10" name="Text 8"/>
-          <p:cNvSpPr/>
-          <p:nvPr/>
-        </p:nvSpPr>
-        <p:spPr>
-          <a:xfrm>
-            <a:off x="4722876" y="2880360"/>
-            <a:ext cx="2743200" cy="822960"/>
-          </a:xfrm>
-          <a:prstGeom prst="rect">
-            <a:avLst/>
-          </a:prstGeom>
-          <a:noFill/>
-          <a:ln/>
-        </p:spPr>
-        <p:txBody>
-          <a:bodyPr wrap="square" lIns="0" tIns="0" rIns="0" bIns="0" rtlCol="0" anchor="ctr"/>
-          <a:lstStyle/>
-          <a:p>
-            <a:pPr marL="0" indent="0" algn="ctr">
-              <a:buNone/>
-            </a:pPr>
-            <a:r>
-              <a:rPr lang="en-US" sz="1200" dirty="0">
-                <a:solidFill>
-                  <a:srgbClr val="E8EEF2"/>
-                </a:solidFill>
-                <a:latin typeface="Courier New" pitchFamily="34" charset="0"/>
-                <a:ea typeface="Courier New" pitchFamily="34" charset="-122"/>
-                <a:cs typeface="Courier New" pitchFamily="34" charset="-120"/>
-              </a:rPr>
-              <a:t>AutoMapper</a:t>
-            </a:r>
-            <a:endParaRPr lang="en-US" sz="1200" dirty="0"/>
-          </a:p>
-        </p:txBody>
-      </p:sp>
-      <p:sp>
-        <p:nvSpPr>
-          <p:cNvPr id="11" name="Text 9"/>
-          <p:cNvSpPr/>
-          <p:nvPr/>
-        </p:nvSpPr>
-        <p:spPr>
-          <a:xfrm>
-            <a:off x="7466076" y="2880360"/>
-            <a:ext cx="822960" cy="822960"/>
-          </a:xfrm>
-          <a:prstGeom prst="rect">
-            <a:avLst/>
-          </a:prstGeom>
-          <a:noFill/>
-          <a:ln/>
-        </p:spPr>
-        <p:txBody>
-          <a:bodyPr wrap="square" lIns="0" tIns="0" rIns="0" bIns="0" rtlCol="0" anchor="ctr"/>
-          <a:lstStyle/>
-          <a:p>
-            <a:pPr marL="0" indent="0" algn="ctr">
-              <a:buNone/>
-            </a:pPr>
-            <a:r>
-              <a:rPr lang="en-US" sz="2200" dirty="0">
-                <a:solidFill>
-                  <a:srgbClr val="1C7293"/>
+          <p:cNvPr id="36" name="Text 34"/>
+          <p:cNvSpPr/>
+          <p:nvPr/>
+        </p:nvSpPr>
+        <p:spPr>
+          <a:xfrm>
+            <a:off x="9262872" y="5180355"/>
+            <a:ext cx="2350008" cy="274320"/>
+          </a:xfrm>
+          <a:prstGeom prst="rect">
+            <a:avLst/>
+          </a:prstGeom>
+          <a:noFill/>
+          <a:ln/>
+        </p:spPr>
+        <p:txBody>
+          <a:bodyPr wrap="square" lIns="0" tIns="0" rIns="0" bIns="0" rtlCol="0" anchor="ctr"/>
+          <a:lstStyle/>
+          <a:p>
+            <a:pPr marL="0" indent="0" algn="l">
+              <a:buNone/>
+            </a:pPr>
+            <a:r>
+              <a:rPr lang="en-US" sz="1050" b="1" dirty="0">
+                <a:solidFill>
+                  <a:srgbClr val="065A82"/>
+                </a:solidFill>
+                <a:latin typeface="Cambria" pitchFamily="34" charset="0"/>
+                <a:ea typeface="Cambria" pitchFamily="34" charset="-122"/>
+                <a:cs typeface="Cambria" pitchFamily="34" charset="-120"/>
+              </a:rPr>
+              <a:t>Una forma por caso de uso</a:t>
+            </a:r>
+            <a:endParaRPr lang="en-US" sz="1050" dirty="0"/>
+          </a:p>
+        </p:txBody>
+      </p:sp>
+      <p:sp>
+        <p:nvSpPr>
+          <p:cNvPr id="37" name="Text 35"/>
+          <p:cNvSpPr/>
+          <p:nvPr/>
+        </p:nvSpPr>
+        <p:spPr>
+          <a:xfrm>
+            <a:off x="9262872" y="5454675"/>
+            <a:ext cx="2350008" cy="548640"/>
+          </a:xfrm>
+          <a:prstGeom prst="rect">
+            <a:avLst/>
+          </a:prstGeom>
+          <a:noFill/>
+          <a:ln/>
+        </p:spPr>
+        <p:txBody>
+          <a:bodyPr wrap="square" lIns="0" tIns="0" rIns="0" bIns="0" rtlCol="0" anchor="ctr"/>
+          <a:lstStyle/>
+          <a:p>
+            <a:pPr marL="0" indent="0" algn="l">
+              <a:buNone/>
+            </a:pPr>
+            <a:r>
+              <a:rPr lang="en-US" sz="830" dirty="0">
+                <a:solidFill>
+                  <a:srgbClr val="5C6B73"/>
                 </a:solidFill>
                 <a:latin typeface="Calibri" pitchFamily="34" charset="0"/>
                 <a:ea typeface="Calibri" pitchFamily="34" charset="-122"/>
                 <a:cs typeface="Calibri" pitchFamily="34" charset="-120"/>
               </a:rPr>
-              <a:t>→</a:t>
-            </a:r>
-            <a:endParaRPr lang="en-US" sz="2200" dirty="0"/>
-          </a:p>
-        </p:txBody>
-      </p:sp>
-      <p:sp>
-        <p:nvSpPr>
-          <p:cNvPr id="12" name="Shape 10"/>
-          <p:cNvSpPr/>
-          <p:nvPr/>
-        </p:nvSpPr>
-        <p:spPr>
-          <a:xfrm>
-            <a:off x="8289036" y="2880360"/>
-            <a:ext cx="2743200" cy="822960"/>
-          </a:xfrm>
-          <a:prstGeom prst="roundRect">
-            <a:avLst>
-              <a:gd name="adj" fmla="val 11111"/>
-            </a:avLst>
-          </a:prstGeom>
-          <a:solidFill>
-            <a:srgbClr val="065A82"/>
-          </a:solidFill>
-          <a:ln/>
-        </p:spPr>
-        <p:txBody>
-          <a:bodyPr/>
-          <a:lstStyle/>
-          <a:p>
-            <a:endParaRPr lang="es-AR"/>
-          </a:p>
-        </p:txBody>
-      </p:sp>
-      <p:sp>
-        <p:nvSpPr>
-          <p:cNvPr id="13" name="Text 11"/>
-          <p:cNvSpPr/>
-          <p:nvPr/>
-        </p:nvSpPr>
-        <p:spPr>
-          <a:xfrm>
-            <a:off x="8289036" y="2880360"/>
-            <a:ext cx="2743200" cy="822960"/>
-          </a:xfrm>
-          <a:prstGeom prst="rect">
-            <a:avLst/>
-          </a:prstGeom>
-          <a:noFill/>
-          <a:ln/>
-        </p:spPr>
-        <p:txBody>
-          <a:bodyPr wrap="square" lIns="0" tIns="0" rIns="0" bIns="0" rtlCol="0" anchor="ctr"/>
-          <a:lstStyle/>
-          <a:p>
-            <a:pPr marL="0" indent="0" algn="ctr">
-              <a:buNone/>
-            </a:pPr>
-            <a:r>
-              <a:rPr lang="en-US" sz="1200" dirty="0">
-                <a:solidFill>
-                  <a:srgbClr val="E8EEF2"/>
-                </a:solidFill>
-                <a:latin typeface="Courier New" pitchFamily="34" charset="0"/>
-                <a:ea typeface="Courier New" pitchFamily="34" charset="-122"/>
-                <a:cs typeface="Courier New" pitchFamily="34" charset="-120"/>
-              </a:rPr>
-              <a:t>LibroDto</a:t>
-            </a:r>
-            <a:endParaRPr lang="en-US" sz="1200" dirty="0"/>
-          </a:p>
-        </p:txBody>
-      </p:sp>
-      <p:sp>
-        <p:nvSpPr>
-          <p:cNvPr id="14" name="Shape 12"/>
-          <p:cNvSpPr/>
-          <p:nvPr/>
-        </p:nvSpPr>
-        <p:spPr>
-          <a:xfrm>
-            <a:off x="548640" y="3977640"/>
-            <a:ext cx="2606040" cy="1737360"/>
-          </a:xfrm>
-          <a:prstGeom prst="roundRect">
-            <a:avLst>
-              <a:gd name="adj" fmla="val 4211"/>
-            </a:avLst>
-          </a:prstGeom>
-          <a:solidFill>
-            <a:srgbClr val="065A82"/>
-          </a:solidFill>
-          <a:ln/>
-        </p:spPr>
-        <p:txBody>
-          <a:bodyPr/>
-          <a:lstStyle/>
-          <a:p>
-            <a:endParaRPr lang="es-AR"/>
-          </a:p>
-        </p:txBody>
-      </p:sp>
-      <p:sp>
-        <p:nvSpPr>
-          <p:cNvPr id="15" name="Text 13"/>
-          <p:cNvSpPr/>
-          <p:nvPr/>
-        </p:nvSpPr>
-        <p:spPr>
-          <a:xfrm>
-            <a:off x="713232" y="4160520"/>
-            <a:ext cx="2276856" cy="548640"/>
-          </a:xfrm>
-          <a:prstGeom prst="rect">
-            <a:avLst/>
-          </a:prstGeom>
-          <a:noFill/>
-          <a:ln/>
-        </p:spPr>
-        <p:txBody>
-          <a:bodyPr wrap="square" lIns="0" tIns="0" rIns="0" bIns="0" rtlCol="0" anchor="ctr"/>
-          <a:lstStyle/>
-          <a:p>
-            <a:pPr marL="0" indent="0" algn="l">
-              <a:buNone/>
-            </a:pPr>
-            <a:r>
-              <a:rPr lang="en-US" sz="1250" b="1" dirty="0">
-                <a:solidFill>
-                  <a:srgbClr val="FFFFFF"/>
-                </a:solidFill>
-                <a:latin typeface="Cambria" pitchFamily="34" charset="0"/>
-                <a:ea typeface="Cambria" pitchFamily="34" charset="-122"/>
-                <a:cs typeface="Cambria" pitchFamily="34" charset="-120"/>
-              </a:rPr>
-              <a:t>Menos código repetitivo</a:t>
-            </a:r>
-            <a:endParaRPr lang="en-US" sz="1250" dirty="0"/>
-          </a:p>
-        </p:txBody>
-      </p:sp>
-      <p:sp>
-        <p:nvSpPr>
-          <p:cNvPr id="16" name="Text 14"/>
-          <p:cNvSpPr/>
-          <p:nvPr/>
-        </p:nvSpPr>
-        <p:spPr>
-          <a:xfrm>
-            <a:off x="713232" y="4754880"/>
-            <a:ext cx="2276856" cy="914400"/>
-          </a:xfrm>
-          <a:prstGeom prst="rect">
-            <a:avLst/>
-          </a:prstGeom>
-          <a:noFill/>
-          <a:ln/>
-        </p:spPr>
-        <p:txBody>
-          <a:bodyPr wrap="square" lIns="0" tIns="0" rIns="0" bIns="0" rtlCol="0" anchor="ctr"/>
-          <a:lstStyle/>
-          <a:p>
-            <a:pPr marL="0" indent="0" algn="l">
-              <a:buNone/>
-            </a:pPr>
-            <a:r>
-              <a:rPr lang="en-US" sz="1000" dirty="0">
-                <a:solidFill>
-                  <a:srgbClr val="EAF3F8"/>
-                </a:solidFill>
-                <a:latin typeface="Calibri" pitchFamily="34" charset="0"/>
-                <a:ea typeface="Calibri" pitchFamily="34" charset="-122"/>
-                <a:cs typeface="Calibri" pitchFamily="34" charset="-120"/>
-              </a:rPr>
-              <a:t>En vez de asignar cada propiedad a mano, una sola línea mapea el objeto completo.</a:t>
-            </a:r>
-            <a:endParaRPr lang="en-US" sz="1000" dirty="0"/>
-          </a:p>
-        </p:txBody>
-      </p:sp>
-      <p:sp>
-        <p:nvSpPr>
-          <p:cNvPr id="17" name="Shape 15"/>
-          <p:cNvSpPr/>
-          <p:nvPr/>
-        </p:nvSpPr>
-        <p:spPr>
-          <a:xfrm>
-            <a:off x="3410712" y="3977640"/>
-            <a:ext cx="2606040" cy="1737360"/>
-          </a:xfrm>
-          <a:prstGeom prst="roundRect">
-            <a:avLst>
-              <a:gd name="adj" fmla="val 4211"/>
-            </a:avLst>
-          </a:prstGeom>
-          <a:solidFill>
-            <a:srgbClr val="1C7293"/>
-          </a:solidFill>
-          <a:ln/>
-        </p:spPr>
-        <p:txBody>
-          <a:bodyPr/>
-          <a:lstStyle/>
-          <a:p>
-            <a:endParaRPr lang="es-AR"/>
-          </a:p>
-        </p:txBody>
-      </p:sp>
-      <p:sp>
-        <p:nvSpPr>
-          <p:cNvPr id="18" name="Text 16"/>
-          <p:cNvSpPr/>
-          <p:nvPr/>
-        </p:nvSpPr>
-        <p:spPr>
-          <a:xfrm>
-            <a:off x="3575304" y="4160520"/>
-            <a:ext cx="2276856" cy="548640"/>
-          </a:xfrm>
-          <a:prstGeom prst="rect">
-            <a:avLst/>
-          </a:prstGeom>
-          <a:noFill/>
-          <a:ln/>
-        </p:spPr>
-        <p:txBody>
-          <a:bodyPr wrap="square" lIns="0" tIns="0" rIns="0" bIns="0" rtlCol="0" anchor="ctr"/>
-          <a:lstStyle/>
-          <a:p>
-            <a:pPr marL="0" indent="0" algn="l">
-              <a:buNone/>
-            </a:pPr>
-            <a:r>
-              <a:rPr lang="en-US" sz="1250" b="1" dirty="0">
-                <a:solidFill>
-                  <a:srgbClr val="FFFFFF"/>
-                </a:solidFill>
-                <a:latin typeface="Cambria" pitchFamily="34" charset="0"/>
-                <a:ea typeface="Cambria" pitchFamily="34" charset="-122"/>
-                <a:cs typeface="Cambria" pitchFamily="34" charset="-120"/>
-              </a:rPr>
-              <a:t>Entidades y DTOs desacoplados</a:t>
-            </a:r>
-            <a:endParaRPr lang="en-US" sz="1250" dirty="0"/>
-          </a:p>
-        </p:txBody>
-      </p:sp>
-      <p:sp>
-        <p:nvSpPr>
-          <p:cNvPr id="19" name="Text 17"/>
-          <p:cNvSpPr/>
-          <p:nvPr/>
-        </p:nvSpPr>
-        <p:spPr>
-          <a:xfrm>
-            <a:off x="3575304" y="4754880"/>
-            <a:ext cx="2276856" cy="914400"/>
-          </a:xfrm>
-          <a:prstGeom prst="rect">
-            <a:avLst/>
-          </a:prstGeom>
-          <a:noFill/>
-          <a:ln/>
-        </p:spPr>
-        <p:txBody>
-          <a:bodyPr wrap="square" lIns="0" tIns="0" rIns="0" bIns="0" rtlCol="0" anchor="ctr"/>
-          <a:lstStyle/>
-          <a:p>
-            <a:pPr marL="0" indent="0" algn="l">
-              <a:buNone/>
-            </a:pPr>
-            <a:r>
-              <a:rPr lang="en-US" sz="1000" dirty="0">
-                <a:solidFill>
-                  <a:srgbClr val="EAF3F8"/>
-                </a:solidFill>
-                <a:latin typeface="Calibri" pitchFamily="34" charset="0"/>
-                <a:ea typeface="Calibri" pitchFamily="34" charset="-122"/>
-                <a:cs typeface="Calibri" pitchFamily="34" charset="-120"/>
-              </a:rPr>
-              <a:t>El esquema interno puede cambiar sin romper el contrato público de la API.</a:t>
-            </a:r>
-            <a:endParaRPr lang="en-US" sz="1000" dirty="0"/>
-          </a:p>
-        </p:txBody>
-      </p:sp>
-      <p:sp>
-        <p:nvSpPr>
-          <p:cNvPr id="20" name="Shape 18"/>
-          <p:cNvSpPr/>
-          <p:nvPr/>
-        </p:nvSpPr>
-        <p:spPr>
-          <a:xfrm>
-            <a:off x="6272784" y="3977640"/>
-            <a:ext cx="2606040" cy="1737360"/>
-          </a:xfrm>
-          <a:prstGeom prst="roundRect">
-            <a:avLst>
-              <a:gd name="adj" fmla="val 4211"/>
-            </a:avLst>
-          </a:prstGeom>
-          <a:solidFill>
-            <a:srgbClr val="065A82"/>
-          </a:solidFill>
-          <a:ln/>
-        </p:spPr>
-        <p:txBody>
-          <a:bodyPr/>
-          <a:lstStyle/>
-          <a:p>
-            <a:endParaRPr lang="es-AR"/>
-          </a:p>
-        </p:txBody>
-      </p:sp>
-      <p:sp>
-        <p:nvSpPr>
-          <p:cNvPr id="21" name="Text 19"/>
-          <p:cNvSpPr/>
-          <p:nvPr/>
-        </p:nvSpPr>
-        <p:spPr>
-          <a:xfrm>
-            <a:off x="6437376" y="4160520"/>
-            <a:ext cx="2276856" cy="548640"/>
-          </a:xfrm>
-          <a:prstGeom prst="rect">
-            <a:avLst/>
-          </a:prstGeom>
-          <a:noFill/>
-          <a:ln/>
-        </p:spPr>
-        <p:txBody>
-          <a:bodyPr wrap="square" lIns="0" tIns="0" rIns="0" bIns="0" rtlCol="0" anchor="ctr"/>
-          <a:lstStyle/>
-          <a:p>
-            <a:pPr marL="0" indent="0" algn="l">
-              <a:buNone/>
-            </a:pPr>
-            <a:r>
-              <a:rPr lang="en-US" sz="1250" b="1" dirty="0">
-                <a:solidFill>
-                  <a:srgbClr val="FFFFFF"/>
-                </a:solidFill>
-                <a:latin typeface="Cambria" pitchFamily="34" charset="0"/>
-                <a:ea typeface="Cambria" pitchFamily="34" charset="-122"/>
-                <a:cs typeface="Cambria" pitchFamily="34" charset="-120"/>
-              </a:rPr>
-              <a:t>Convención + configuración</a:t>
-            </a:r>
-            <a:endParaRPr lang="en-US" sz="1250" dirty="0"/>
-          </a:p>
-        </p:txBody>
-      </p:sp>
-      <p:sp>
-        <p:nvSpPr>
-          <p:cNvPr id="22" name="Text 20"/>
-          <p:cNvSpPr/>
-          <p:nvPr/>
-        </p:nvSpPr>
-        <p:spPr>
-          <a:xfrm>
-            <a:off x="6437376" y="4754880"/>
-            <a:ext cx="2276856" cy="914400"/>
-          </a:xfrm>
-          <a:prstGeom prst="rect">
-            <a:avLst/>
-          </a:prstGeom>
-          <a:noFill/>
-          <a:ln/>
-        </p:spPr>
-        <p:txBody>
-          <a:bodyPr wrap="square" lIns="0" tIns="0" rIns="0" bIns="0" rtlCol="0" anchor="ctr"/>
-          <a:lstStyle/>
-          <a:p>
-            <a:pPr marL="0" indent="0" algn="l">
-              <a:buNone/>
-            </a:pPr>
-            <a:r>
-              <a:rPr lang="en-US" sz="1000" dirty="0">
-                <a:solidFill>
-                  <a:srgbClr val="EAF3F8"/>
-                </a:solidFill>
-                <a:latin typeface="Calibri" pitchFamily="34" charset="0"/>
-                <a:ea typeface="Calibri" pitchFamily="34" charset="-122"/>
-                <a:cs typeface="Calibri" pitchFamily="34" charset="-120"/>
-              </a:rPr>
-              <a:t>Mapea automáticamente propiedades con el mismo nombre, y permite reglas a medida para el resto.</a:t>
-            </a:r>
-            <a:endParaRPr lang="en-US" sz="1000" dirty="0"/>
-          </a:p>
-        </p:txBody>
-      </p:sp>
-      <p:sp>
-        <p:nvSpPr>
-          <p:cNvPr id="23" name="Shape 21"/>
-          <p:cNvSpPr/>
-          <p:nvPr/>
-        </p:nvSpPr>
-        <p:spPr>
-          <a:xfrm>
-            <a:off x="9134856" y="3977640"/>
-            <a:ext cx="2606040" cy="1737360"/>
-          </a:xfrm>
-          <a:prstGeom prst="roundRect">
-            <a:avLst>
-              <a:gd name="adj" fmla="val 4211"/>
-            </a:avLst>
-          </a:prstGeom>
-          <a:solidFill>
-            <a:srgbClr val="1C7293"/>
-          </a:solidFill>
-          <a:ln/>
-        </p:spPr>
-        <p:txBody>
-          <a:bodyPr/>
-          <a:lstStyle/>
-          <a:p>
-            <a:endParaRPr lang="es-AR"/>
-          </a:p>
-        </p:txBody>
-      </p:sp>
-      <p:sp>
-        <p:nvSpPr>
-          <p:cNvPr id="24" name="Text 22"/>
-          <p:cNvSpPr/>
-          <p:nvPr/>
-        </p:nvSpPr>
-        <p:spPr>
-          <a:xfrm>
-            <a:off x="9299448" y="4160520"/>
-            <a:ext cx="2276856" cy="548640"/>
-          </a:xfrm>
-          <a:prstGeom prst="rect">
-            <a:avLst/>
-          </a:prstGeom>
-          <a:noFill/>
-          <a:ln/>
-        </p:spPr>
-        <p:txBody>
-          <a:bodyPr wrap="square" lIns="0" tIns="0" rIns="0" bIns="0" rtlCol="0" anchor="ctr"/>
-          <a:lstStyle/>
-          <a:p>
-            <a:pPr marL="0" indent="0" algn="l">
-              <a:buNone/>
-            </a:pPr>
-            <a:r>
-              <a:rPr lang="en-US" sz="1250" b="1" dirty="0">
-                <a:solidFill>
-                  <a:srgbClr val="FFFFFF"/>
-                </a:solidFill>
-                <a:latin typeface="Cambria" pitchFamily="34" charset="0"/>
-                <a:ea typeface="Cambria" pitchFamily="34" charset="-122"/>
-                <a:cs typeface="Cambria" pitchFamily="34" charset="-120"/>
-              </a:rPr>
-              <a:t>Se integra con LINQ</a:t>
-            </a:r>
-            <a:endParaRPr lang="en-US" sz="1250" dirty="0"/>
-          </a:p>
-        </p:txBody>
-      </p:sp>
-      <p:sp>
-        <p:nvSpPr>
-          <p:cNvPr id="25" name="Text 23"/>
-          <p:cNvSpPr/>
-          <p:nvPr/>
-        </p:nvSpPr>
-        <p:spPr>
-          <a:xfrm>
-            <a:off x="9299448" y="4754880"/>
-            <a:ext cx="2276856" cy="914400"/>
-          </a:xfrm>
-          <a:prstGeom prst="rect">
-            <a:avLst/>
-          </a:prstGeom>
-          <a:noFill/>
-          <a:ln/>
-        </p:spPr>
-        <p:txBody>
-          <a:bodyPr wrap="square" lIns="0" tIns="0" rIns="0" bIns="0" rtlCol="0" anchor="ctr"/>
-          <a:lstStyle/>
-          <a:p>
-            <a:pPr marL="0" indent="0" algn="l">
-              <a:buNone/>
-            </a:pPr>
-            <a:r>
-              <a:rPr lang="en-US" sz="1000" dirty="0">
-                <a:solidFill>
-                  <a:srgbClr val="EAF3F8"/>
-                </a:solidFill>
-                <a:latin typeface="Calibri" pitchFamily="34" charset="0"/>
-                <a:ea typeface="Calibri" pitchFamily="34" charset="-122"/>
-                <a:cs typeface="Calibri" pitchFamily="34" charset="-120"/>
-              </a:rPr>
-              <a:t>ProjectTo&lt;T&gt;() traduce el mapeo a la consulta SQL, trayendo solo las columnas necesarias.</a:t>
-            </a:r>
-            <a:endParaRPr lang="en-US" sz="1000" dirty="0"/>
+              <a:t>Un DTO para crear (sin Id), otro para listar (resumido), otro para el detalle.</a:t>
+            </a:r>
+            <a:endParaRPr lang="en-US" sz="830" dirty="0"/>
           </a:p>
         </p:txBody>
       </p:sp>
@@ -5785,7 +6304,7 @@
                 <a:ea typeface="Cambria" pitchFamily="34" charset="-122"/>
                 <a:cs typeface="Cambria" pitchFamily="34" charset="-120"/>
               </a:rPr>
-              <a:t>AutoMapper en la práctica</a:t>
+              <a:t>AutoMapper: mapeando entidades a DTOs</a:t>
             </a:r>
             <a:endParaRPr lang="en-US" sz="3000" dirty="0"/>
           </a:p>
@@ -5793,215 +6312,352 @@
       </p:sp>
       <p:sp>
         <p:nvSpPr>
-          <p:cNvPr id="3" name="Text 1"/>
-          <p:cNvSpPr/>
-          <p:nvPr/>
-        </p:nvSpPr>
-        <p:spPr>
-          <a:xfrm>
-            <a:off x="548640" y="1024128"/>
-            <a:ext cx="11091672" cy="365760"/>
-          </a:xfrm>
-          <a:prstGeom prst="rect">
-            <a:avLst/>
-          </a:prstGeom>
-          <a:noFill/>
-          <a:ln/>
-        </p:spPr>
-        <p:txBody>
-          <a:bodyPr wrap="square" lIns="0" tIns="0" rIns="0" bIns="0" rtlCol="0" anchor="ctr"/>
-          <a:lstStyle/>
-          <a:p>
-            <a:pPr marL="0" indent="0" algn="l">
-              <a:buNone/>
-            </a:pPr>
-            <a:r>
-              <a:rPr lang="en-US" sz="1400" i="1" dirty="0">
-                <a:solidFill>
-                  <a:srgbClr val="1C7293"/>
+          <p:cNvPr id="4" name="Shape 2"/>
+          <p:cNvSpPr/>
+          <p:nvPr/>
+        </p:nvSpPr>
+        <p:spPr>
+          <a:xfrm>
+            <a:off x="548640" y="1457436"/>
+            <a:ext cx="11091672" cy="868680"/>
+          </a:xfrm>
+          <a:prstGeom prst="roundRect">
+            <a:avLst>
+              <a:gd name="adj" fmla="val 8421"/>
+            </a:avLst>
+          </a:prstGeom>
+          <a:solidFill>
+            <a:srgbClr val="E7F1F6"/>
+          </a:solidFill>
+          <a:ln/>
+        </p:spPr>
+        <p:txBody>
+          <a:bodyPr/>
+          <a:lstStyle/>
+          <a:p>
+            <a:endParaRPr lang="es-AR"/>
+          </a:p>
+        </p:txBody>
+      </p:sp>
+      <p:sp>
+        <p:nvSpPr>
+          <p:cNvPr id="5" name="Text 3"/>
+          <p:cNvSpPr/>
+          <p:nvPr/>
+        </p:nvSpPr>
+        <p:spPr>
+          <a:xfrm>
+            <a:off x="868680" y="1457436"/>
+            <a:ext cx="10451592" cy="868680"/>
+          </a:xfrm>
+          <a:prstGeom prst="rect">
+            <a:avLst/>
+          </a:prstGeom>
+          <a:noFill/>
+          <a:ln/>
+        </p:spPr>
+        <p:txBody>
+          <a:bodyPr wrap="square" lIns="0" tIns="0" rIns="0" bIns="0" rtlCol="0" anchor="ctr"/>
+          <a:lstStyle/>
+          <a:p>
+            <a:pPr marL="0" indent="0" algn="l">
+              <a:buNone/>
+            </a:pPr>
+            <a:r>
+              <a:rPr lang="en-US" sz="1300" b="1" dirty="0">
+                <a:solidFill>
+                  <a:srgbClr val="065A82"/>
                 </a:solidFill>
                 <a:latin typeface="Calibri" pitchFamily="34" charset="0"/>
                 <a:ea typeface="Calibri" pitchFamily="34" charset="-122"/>
                 <a:cs typeface="Calibri" pitchFamily="34" charset="-120"/>
               </a:rPr>
-              <a:t>Profiles, registro en DI y proyección eficiente con EF Core</a:t>
-            </a:r>
-            <a:endParaRPr lang="en-US" sz="1400" dirty="0"/>
-          </a:p>
-        </p:txBody>
-      </p:sp>
-      <p:sp>
-        <p:nvSpPr>
-          <p:cNvPr id="4" name="Shape 2"/>
-          <p:cNvSpPr/>
-          <p:nvPr/>
-        </p:nvSpPr>
-        <p:spPr>
-          <a:xfrm>
-            <a:off x="548640" y="1828800"/>
-            <a:ext cx="5486400" cy="4023360"/>
-          </a:xfrm>
-          <a:prstGeom prst="roundRect">
-            <a:avLst>
-              <a:gd name="adj" fmla="val 1818"/>
-            </a:avLst>
-          </a:prstGeom>
-          <a:solidFill>
-            <a:srgbClr val="132139"/>
-          </a:solidFill>
-          <a:ln/>
-        </p:spPr>
-        <p:txBody>
-          <a:bodyPr/>
-          <a:lstStyle/>
-          <a:p>
-            <a:endParaRPr lang="es-AR"/>
-          </a:p>
-        </p:txBody>
-      </p:sp>
-      <p:sp>
-        <p:nvSpPr>
-          <p:cNvPr id="5" name="Text 3"/>
-          <p:cNvSpPr/>
-          <p:nvPr/>
-        </p:nvSpPr>
-        <p:spPr>
-          <a:xfrm>
-            <a:off x="822960" y="2011680"/>
-            <a:ext cx="4937760" cy="292608"/>
-          </a:xfrm>
-          <a:prstGeom prst="rect">
-            <a:avLst/>
-          </a:prstGeom>
-          <a:noFill/>
-          <a:ln/>
-        </p:spPr>
-        <p:txBody>
-          <a:bodyPr wrap="square" lIns="0" tIns="0" rIns="0" bIns="0" rtlCol="0" anchor="ctr"/>
-          <a:lstStyle/>
-          <a:p>
-            <a:pPr marL="0" indent="0" algn="l">
-              <a:buNone/>
-            </a:pPr>
-            <a:r>
-              <a:rPr lang="en-US" sz="1200" b="1" dirty="0">
-                <a:solidFill>
-                  <a:srgbClr val="8FA3C9"/>
+              <a:t>AutoMapper</a:t>
+            </a:r>
+            <a:r>
+              <a:rPr lang="en-US" sz="1300" dirty="0">
+                <a:solidFill>
+                  <a:srgbClr val="21295C"/>
                 </a:solidFill>
                 <a:latin typeface="Calibri" pitchFamily="34" charset="0"/>
                 <a:ea typeface="Calibri" pitchFamily="34" charset="-122"/>
                 <a:cs typeface="Calibri" pitchFamily="34" charset="-120"/>
               </a:rPr>
-              <a:t>Definir el mapeo (Profile)</a:t>
-            </a:r>
-            <a:endParaRPr lang="en-US" sz="1200" dirty="0"/>
-          </a:p>
-        </p:txBody>
-      </p:sp>
-      <p:sp>
-        <p:nvSpPr>
-          <p:cNvPr id="6" name="Text 4"/>
-          <p:cNvSpPr/>
-          <p:nvPr/>
-        </p:nvSpPr>
-        <p:spPr>
-          <a:xfrm>
-            <a:off x="822960" y="2359152"/>
-            <a:ext cx="4937760" cy="192024"/>
-          </a:xfrm>
-          <a:prstGeom prst="rect">
-            <a:avLst/>
-          </a:prstGeom>
-          <a:noFill/>
-          <a:ln/>
-        </p:spPr>
-        <p:txBody>
-          <a:bodyPr wrap="square" lIns="0" tIns="0" rIns="0" bIns="0" rtlCol="0" anchor="ctr"/>
-          <a:lstStyle/>
-          <a:p>
-            <a:pPr marL="0" indent="0" algn="l">
-              <a:buNone/>
-            </a:pPr>
-            <a:r>
-              <a:rPr lang="en-US" sz="970" dirty="0">
-                <a:solidFill>
-                  <a:srgbClr val="8FC7E8"/>
+              <a:t> es una librería de mapeo objeto-objeto para .NET. Se usa junto con EF Core para convertir automáticamente entidades del modelo en los DTOs que acabamos de ver, evitando escribir a mano el mismo código de asignación de propiedades una y otra vez.</a:t>
+            </a:r>
+            <a:endParaRPr lang="en-US" sz="1300" dirty="0"/>
+          </a:p>
+        </p:txBody>
+      </p:sp>
+      <p:sp>
+        <p:nvSpPr>
+          <p:cNvPr id="6" name="Shape 4"/>
+          <p:cNvSpPr/>
+          <p:nvPr/>
+        </p:nvSpPr>
+        <p:spPr>
+          <a:xfrm>
+            <a:off x="1156716" y="2665755"/>
+            <a:ext cx="2743200" cy="822960"/>
+          </a:xfrm>
+          <a:prstGeom prst="roundRect">
+            <a:avLst>
+              <a:gd name="adj" fmla="val 11111"/>
+            </a:avLst>
+          </a:prstGeom>
+          <a:solidFill>
+            <a:srgbClr val="065A82"/>
+          </a:solidFill>
+          <a:ln/>
+        </p:spPr>
+        <p:txBody>
+          <a:bodyPr/>
+          <a:lstStyle/>
+          <a:p>
+            <a:endParaRPr lang="es-AR"/>
+          </a:p>
+        </p:txBody>
+      </p:sp>
+      <p:sp>
+        <p:nvSpPr>
+          <p:cNvPr id="7" name="Text 5"/>
+          <p:cNvSpPr/>
+          <p:nvPr/>
+        </p:nvSpPr>
+        <p:spPr>
+          <a:xfrm>
+            <a:off x="1156716" y="2665755"/>
+            <a:ext cx="2743200" cy="822960"/>
+          </a:xfrm>
+          <a:prstGeom prst="rect">
+            <a:avLst/>
+          </a:prstGeom>
+          <a:noFill/>
+          <a:ln/>
+        </p:spPr>
+        <p:txBody>
+          <a:bodyPr wrap="square" lIns="0" tIns="0" rIns="0" bIns="0" rtlCol="0" anchor="ctr"/>
+          <a:lstStyle/>
+          <a:p>
+            <a:pPr marL="0" indent="0" algn="ctr">
+              <a:buNone/>
+            </a:pPr>
+            <a:r>
+              <a:rPr lang="en-US" sz="1200" dirty="0">
+                <a:solidFill>
+                  <a:srgbClr val="E8EEF2"/>
                 </a:solidFill>
                 <a:latin typeface="Courier New" pitchFamily="34" charset="0"/>
                 <a:ea typeface="Courier New" pitchFamily="34" charset="-122"/>
                 <a:cs typeface="Courier New" pitchFamily="34" charset="-120"/>
               </a:rPr>
-              <a:t>public class MappingProfile</a:t>
-            </a:r>
-            <a:endParaRPr lang="en-US" sz="970" dirty="0"/>
-          </a:p>
-        </p:txBody>
-      </p:sp>
-      <p:sp>
-        <p:nvSpPr>
-          <p:cNvPr id="7" name="Text 5"/>
-          <p:cNvSpPr/>
-          <p:nvPr/>
-        </p:nvSpPr>
-        <p:spPr>
-          <a:xfrm>
-            <a:off x="822960" y="2562149"/>
-            <a:ext cx="4937760" cy="192024"/>
-          </a:xfrm>
-          <a:prstGeom prst="rect">
-            <a:avLst/>
-          </a:prstGeom>
-          <a:noFill/>
-          <a:ln/>
-        </p:spPr>
-        <p:txBody>
-          <a:bodyPr wrap="square" lIns="0" tIns="0" rIns="0" bIns="0" rtlCol="0" anchor="ctr"/>
-          <a:lstStyle/>
-          <a:p>
-            <a:pPr marL="0" indent="0" algn="l">
-              <a:buNone/>
-            </a:pPr>
-            <a:r>
-              <a:rPr lang="en-US" sz="970" dirty="0">
-                <a:solidFill>
-                  <a:srgbClr val="8FC7E8"/>
+              <a:t>class Libro (Entity)</a:t>
+            </a:r>
+            <a:endParaRPr lang="en-US" sz="1200" dirty="0"/>
+          </a:p>
+        </p:txBody>
+      </p:sp>
+      <p:sp>
+        <p:nvSpPr>
+          <p:cNvPr id="8" name="Text 6"/>
+          <p:cNvSpPr/>
+          <p:nvPr/>
+        </p:nvSpPr>
+        <p:spPr>
+          <a:xfrm>
+            <a:off x="3899916" y="2665755"/>
+            <a:ext cx="822960" cy="822960"/>
+          </a:xfrm>
+          <a:prstGeom prst="rect">
+            <a:avLst/>
+          </a:prstGeom>
+          <a:noFill/>
+          <a:ln/>
+        </p:spPr>
+        <p:txBody>
+          <a:bodyPr wrap="square" lIns="0" tIns="0" rIns="0" bIns="0" rtlCol="0" anchor="ctr"/>
+          <a:lstStyle/>
+          <a:p>
+            <a:pPr marL="0" indent="0" algn="ctr">
+              <a:buNone/>
+            </a:pPr>
+            <a:r>
+              <a:rPr lang="en-US" sz="2200" dirty="0">
+                <a:solidFill>
+                  <a:srgbClr val="1C7293"/>
+                </a:solidFill>
+                <a:latin typeface="Calibri" pitchFamily="34" charset="0"/>
+                <a:ea typeface="Calibri" pitchFamily="34" charset="-122"/>
+                <a:cs typeface="Calibri" pitchFamily="34" charset="-120"/>
+              </a:rPr>
+              <a:t>→</a:t>
+            </a:r>
+            <a:endParaRPr lang="en-US" sz="2200" dirty="0"/>
+          </a:p>
+        </p:txBody>
+      </p:sp>
+      <p:sp>
+        <p:nvSpPr>
+          <p:cNvPr id="9" name="Shape 7"/>
+          <p:cNvSpPr/>
+          <p:nvPr/>
+        </p:nvSpPr>
+        <p:spPr>
+          <a:xfrm>
+            <a:off x="4722876" y="2665755"/>
+            <a:ext cx="2743200" cy="822960"/>
+          </a:xfrm>
+          <a:prstGeom prst="roundRect">
+            <a:avLst>
+              <a:gd name="adj" fmla="val 11111"/>
+            </a:avLst>
+          </a:prstGeom>
+          <a:solidFill>
+            <a:srgbClr val="1C7293"/>
+          </a:solidFill>
+          <a:ln/>
+        </p:spPr>
+        <p:txBody>
+          <a:bodyPr/>
+          <a:lstStyle/>
+          <a:p>
+            <a:endParaRPr lang="es-AR"/>
+          </a:p>
+        </p:txBody>
+      </p:sp>
+      <p:sp>
+        <p:nvSpPr>
+          <p:cNvPr id="10" name="Text 8"/>
+          <p:cNvSpPr/>
+          <p:nvPr/>
+        </p:nvSpPr>
+        <p:spPr>
+          <a:xfrm>
+            <a:off x="4722876" y="2665755"/>
+            <a:ext cx="2743200" cy="822960"/>
+          </a:xfrm>
+          <a:prstGeom prst="rect">
+            <a:avLst/>
+          </a:prstGeom>
+          <a:noFill/>
+          <a:ln/>
+        </p:spPr>
+        <p:txBody>
+          <a:bodyPr wrap="square" lIns="0" tIns="0" rIns="0" bIns="0" rtlCol="0" anchor="ctr"/>
+          <a:lstStyle/>
+          <a:p>
+            <a:pPr marL="0" indent="0" algn="ctr">
+              <a:buNone/>
+            </a:pPr>
+            <a:r>
+              <a:rPr lang="en-US" sz="1200" dirty="0">
+                <a:solidFill>
+                  <a:srgbClr val="E8EEF2"/>
                 </a:solidFill>
                 <a:latin typeface="Courier New" pitchFamily="34" charset="0"/>
                 <a:ea typeface="Courier New" pitchFamily="34" charset="-122"/>
                 <a:cs typeface="Courier New" pitchFamily="34" charset="-120"/>
               </a:rPr>
-              <a:t>  : Profile</a:t>
-            </a:r>
-            <a:endParaRPr lang="en-US" sz="970" dirty="0"/>
-          </a:p>
-        </p:txBody>
-      </p:sp>
-      <p:sp>
-        <p:nvSpPr>
-          <p:cNvPr id="8" name="Text 6"/>
-          <p:cNvSpPr/>
-          <p:nvPr/>
-        </p:nvSpPr>
-        <p:spPr>
-          <a:xfrm>
-            <a:off x="822960" y="2765146"/>
-            <a:ext cx="4937760" cy="192024"/>
-          </a:xfrm>
-          <a:prstGeom prst="rect">
-            <a:avLst/>
-          </a:prstGeom>
-          <a:noFill/>
-          <a:ln/>
-        </p:spPr>
-        <p:txBody>
-          <a:bodyPr wrap="square" lIns="0" tIns="0" rIns="0" bIns="0" rtlCol="0" anchor="ctr"/>
-          <a:lstStyle/>
-          <a:p>
-            <a:pPr marL="0" indent="0" algn="l">
-              <a:buNone/>
-            </a:pPr>
-            <a:r>
-              <a:rPr lang="en-US" sz="970" dirty="0">
+              <a:t>AutoMapper</a:t>
+            </a:r>
+            <a:endParaRPr lang="en-US" sz="1200" dirty="0"/>
+          </a:p>
+        </p:txBody>
+      </p:sp>
+      <p:sp>
+        <p:nvSpPr>
+          <p:cNvPr id="11" name="Text 9"/>
+          <p:cNvSpPr/>
+          <p:nvPr/>
+        </p:nvSpPr>
+        <p:spPr>
+          <a:xfrm>
+            <a:off x="7466076" y="2665755"/>
+            <a:ext cx="822960" cy="822960"/>
+          </a:xfrm>
+          <a:prstGeom prst="rect">
+            <a:avLst/>
+          </a:prstGeom>
+          <a:noFill/>
+          <a:ln/>
+        </p:spPr>
+        <p:txBody>
+          <a:bodyPr wrap="square" lIns="0" tIns="0" rIns="0" bIns="0" rtlCol="0" anchor="ctr"/>
+          <a:lstStyle/>
+          <a:p>
+            <a:pPr marL="0" indent="0" algn="ctr">
+              <a:buNone/>
+            </a:pPr>
+            <a:r>
+              <a:rPr lang="en-US" sz="2200" dirty="0">
+                <a:solidFill>
+                  <a:srgbClr val="1C7293"/>
+                </a:solidFill>
+                <a:latin typeface="Calibri" pitchFamily="34" charset="0"/>
+                <a:ea typeface="Calibri" pitchFamily="34" charset="-122"/>
+                <a:cs typeface="Calibri" pitchFamily="34" charset="-120"/>
+              </a:rPr>
+              <a:t>→</a:t>
+            </a:r>
+            <a:endParaRPr lang="en-US" sz="2200" dirty="0"/>
+          </a:p>
+        </p:txBody>
+      </p:sp>
+      <p:sp>
+        <p:nvSpPr>
+          <p:cNvPr id="12" name="Shape 10"/>
+          <p:cNvSpPr/>
+          <p:nvPr/>
+        </p:nvSpPr>
+        <p:spPr>
+          <a:xfrm>
+            <a:off x="8289036" y="2665755"/>
+            <a:ext cx="2743200" cy="822960"/>
+          </a:xfrm>
+          <a:prstGeom prst="roundRect">
+            <a:avLst>
+              <a:gd name="adj" fmla="val 11111"/>
+            </a:avLst>
+          </a:prstGeom>
+          <a:solidFill>
+            <a:srgbClr val="065A82"/>
+          </a:solidFill>
+          <a:ln/>
+        </p:spPr>
+        <p:txBody>
+          <a:bodyPr/>
+          <a:lstStyle/>
+          <a:p>
+            <a:endParaRPr lang="es-AR"/>
+          </a:p>
+        </p:txBody>
+      </p:sp>
+      <p:sp>
+        <p:nvSpPr>
+          <p:cNvPr id="13" name="Text 11"/>
+          <p:cNvSpPr/>
+          <p:nvPr/>
+        </p:nvSpPr>
+        <p:spPr>
+          <a:xfrm>
+            <a:off x="8289036" y="2665755"/>
+            <a:ext cx="2743200" cy="822960"/>
+          </a:xfrm>
+          <a:prstGeom prst="rect">
+            <a:avLst/>
+          </a:prstGeom>
+          <a:noFill/>
+          <a:ln/>
+        </p:spPr>
+        <p:txBody>
+          <a:bodyPr wrap="square" lIns="0" tIns="0" rIns="0" bIns="0" rtlCol="0" anchor="ctr"/>
+          <a:lstStyle/>
+          <a:p>
+            <a:pPr marL="0" indent="0" algn="ctr">
+              <a:buNone/>
+            </a:pPr>
+            <a:r>
+              <a:rPr lang="en-US" sz="1200" dirty="0">
                 <a:solidFill>
                   <a:srgbClr val="E8EEF2"/>
                 </a:solidFill>
@@ -6009,554 +6665,30 @@
                 <a:ea typeface="Courier New" pitchFamily="34" charset="-122"/>
                 <a:cs typeface="Courier New" pitchFamily="34" charset="-120"/>
               </a:rPr>
-              <a:t>{</a:t>
-            </a:r>
-            <a:endParaRPr lang="en-US" sz="970" dirty="0"/>
-          </a:p>
-        </p:txBody>
-      </p:sp>
-      <p:sp>
-        <p:nvSpPr>
-          <p:cNvPr id="9" name="Text 7"/>
-          <p:cNvSpPr/>
-          <p:nvPr/>
-        </p:nvSpPr>
-        <p:spPr>
-          <a:xfrm>
-            <a:off x="822960" y="2968142"/>
-            <a:ext cx="4937760" cy="192024"/>
-          </a:xfrm>
-          <a:prstGeom prst="rect">
-            <a:avLst/>
-          </a:prstGeom>
-          <a:noFill/>
-          <a:ln/>
-        </p:spPr>
-        <p:txBody>
-          <a:bodyPr wrap="square" lIns="0" tIns="0" rIns="0" bIns="0" rtlCol="0" anchor="ctr"/>
-          <a:lstStyle/>
-          <a:p>
-            <a:pPr marL="0" indent="0" algn="l">
-              <a:buNone/>
-            </a:pPr>
-            <a:r>
-              <a:rPr lang="en-US" sz="970" dirty="0">
-                <a:solidFill>
-                  <a:srgbClr val="E8EEF2"/>
-                </a:solidFill>
-                <a:latin typeface="Courier New" pitchFamily="34" charset="0"/>
-                <a:ea typeface="Courier New" pitchFamily="34" charset="-122"/>
-                <a:cs typeface="Courier New" pitchFamily="34" charset="-120"/>
-              </a:rPr>
-              <a:t>  public MappingProfile()</a:t>
-            </a:r>
-            <a:endParaRPr lang="en-US" sz="970" dirty="0"/>
-          </a:p>
-        </p:txBody>
-      </p:sp>
-      <p:sp>
-        <p:nvSpPr>
-          <p:cNvPr id="10" name="Text 8"/>
-          <p:cNvSpPr/>
-          <p:nvPr/>
-        </p:nvSpPr>
-        <p:spPr>
-          <a:xfrm>
-            <a:off x="822960" y="3171139"/>
-            <a:ext cx="4937760" cy="192024"/>
-          </a:xfrm>
-          <a:prstGeom prst="rect">
-            <a:avLst/>
-          </a:prstGeom>
-          <a:noFill/>
-          <a:ln/>
-        </p:spPr>
-        <p:txBody>
-          <a:bodyPr wrap="square" lIns="0" tIns="0" rIns="0" bIns="0" rtlCol="0" anchor="ctr"/>
-          <a:lstStyle/>
-          <a:p>
-            <a:pPr marL="0" indent="0" algn="l">
-              <a:buNone/>
-            </a:pPr>
-            <a:r>
-              <a:rPr lang="en-US" sz="970" dirty="0">
-                <a:solidFill>
-                  <a:srgbClr val="E8EEF2"/>
-                </a:solidFill>
-                <a:latin typeface="Courier New" pitchFamily="34" charset="0"/>
-                <a:ea typeface="Courier New" pitchFamily="34" charset="-122"/>
-                <a:cs typeface="Courier New" pitchFamily="34" charset="-120"/>
-              </a:rPr>
-              <a:t>  {</a:t>
-            </a:r>
-            <a:endParaRPr lang="en-US" sz="970" dirty="0"/>
-          </a:p>
-        </p:txBody>
-      </p:sp>
-      <p:sp>
-        <p:nvSpPr>
-          <p:cNvPr id="11" name="Text 9"/>
-          <p:cNvSpPr/>
-          <p:nvPr/>
-        </p:nvSpPr>
-        <p:spPr>
-          <a:xfrm>
-            <a:off x="822960" y="3374136"/>
-            <a:ext cx="4937760" cy="192024"/>
-          </a:xfrm>
-          <a:prstGeom prst="rect">
-            <a:avLst/>
-          </a:prstGeom>
-          <a:noFill/>
-          <a:ln/>
-        </p:spPr>
-        <p:txBody>
-          <a:bodyPr wrap="square" lIns="0" tIns="0" rIns="0" bIns="0" rtlCol="0" anchor="ctr"/>
-          <a:lstStyle/>
-          <a:p>
-            <a:pPr marL="0" indent="0" algn="l">
-              <a:buNone/>
-            </a:pPr>
-            <a:r>
-              <a:rPr lang="en-US" sz="970" dirty="0">
-                <a:solidFill>
-                  <a:srgbClr val="8FD694"/>
-                </a:solidFill>
-                <a:latin typeface="Courier New" pitchFamily="34" charset="0"/>
-                <a:ea typeface="Courier New" pitchFamily="34" charset="-122"/>
-                <a:cs typeface="Courier New" pitchFamily="34" charset="-120"/>
-              </a:rPr>
-              <a:t>    CreateMap&lt;Libro, LibroDto&gt;();</a:t>
-            </a:r>
-            <a:endParaRPr lang="en-US" sz="970" dirty="0"/>
-          </a:p>
-        </p:txBody>
-      </p:sp>
-      <p:sp>
-        <p:nvSpPr>
-          <p:cNvPr id="12" name="Text 10"/>
-          <p:cNvSpPr/>
-          <p:nvPr/>
-        </p:nvSpPr>
-        <p:spPr>
-          <a:xfrm>
-            <a:off x="822960" y="3577133"/>
-            <a:ext cx="4937760" cy="192024"/>
-          </a:xfrm>
-          <a:prstGeom prst="rect">
-            <a:avLst/>
-          </a:prstGeom>
-          <a:noFill/>
-          <a:ln/>
-        </p:spPr>
-        <p:txBody>
-          <a:bodyPr wrap="square" lIns="0" tIns="0" rIns="0" bIns="0" rtlCol="0" anchor="ctr"/>
-          <a:lstStyle/>
-          <a:p>
-            <a:pPr marL="0" indent="0" algn="l">
-              <a:buNone/>
-            </a:pPr>
-            <a:endParaRPr lang="en-US" sz="970" dirty="0"/>
-          </a:p>
-        </p:txBody>
-      </p:sp>
-      <p:sp>
-        <p:nvSpPr>
-          <p:cNvPr id="13" name="Text 11"/>
-          <p:cNvSpPr/>
-          <p:nvPr/>
-        </p:nvSpPr>
-        <p:spPr>
-          <a:xfrm>
-            <a:off x="822960" y="3780130"/>
-            <a:ext cx="4937760" cy="192024"/>
-          </a:xfrm>
-          <a:prstGeom prst="rect">
-            <a:avLst/>
-          </a:prstGeom>
-          <a:noFill/>
-          <a:ln/>
-        </p:spPr>
-        <p:txBody>
-          <a:bodyPr wrap="square" lIns="0" tIns="0" rIns="0" bIns="0" rtlCol="0" anchor="ctr"/>
-          <a:lstStyle/>
-          <a:p>
-            <a:pPr marL="0" indent="0" algn="l">
-              <a:buNone/>
-            </a:pPr>
-            <a:r>
-              <a:rPr lang="en-US" sz="970" dirty="0">
-                <a:solidFill>
-                  <a:srgbClr val="8FD694"/>
-                </a:solidFill>
-                <a:latin typeface="Courier New" pitchFamily="34" charset="0"/>
-                <a:ea typeface="Courier New" pitchFamily="34" charset="-122"/>
-                <a:cs typeface="Courier New" pitchFamily="34" charset="-120"/>
-              </a:rPr>
-              <a:t>    CreateMap&lt;Autor, AutorDto&gt;()</a:t>
-            </a:r>
-            <a:endParaRPr lang="en-US" sz="970" dirty="0"/>
-          </a:p>
-        </p:txBody>
-      </p:sp>
-      <p:sp>
-        <p:nvSpPr>
-          <p:cNvPr id="14" name="Text 12"/>
-          <p:cNvSpPr/>
-          <p:nvPr/>
-        </p:nvSpPr>
-        <p:spPr>
-          <a:xfrm>
-            <a:off x="822960" y="3983126"/>
-            <a:ext cx="4937760" cy="192024"/>
-          </a:xfrm>
-          <a:prstGeom prst="rect">
-            <a:avLst/>
-          </a:prstGeom>
-          <a:noFill/>
-          <a:ln/>
-        </p:spPr>
-        <p:txBody>
-          <a:bodyPr wrap="square" lIns="0" tIns="0" rIns="0" bIns="0" rtlCol="0" anchor="ctr"/>
-          <a:lstStyle/>
-          <a:p>
-            <a:pPr marL="0" indent="0" algn="l">
-              <a:buNone/>
-            </a:pPr>
-            <a:r>
-              <a:rPr lang="en-US" sz="970" dirty="0">
-                <a:solidFill>
-                  <a:srgbClr val="8FD694"/>
-                </a:solidFill>
-                <a:latin typeface="Courier New" pitchFamily="34" charset="0"/>
-                <a:ea typeface="Courier New" pitchFamily="34" charset="-122"/>
-                <a:cs typeface="Courier New" pitchFamily="34" charset="-120"/>
-              </a:rPr>
-              <a:t>      .ForMember(d =&gt; d.CantidadLibros,</a:t>
-            </a:r>
-            <a:endParaRPr lang="en-US" sz="970" dirty="0"/>
-          </a:p>
-        </p:txBody>
-      </p:sp>
-      <p:sp>
-        <p:nvSpPr>
-          <p:cNvPr id="15" name="Text 13"/>
-          <p:cNvSpPr/>
-          <p:nvPr/>
-        </p:nvSpPr>
-        <p:spPr>
-          <a:xfrm>
-            <a:off x="822960" y="4186123"/>
-            <a:ext cx="4937760" cy="192024"/>
-          </a:xfrm>
-          <a:prstGeom prst="rect">
-            <a:avLst/>
-          </a:prstGeom>
-          <a:noFill/>
-          <a:ln/>
-        </p:spPr>
-        <p:txBody>
-          <a:bodyPr wrap="square" lIns="0" tIns="0" rIns="0" bIns="0" rtlCol="0" anchor="ctr"/>
-          <a:lstStyle/>
-          <a:p>
-            <a:pPr marL="0" indent="0" algn="l">
-              <a:buNone/>
-            </a:pPr>
-            <a:r>
-              <a:rPr lang="en-US" sz="970" dirty="0">
-                <a:solidFill>
-                  <a:srgbClr val="8FD694"/>
-                </a:solidFill>
-                <a:latin typeface="Courier New" pitchFamily="34" charset="0"/>
-                <a:ea typeface="Courier New" pitchFamily="34" charset="-122"/>
-                <a:cs typeface="Courier New" pitchFamily="34" charset="-120"/>
-              </a:rPr>
-              <a:t>        opt =&gt; opt.MapFrom(</a:t>
-            </a:r>
-            <a:endParaRPr lang="en-US" sz="970" dirty="0"/>
-          </a:p>
-        </p:txBody>
-      </p:sp>
-      <p:sp>
-        <p:nvSpPr>
-          <p:cNvPr id="16" name="Text 14"/>
-          <p:cNvSpPr/>
-          <p:nvPr/>
-        </p:nvSpPr>
-        <p:spPr>
-          <a:xfrm>
-            <a:off x="822960" y="4389120"/>
-            <a:ext cx="4937760" cy="192024"/>
-          </a:xfrm>
-          <a:prstGeom prst="rect">
-            <a:avLst/>
-          </a:prstGeom>
-          <a:noFill/>
-          <a:ln/>
-        </p:spPr>
-        <p:txBody>
-          <a:bodyPr wrap="square" lIns="0" tIns="0" rIns="0" bIns="0" rtlCol="0" anchor="ctr"/>
-          <a:lstStyle/>
-          <a:p>
-            <a:pPr marL="0" indent="0" algn="l">
-              <a:buNone/>
-            </a:pPr>
-            <a:r>
-              <a:rPr lang="en-US" sz="970" dirty="0">
-                <a:solidFill>
-                  <a:srgbClr val="8FD694"/>
-                </a:solidFill>
-                <a:latin typeface="Courier New" pitchFamily="34" charset="0"/>
-                <a:ea typeface="Courier New" pitchFamily="34" charset="-122"/>
-                <a:cs typeface="Courier New" pitchFamily="34" charset="-120"/>
-              </a:rPr>
-              <a:t>          src =&gt; src.Libros.Count));</a:t>
-            </a:r>
-            <a:endParaRPr lang="en-US" sz="970" dirty="0"/>
-          </a:p>
-        </p:txBody>
-      </p:sp>
-      <p:sp>
-        <p:nvSpPr>
-          <p:cNvPr id="17" name="Text 15"/>
-          <p:cNvSpPr/>
-          <p:nvPr/>
-        </p:nvSpPr>
-        <p:spPr>
-          <a:xfrm>
-            <a:off x="822960" y="4592117"/>
-            <a:ext cx="4937760" cy="192024"/>
-          </a:xfrm>
-          <a:prstGeom prst="rect">
-            <a:avLst/>
-          </a:prstGeom>
-          <a:noFill/>
-          <a:ln/>
-        </p:spPr>
-        <p:txBody>
-          <a:bodyPr wrap="square" lIns="0" tIns="0" rIns="0" bIns="0" rtlCol="0" anchor="ctr"/>
-          <a:lstStyle/>
-          <a:p>
-            <a:pPr marL="0" indent="0" algn="l">
-              <a:buNone/>
-            </a:pPr>
-            <a:r>
-              <a:rPr lang="en-US" sz="970" dirty="0">
-                <a:solidFill>
-                  <a:srgbClr val="E8EEF2"/>
-                </a:solidFill>
-                <a:latin typeface="Courier New" pitchFamily="34" charset="0"/>
-                <a:ea typeface="Courier New" pitchFamily="34" charset="-122"/>
-                <a:cs typeface="Courier New" pitchFamily="34" charset="-120"/>
-              </a:rPr>
-              <a:t>  }</a:t>
-            </a:r>
-            <a:endParaRPr lang="en-US" sz="970" dirty="0"/>
-          </a:p>
-        </p:txBody>
-      </p:sp>
-      <p:sp>
-        <p:nvSpPr>
-          <p:cNvPr id="18" name="Text 16"/>
-          <p:cNvSpPr/>
-          <p:nvPr/>
-        </p:nvSpPr>
-        <p:spPr>
-          <a:xfrm>
-            <a:off x="822960" y="4795114"/>
-            <a:ext cx="4937760" cy="192024"/>
-          </a:xfrm>
-          <a:prstGeom prst="rect">
-            <a:avLst/>
-          </a:prstGeom>
-          <a:noFill/>
-          <a:ln/>
-        </p:spPr>
-        <p:txBody>
-          <a:bodyPr wrap="square" lIns="0" tIns="0" rIns="0" bIns="0" rtlCol="0" anchor="ctr"/>
-          <a:lstStyle/>
-          <a:p>
-            <a:pPr marL="0" indent="0" algn="l">
-              <a:buNone/>
-            </a:pPr>
-            <a:r>
-              <a:rPr lang="en-US" sz="970" dirty="0">
-                <a:solidFill>
-                  <a:srgbClr val="E8EEF2"/>
-                </a:solidFill>
-                <a:latin typeface="Courier New" pitchFamily="34" charset="0"/>
-                <a:ea typeface="Courier New" pitchFamily="34" charset="-122"/>
-                <a:cs typeface="Courier New" pitchFamily="34" charset="-120"/>
-              </a:rPr>
-              <a:t>}</a:t>
-            </a:r>
-            <a:endParaRPr lang="en-US" sz="970" dirty="0"/>
-          </a:p>
-        </p:txBody>
-      </p:sp>
-      <p:sp>
-        <p:nvSpPr>
-          <p:cNvPr id="19" name="Text 17"/>
-          <p:cNvSpPr/>
-          <p:nvPr/>
-        </p:nvSpPr>
-        <p:spPr>
-          <a:xfrm>
-            <a:off x="822960" y="4998110"/>
-            <a:ext cx="4937760" cy="192024"/>
-          </a:xfrm>
-          <a:prstGeom prst="rect">
-            <a:avLst/>
-          </a:prstGeom>
-          <a:noFill/>
-          <a:ln/>
-        </p:spPr>
-        <p:txBody>
-          <a:bodyPr wrap="square" lIns="0" tIns="0" rIns="0" bIns="0" rtlCol="0" anchor="ctr"/>
-          <a:lstStyle/>
-          <a:p>
-            <a:pPr marL="0" indent="0" algn="l">
-              <a:buNone/>
-            </a:pPr>
-            <a:endParaRPr lang="en-US" sz="970" dirty="0"/>
-          </a:p>
-        </p:txBody>
-      </p:sp>
-      <p:sp>
-        <p:nvSpPr>
-          <p:cNvPr id="20" name="Text 18"/>
-          <p:cNvSpPr/>
-          <p:nvPr/>
-        </p:nvSpPr>
-        <p:spPr>
-          <a:xfrm>
-            <a:off x="822960" y="5201107"/>
-            <a:ext cx="4937760" cy="192024"/>
-          </a:xfrm>
-          <a:prstGeom prst="rect">
-            <a:avLst/>
-          </a:prstGeom>
-          <a:noFill/>
-          <a:ln/>
-        </p:spPr>
-        <p:txBody>
-          <a:bodyPr wrap="square" lIns="0" tIns="0" rIns="0" bIns="0" rtlCol="0" anchor="ctr"/>
-          <a:lstStyle/>
-          <a:p>
-            <a:pPr marL="0" indent="0" algn="l">
-              <a:buNone/>
-            </a:pPr>
-            <a:r>
-              <a:rPr lang="en-US" sz="970" dirty="0">
-                <a:solidFill>
-                  <a:srgbClr val="8FA3C9"/>
-                </a:solidFill>
-                <a:latin typeface="Courier New" pitchFamily="34" charset="0"/>
-                <a:ea typeface="Courier New" pitchFamily="34" charset="-122"/>
-                <a:cs typeface="Courier New" pitchFamily="34" charset="-120"/>
-              </a:rPr>
-              <a:t>// Program.cs</a:t>
-            </a:r>
-            <a:endParaRPr lang="en-US" sz="970" dirty="0"/>
-          </a:p>
-        </p:txBody>
-      </p:sp>
-      <p:sp>
-        <p:nvSpPr>
-          <p:cNvPr id="21" name="Text 19"/>
-          <p:cNvSpPr/>
-          <p:nvPr/>
-        </p:nvSpPr>
-        <p:spPr>
-          <a:xfrm>
-            <a:off x="822960" y="5404104"/>
-            <a:ext cx="4937760" cy="192024"/>
-          </a:xfrm>
-          <a:prstGeom prst="rect">
-            <a:avLst/>
-          </a:prstGeom>
-          <a:noFill/>
-          <a:ln/>
-        </p:spPr>
-        <p:txBody>
-          <a:bodyPr wrap="square" lIns="0" tIns="0" rIns="0" bIns="0" rtlCol="0" anchor="ctr"/>
-          <a:lstStyle/>
-          <a:p>
-            <a:pPr marL="0" indent="0" algn="l">
-              <a:buNone/>
-            </a:pPr>
-            <a:r>
-              <a:rPr lang="en-US" sz="970" dirty="0">
-                <a:solidFill>
-                  <a:srgbClr val="C9A9E8"/>
-                </a:solidFill>
-                <a:latin typeface="Courier New" pitchFamily="34" charset="0"/>
-                <a:ea typeface="Courier New" pitchFamily="34" charset="-122"/>
-                <a:cs typeface="Courier New" pitchFamily="34" charset="-120"/>
-              </a:rPr>
-              <a:t>builder.Services.AddAutoMapper(</a:t>
-            </a:r>
-            <a:endParaRPr lang="en-US" sz="970" dirty="0"/>
-          </a:p>
-        </p:txBody>
-      </p:sp>
-      <p:sp>
-        <p:nvSpPr>
-          <p:cNvPr id="22" name="Text 20"/>
-          <p:cNvSpPr/>
-          <p:nvPr/>
-        </p:nvSpPr>
-        <p:spPr>
-          <a:xfrm>
-            <a:off x="822960" y="5607101"/>
-            <a:ext cx="4937760" cy="192024"/>
-          </a:xfrm>
-          <a:prstGeom prst="rect">
-            <a:avLst/>
-          </a:prstGeom>
-          <a:noFill/>
-          <a:ln/>
-        </p:spPr>
-        <p:txBody>
-          <a:bodyPr wrap="square" lIns="0" tIns="0" rIns="0" bIns="0" rtlCol="0" anchor="ctr"/>
-          <a:lstStyle/>
-          <a:p>
-            <a:pPr marL="0" indent="0" algn="l">
-              <a:buNone/>
-            </a:pPr>
-            <a:r>
-              <a:rPr lang="en-US" sz="970" dirty="0">
-                <a:solidFill>
-                  <a:srgbClr val="C9A9E8"/>
-                </a:solidFill>
-                <a:latin typeface="Courier New" pitchFamily="34" charset="0"/>
-                <a:ea typeface="Courier New" pitchFamily="34" charset="-122"/>
-                <a:cs typeface="Courier New" pitchFamily="34" charset="-120"/>
-              </a:rPr>
-              <a:t>  typeof(MappingProfile));</a:t>
-            </a:r>
-            <a:endParaRPr lang="en-US" sz="970" dirty="0"/>
-          </a:p>
-        </p:txBody>
-      </p:sp>
-      <p:sp>
-        <p:nvSpPr>
-          <p:cNvPr id="23" name="Shape 21"/>
-          <p:cNvSpPr/>
-          <p:nvPr/>
-        </p:nvSpPr>
-        <p:spPr>
-          <a:xfrm>
-            <a:off x="6309360" y="1828800"/>
-            <a:ext cx="5349240" cy="4023360"/>
+              <a:t>LibroDto</a:t>
+            </a:r>
+            <a:endParaRPr lang="en-US" sz="1200" dirty="0"/>
+          </a:p>
+        </p:txBody>
+      </p:sp>
+      <p:sp>
+        <p:nvSpPr>
+          <p:cNvPr id="14" name="Shape 12"/>
+          <p:cNvSpPr/>
+          <p:nvPr/>
+        </p:nvSpPr>
+        <p:spPr>
+          <a:xfrm>
+            <a:off x="548640" y="3977640"/>
+            <a:ext cx="2606040" cy="1737360"/>
           </a:xfrm>
           <a:prstGeom prst="roundRect">
             <a:avLst>
-              <a:gd name="adj" fmla="val 1818"/>
+              <a:gd name="adj" fmla="val 4211"/>
             </a:avLst>
           </a:prstGeom>
           <a:solidFill>
-            <a:srgbClr val="132139"/>
+            <a:srgbClr val="065A82"/>
           </a:solidFill>
           <a:ln/>
         </p:spPr>
@@ -6570,53 +6702,160 @@
       </p:sp>
       <p:sp>
         <p:nvSpPr>
-          <p:cNvPr id="24" name="Text 22"/>
-          <p:cNvSpPr/>
-          <p:nvPr/>
-        </p:nvSpPr>
-        <p:spPr>
-          <a:xfrm>
-            <a:off x="6583680" y="2011680"/>
-            <a:ext cx="4800600" cy="292608"/>
-          </a:xfrm>
-          <a:prstGeom prst="rect">
-            <a:avLst/>
-          </a:prstGeom>
-          <a:noFill/>
-          <a:ln/>
-        </p:spPr>
-        <p:txBody>
-          <a:bodyPr wrap="square" lIns="0" tIns="0" rIns="0" bIns="0" rtlCol="0" anchor="ctr"/>
-          <a:lstStyle/>
-          <a:p>
-            <a:pPr marL="0" indent="0" algn="l">
-              <a:buNone/>
-            </a:pPr>
-            <a:r>
-              <a:rPr lang="en-US" sz="1200" b="1" dirty="0">
-                <a:solidFill>
-                  <a:srgbClr val="8FA3C9"/>
+          <p:cNvPr id="15" name="Text 13"/>
+          <p:cNvSpPr/>
+          <p:nvPr/>
+        </p:nvSpPr>
+        <p:spPr>
+          <a:xfrm>
+            <a:off x="713232" y="4160520"/>
+            <a:ext cx="2276856" cy="548640"/>
+          </a:xfrm>
+          <a:prstGeom prst="rect">
+            <a:avLst/>
+          </a:prstGeom>
+          <a:noFill/>
+          <a:ln/>
+        </p:spPr>
+        <p:txBody>
+          <a:bodyPr wrap="square" lIns="0" tIns="0" rIns="0" bIns="0" rtlCol="0" anchor="ctr"/>
+          <a:lstStyle/>
+          <a:p>
+            <a:pPr marL="0" indent="0" algn="l">
+              <a:buNone/>
+            </a:pPr>
+            <a:r>
+              <a:rPr lang="en-US" sz="1250" b="1" dirty="0">
+                <a:solidFill>
+                  <a:srgbClr val="FFFFFF"/>
+                </a:solidFill>
+                <a:latin typeface="Cambria" pitchFamily="34" charset="0"/>
+                <a:ea typeface="Cambria" pitchFamily="34" charset="-122"/>
+                <a:cs typeface="Cambria" pitchFamily="34" charset="-120"/>
+              </a:rPr>
+              <a:t>Menos código repetitivo</a:t>
+            </a:r>
+            <a:endParaRPr lang="en-US" sz="1250" dirty="0"/>
+          </a:p>
+        </p:txBody>
+      </p:sp>
+      <p:sp>
+        <p:nvSpPr>
+          <p:cNvPr id="16" name="Text 14"/>
+          <p:cNvSpPr/>
+          <p:nvPr/>
+        </p:nvSpPr>
+        <p:spPr>
+          <a:xfrm>
+            <a:off x="713232" y="4754880"/>
+            <a:ext cx="2276856" cy="914400"/>
+          </a:xfrm>
+          <a:prstGeom prst="rect">
+            <a:avLst/>
+          </a:prstGeom>
+          <a:noFill/>
+          <a:ln/>
+        </p:spPr>
+        <p:txBody>
+          <a:bodyPr wrap="square" lIns="0" tIns="0" rIns="0" bIns="0" rtlCol="0" anchor="ctr"/>
+          <a:lstStyle/>
+          <a:p>
+            <a:pPr marL="0" indent="0" algn="l">
+              <a:buNone/>
+            </a:pPr>
+            <a:r>
+              <a:rPr lang="en-US" sz="1000" dirty="0">
+                <a:solidFill>
+                  <a:srgbClr val="EAF3F8"/>
                 </a:solidFill>
                 <a:latin typeface="Calibri" pitchFamily="34" charset="0"/>
                 <a:ea typeface="Calibri" pitchFamily="34" charset="-122"/>
                 <a:cs typeface="Calibri" pitchFamily="34" charset="-120"/>
               </a:rPr>
-              <a:t>Usarlo con inyección de dependencias</a:t>
-            </a:r>
-            <a:endParaRPr lang="en-US" sz="1200" dirty="0"/>
-          </a:p>
-        </p:txBody>
-      </p:sp>
-      <p:sp>
-        <p:nvSpPr>
-          <p:cNvPr id="25" name="Text 23"/>
-          <p:cNvSpPr/>
-          <p:nvPr/>
-        </p:nvSpPr>
-        <p:spPr>
-          <a:xfrm>
-            <a:off x="6583680" y="2359152"/>
-            <a:ext cx="4800600" cy="210312"/>
+              <a:t>En vez de asignar cada propiedad a mano, una sola línea mapea el objeto completo.</a:t>
+            </a:r>
+            <a:endParaRPr lang="en-US" sz="1000" dirty="0"/>
+          </a:p>
+        </p:txBody>
+      </p:sp>
+      <p:sp>
+        <p:nvSpPr>
+          <p:cNvPr id="17" name="Shape 15"/>
+          <p:cNvSpPr/>
+          <p:nvPr/>
+        </p:nvSpPr>
+        <p:spPr>
+          <a:xfrm>
+            <a:off x="3410712" y="3977640"/>
+            <a:ext cx="2606040" cy="1737360"/>
+          </a:xfrm>
+          <a:prstGeom prst="roundRect">
+            <a:avLst>
+              <a:gd name="adj" fmla="val 4211"/>
+            </a:avLst>
+          </a:prstGeom>
+          <a:solidFill>
+            <a:srgbClr val="1C7293"/>
+          </a:solidFill>
+          <a:ln/>
+        </p:spPr>
+        <p:txBody>
+          <a:bodyPr/>
+          <a:lstStyle/>
+          <a:p>
+            <a:endParaRPr lang="es-AR"/>
+          </a:p>
+        </p:txBody>
+      </p:sp>
+      <p:sp>
+        <p:nvSpPr>
+          <p:cNvPr id="18" name="Text 16"/>
+          <p:cNvSpPr/>
+          <p:nvPr/>
+        </p:nvSpPr>
+        <p:spPr>
+          <a:xfrm>
+            <a:off x="3575304" y="4160520"/>
+            <a:ext cx="2276856" cy="548640"/>
+          </a:xfrm>
+          <a:prstGeom prst="rect">
+            <a:avLst/>
+          </a:prstGeom>
+          <a:noFill/>
+          <a:ln/>
+        </p:spPr>
+        <p:txBody>
+          <a:bodyPr wrap="square" lIns="0" tIns="0" rIns="0" bIns="0" rtlCol="0" anchor="ctr"/>
+          <a:lstStyle/>
+          <a:p>
+            <a:pPr marL="0" indent="0" algn="l">
+              <a:buNone/>
+            </a:pPr>
+            <a:r>
+              <a:rPr lang="en-US" sz="1250" b="1" dirty="0">
+                <a:solidFill>
+                  <a:srgbClr val="FFFFFF"/>
+                </a:solidFill>
+                <a:latin typeface="Cambria" pitchFamily="34" charset="0"/>
+                <a:ea typeface="Cambria" pitchFamily="34" charset="-122"/>
+                <a:cs typeface="Cambria" pitchFamily="34" charset="-120"/>
+              </a:rPr>
+              <a:t>Entidades y DTOs desacoplados</a:t>
+            </a:r>
+            <a:endParaRPr lang="en-US" sz="1250" dirty="0"/>
+          </a:p>
+        </p:txBody>
+      </p:sp>
+      <p:sp>
+        <p:nvSpPr>
+          <p:cNvPr id="19" name="Text 17"/>
+          <p:cNvSpPr/>
+          <p:nvPr/>
+        </p:nvSpPr>
+        <p:spPr>
+          <a:xfrm>
+            <a:off x="3575304" y="4754880"/>
+            <a:ext cx="2276856" cy="914400"/>
           </a:xfrm>
           <a:prstGeom prst="rect">
             <a:avLst/>
@@ -6634,550 +6873,229 @@
             <a:r>
               <a:rPr lang="en-US" sz="1000" dirty="0">
                 <a:solidFill>
-                  <a:srgbClr val="8FC7E8"/>
-                </a:solidFill>
-                <a:latin typeface="Courier New" pitchFamily="34" charset="0"/>
-                <a:ea typeface="Courier New" pitchFamily="34" charset="-122"/>
-                <a:cs typeface="Courier New" pitchFamily="34" charset="-120"/>
-              </a:rPr>
-              <a:t>public class LibrosController</a:t>
-            </a:r>
-            <a:endParaRPr lang="en-US" sz="1000" dirty="0"/>
-          </a:p>
-        </p:txBody>
-      </p:sp>
-      <p:sp>
-        <p:nvSpPr>
-          <p:cNvPr id="26" name="Text 24"/>
-          <p:cNvSpPr/>
-          <p:nvPr/>
-        </p:nvSpPr>
-        <p:spPr>
-          <a:xfrm>
-            <a:off x="6583680" y="2583180"/>
-            <a:ext cx="4800600" cy="210312"/>
-          </a:xfrm>
-          <a:prstGeom prst="rect">
-            <a:avLst/>
-          </a:prstGeom>
-          <a:noFill/>
-          <a:ln/>
-        </p:spPr>
-        <p:txBody>
-          <a:bodyPr wrap="square" lIns="0" tIns="0" rIns="0" bIns="0" rtlCol="0" anchor="ctr"/>
-          <a:lstStyle/>
-          <a:p>
-            <a:pPr marL="0" indent="0" algn="l">
-              <a:buNone/>
-            </a:pPr>
-            <a:r>
-              <a:rPr lang="en-US" sz="1000" dirty="0">
-                <a:solidFill>
-                  <a:srgbClr val="E8EEF2"/>
-                </a:solidFill>
-                <a:latin typeface="Courier New" pitchFamily="34" charset="0"/>
-                <a:ea typeface="Courier New" pitchFamily="34" charset="-122"/>
-                <a:cs typeface="Courier New" pitchFamily="34" charset="-120"/>
-              </a:rPr>
-              <a:t>{</a:t>
-            </a:r>
-            <a:endParaRPr lang="en-US" sz="1000" dirty="0"/>
-          </a:p>
-        </p:txBody>
-      </p:sp>
-      <p:sp>
-        <p:nvSpPr>
-          <p:cNvPr id="27" name="Text 25"/>
-          <p:cNvSpPr/>
-          <p:nvPr/>
-        </p:nvSpPr>
-        <p:spPr>
-          <a:xfrm>
-            <a:off x="6583680" y="2807208"/>
-            <a:ext cx="4800600" cy="210312"/>
-          </a:xfrm>
-          <a:prstGeom prst="rect">
-            <a:avLst/>
-          </a:prstGeom>
-          <a:noFill/>
-          <a:ln/>
-        </p:spPr>
-        <p:txBody>
-          <a:bodyPr wrap="square" lIns="0" tIns="0" rIns="0" bIns="0" rtlCol="0" anchor="ctr"/>
-          <a:lstStyle/>
-          <a:p>
-            <a:pPr marL="0" indent="0" algn="l">
-              <a:buNone/>
-            </a:pPr>
-            <a:r>
-              <a:rPr lang="en-US" sz="1000" dirty="0">
-                <a:solidFill>
-                  <a:srgbClr val="E8EEF2"/>
-                </a:solidFill>
-                <a:latin typeface="Courier New" pitchFamily="34" charset="0"/>
-                <a:ea typeface="Courier New" pitchFamily="34" charset="-122"/>
-                <a:cs typeface="Courier New" pitchFamily="34" charset="-120"/>
-              </a:rPr>
-              <a:t>  private readonly AppDbContext _ctx;</a:t>
-            </a:r>
-            <a:endParaRPr lang="en-US" sz="1000" dirty="0"/>
-          </a:p>
-        </p:txBody>
-      </p:sp>
-      <p:sp>
-        <p:nvSpPr>
-          <p:cNvPr id="28" name="Text 26"/>
-          <p:cNvSpPr/>
-          <p:nvPr/>
-        </p:nvSpPr>
-        <p:spPr>
-          <a:xfrm>
-            <a:off x="6583680" y="3031236"/>
-            <a:ext cx="4800600" cy="210312"/>
-          </a:xfrm>
-          <a:prstGeom prst="rect">
-            <a:avLst/>
-          </a:prstGeom>
-          <a:noFill/>
-          <a:ln/>
-        </p:spPr>
-        <p:txBody>
-          <a:bodyPr wrap="square" lIns="0" tIns="0" rIns="0" bIns="0" rtlCol="0" anchor="ctr"/>
-          <a:lstStyle/>
-          <a:p>
-            <a:pPr marL="0" indent="0" algn="l">
-              <a:buNone/>
-            </a:pPr>
-            <a:r>
-              <a:rPr lang="en-US" sz="1000" dirty="0">
-                <a:solidFill>
-                  <a:srgbClr val="E8EEF2"/>
-                </a:solidFill>
-                <a:latin typeface="Courier New" pitchFamily="34" charset="0"/>
-                <a:ea typeface="Courier New" pitchFamily="34" charset="-122"/>
-                <a:cs typeface="Courier New" pitchFamily="34" charset="-120"/>
-              </a:rPr>
-              <a:t>  private readonly IMapper _mapper;</a:t>
-            </a:r>
-            <a:endParaRPr lang="en-US" sz="1000" dirty="0"/>
-          </a:p>
-        </p:txBody>
-      </p:sp>
-      <p:sp>
-        <p:nvSpPr>
-          <p:cNvPr id="29" name="Text 27"/>
-          <p:cNvSpPr/>
-          <p:nvPr/>
-        </p:nvSpPr>
-        <p:spPr>
-          <a:xfrm>
-            <a:off x="6583680" y="3255264"/>
-            <a:ext cx="4800600" cy="210312"/>
-          </a:xfrm>
-          <a:prstGeom prst="rect">
-            <a:avLst/>
-          </a:prstGeom>
-          <a:noFill/>
-          <a:ln/>
-        </p:spPr>
-        <p:txBody>
-          <a:bodyPr wrap="square" lIns="0" tIns="0" rIns="0" bIns="0" rtlCol="0" anchor="ctr"/>
-          <a:lstStyle/>
-          <a:p>
-            <a:pPr marL="0" indent="0" algn="l">
-              <a:buNone/>
-            </a:pPr>
-            <a:endParaRPr lang="en-US" sz="1000" dirty="0"/>
-          </a:p>
-        </p:txBody>
-      </p:sp>
-      <p:sp>
-        <p:nvSpPr>
-          <p:cNvPr id="30" name="Text 28"/>
-          <p:cNvSpPr/>
-          <p:nvPr/>
-        </p:nvSpPr>
-        <p:spPr>
-          <a:xfrm>
-            <a:off x="6583680" y="3479292"/>
-            <a:ext cx="4800600" cy="210312"/>
-          </a:xfrm>
-          <a:prstGeom prst="rect">
-            <a:avLst/>
-          </a:prstGeom>
-          <a:noFill/>
-          <a:ln/>
-        </p:spPr>
-        <p:txBody>
-          <a:bodyPr wrap="square" lIns="0" tIns="0" rIns="0" bIns="0" rtlCol="0" anchor="ctr"/>
-          <a:lstStyle/>
-          <a:p>
-            <a:pPr marL="0" indent="0" algn="l">
-              <a:buNone/>
-            </a:pPr>
-            <a:r>
-              <a:rPr lang="en-US" sz="1000" dirty="0">
-                <a:solidFill>
-                  <a:srgbClr val="8FD694"/>
-                </a:solidFill>
-                <a:latin typeface="Courier New" pitchFamily="34" charset="0"/>
-                <a:ea typeface="Courier New" pitchFamily="34" charset="-122"/>
-                <a:cs typeface="Courier New" pitchFamily="34" charset="-120"/>
-              </a:rPr>
-              <a:t>  public async Task&lt;List&lt;LibroDto&gt;&gt;</a:t>
-            </a:r>
-            <a:endParaRPr lang="en-US" sz="1000" dirty="0"/>
-          </a:p>
-        </p:txBody>
-      </p:sp>
-      <p:sp>
-        <p:nvSpPr>
-          <p:cNvPr id="31" name="Text 29"/>
-          <p:cNvSpPr/>
-          <p:nvPr/>
-        </p:nvSpPr>
-        <p:spPr>
-          <a:xfrm>
-            <a:off x="6583680" y="3703320"/>
-            <a:ext cx="4800600" cy="210312"/>
-          </a:xfrm>
-          <a:prstGeom prst="rect">
-            <a:avLst/>
-          </a:prstGeom>
-          <a:noFill/>
-          <a:ln/>
-        </p:spPr>
-        <p:txBody>
-          <a:bodyPr wrap="square" lIns="0" tIns="0" rIns="0" bIns="0" rtlCol="0" anchor="ctr"/>
-          <a:lstStyle/>
-          <a:p>
-            <a:pPr marL="0" indent="0" algn="l">
-              <a:buNone/>
-            </a:pPr>
-            <a:r>
-              <a:rPr lang="en-US" sz="1000" dirty="0">
-                <a:solidFill>
-                  <a:srgbClr val="8FD694"/>
-                </a:solidFill>
-                <a:latin typeface="Courier New" pitchFamily="34" charset="0"/>
-                <a:ea typeface="Courier New" pitchFamily="34" charset="-122"/>
-                <a:cs typeface="Courier New" pitchFamily="34" charset="-120"/>
-              </a:rPr>
-              <a:t>    GetLibros()</a:t>
-            </a:r>
-            <a:endParaRPr lang="en-US" sz="1000" dirty="0"/>
-          </a:p>
-        </p:txBody>
-      </p:sp>
-      <p:sp>
-        <p:nvSpPr>
-          <p:cNvPr id="32" name="Text 30"/>
-          <p:cNvSpPr/>
-          <p:nvPr/>
-        </p:nvSpPr>
-        <p:spPr>
-          <a:xfrm>
-            <a:off x="6583680" y="3927348"/>
-            <a:ext cx="4800600" cy="210312"/>
-          </a:xfrm>
-          <a:prstGeom prst="rect">
-            <a:avLst/>
-          </a:prstGeom>
-          <a:noFill/>
-          <a:ln/>
-        </p:spPr>
-        <p:txBody>
-          <a:bodyPr wrap="square" lIns="0" tIns="0" rIns="0" bIns="0" rtlCol="0" anchor="ctr"/>
-          <a:lstStyle/>
-          <a:p>
-            <a:pPr marL="0" indent="0" algn="l">
-              <a:buNone/>
-            </a:pPr>
-            <a:r>
-              <a:rPr lang="en-US" sz="1000" dirty="0">
-                <a:solidFill>
-                  <a:srgbClr val="E8EEF2"/>
-                </a:solidFill>
-                <a:latin typeface="Courier New" pitchFamily="34" charset="0"/>
-                <a:ea typeface="Courier New" pitchFamily="34" charset="-122"/>
-                <a:cs typeface="Courier New" pitchFamily="34" charset="-120"/>
-              </a:rPr>
-              <a:t>  {</a:t>
-            </a:r>
-            <a:endParaRPr lang="en-US" sz="1000" dirty="0"/>
-          </a:p>
-        </p:txBody>
-      </p:sp>
-      <p:sp>
-        <p:nvSpPr>
-          <p:cNvPr id="33" name="Text 31"/>
-          <p:cNvSpPr/>
-          <p:nvPr/>
-        </p:nvSpPr>
-        <p:spPr>
-          <a:xfrm>
-            <a:off x="6583680" y="4151376"/>
-            <a:ext cx="4800600" cy="210312"/>
-          </a:xfrm>
-          <a:prstGeom prst="rect">
-            <a:avLst/>
-          </a:prstGeom>
-          <a:noFill/>
-          <a:ln/>
-        </p:spPr>
-        <p:txBody>
-          <a:bodyPr wrap="square" lIns="0" tIns="0" rIns="0" bIns="0" rtlCol="0" anchor="ctr"/>
-          <a:lstStyle/>
-          <a:p>
-            <a:pPr marL="0" indent="0" algn="l">
-              <a:buNone/>
-            </a:pPr>
-            <a:r>
-              <a:rPr lang="en-US" sz="1000" dirty="0">
-                <a:solidFill>
-                  <a:srgbClr val="8FD694"/>
-                </a:solidFill>
-                <a:latin typeface="Courier New" pitchFamily="34" charset="0"/>
-                <a:ea typeface="Courier New" pitchFamily="34" charset="-122"/>
-                <a:cs typeface="Courier New" pitchFamily="34" charset="-120"/>
-              </a:rPr>
-              <a:t>    return await _ctx.Libros</a:t>
-            </a:r>
-            <a:endParaRPr lang="en-US" sz="1000" dirty="0"/>
-          </a:p>
-        </p:txBody>
-      </p:sp>
-      <p:sp>
-        <p:nvSpPr>
-          <p:cNvPr id="34" name="Text 32"/>
-          <p:cNvSpPr/>
-          <p:nvPr/>
-        </p:nvSpPr>
-        <p:spPr>
-          <a:xfrm>
-            <a:off x="6583680" y="4375404"/>
-            <a:ext cx="4800600" cy="210312"/>
-          </a:xfrm>
-          <a:prstGeom prst="rect">
-            <a:avLst/>
-          </a:prstGeom>
-          <a:noFill/>
-          <a:ln/>
-        </p:spPr>
-        <p:txBody>
-          <a:bodyPr wrap="square" lIns="0" tIns="0" rIns="0" bIns="0" rtlCol="0" anchor="ctr"/>
-          <a:lstStyle/>
-          <a:p>
-            <a:pPr marL="0" indent="0" algn="l">
-              <a:buNone/>
-            </a:pPr>
-            <a:r>
-              <a:rPr lang="en-US" sz="1000" dirty="0">
-                <a:solidFill>
-                  <a:srgbClr val="8FD694"/>
-                </a:solidFill>
-                <a:latin typeface="Courier New" pitchFamily="34" charset="0"/>
-                <a:ea typeface="Courier New" pitchFamily="34" charset="-122"/>
-                <a:cs typeface="Courier New" pitchFamily="34" charset="-120"/>
-              </a:rPr>
-              <a:t>      .ProjectTo&lt;LibroDto&gt;(</a:t>
-            </a:r>
-            <a:endParaRPr lang="en-US" sz="1000" dirty="0"/>
-          </a:p>
-        </p:txBody>
-      </p:sp>
-      <p:sp>
-        <p:nvSpPr>
-          <p:cNvPr id="35" name="Text 33"/>
-          <p:cNvSpPr/>
-          <p:nvPr/>
-        </p:nvSpPr>
-        <p:spPr>
-          <a:xfrm>
-            <a:off x="6583680" y="4599432"/>
-            <a:ext cx="4800600" cy="210312"/>
-          </a:xfrm>
-          <a:prstGeom prst="rect">
-            <a:avLst/>
-          </a:prstGeom>
-          <a:noFill/>
-          <a:ln/>
-        </p:spPr>
-        <p:txBody>
-          <a:bodyPr wrap="square" lIns="0" tIns="0" rIns="0" bIns="0" rtlCol="0" anchor="ctr"/>
-          <a:lstStyle/>
-          <a:p>
-            <a:pPr marL="0" indent="0" algn="l">
-              <a:buNone/>
-            </a:pPr>
-            <a:r>
-              <a:rPr lang="en-US" sz="1000" dirty="0">
-                <a:solidFill>
-                  <a:srgbClr val="8FD694"/>
-                </a:solidFill>
-                <a:latin typeface="Courier New" pitchFamily="34" charset="0"/>
-                <a:ea typeface="Courier New" pitchFamily="34" charset="-122"/>
-                <a:cs typeface="Courier New" pitchFamily="34" charset="-120"/>
-              </a:rPr>
-              <a:t>        _mapper.ConfigurationProvider)</a:t>
-            </a:r>
-            <a:endParaRPr lang="en-US" sz="1000" dirty="0"/>
-          </a:p>
-        </p:txBody>
-      </p:sp>
-      <p:sp>
-        <p:nvSpPr>
-          <p:cNvPr id="36" name="Text 34"/>
-          <p:cNvSpPr/>
-          <p:nvPr/>
-        </p:nvSpPr>
-        <p:spPr>
-          <a:xfrm>
-            <a:off x="6583680" y="4823460"/>
-            <a:ext cx="4800600" cy="210312"/>
-          </a:xfrm>
-          <a:prstGeom prst="rect">
-            <a:avLst/>
-          </a:prstGeom>
-          <a:noFill/>
-          <a:ln/>
-        </p:spPr>
-        <p:txBody>
-          <a:bodyPr wrap="square" lIns="0" tIns="0" rIns="0" bIns="0" rtlCol="0" anchor="ctr"/>
-          <a:lstStyle/>
-          <a:p>
-            <a:pPr marL="0" indent="0" algn="l">
-              <a:buNone/>
-            </a:pPr>
-            <a:r>
-              <a:rPr lang="en-US" sz="1000" dirty="0">
-                <a:solidFill>
-                  <a:srgbClr val="8FD694"/>
-                </a:solidFill>
-                <a:latin typeface="Courier New" pitchFamily="34" charset="0"/>
-                <a:ea typeface="Courier New" pitchFamily="34" charset="-122"/>
-                <a:cs typeface="Courier New" pitchFamily="34" charset="-120"/>
-              </a:rPr>
-              <a:t>      .ToListAsync();</a:t>
-            </a:r>
-            <a:endParaRPr lang="en-US" sz="1000" dirty="0"/>
-          </a:p>
-        </p:txBody>
-      </p:sp>
-      <p:sp>
-        <p:nvSpPr>
-          <p:cNvPr id="37" name="Text 35"/>
-          <p:cNvSpPr/>
-          <p:nvPr/>
-        </p:nvSpPr>
-        <p:spPr>
-          <a:xfrm>
-            <a:off x="6583680" y="5047488"/>
-            <a:ext cx="4800600" cy="210312"/>
-          </a:xfrm>
-          <a:prstGeom prst="rect">
-            <a:avLst/>
-          </a:prstGeom>
-          <a:noFill/>
-          <a:ln/>
-        </p:spPr>
-        <p:txBody>
-          <a:bodyPr wrap="square" lIns="0" tIns="0" rIns="0" bIns="0" rtlCol="0" anchor="ctr"/>
-          <a:lstStyle/>
-          <a:p>
-            <a:pPr marL="0" indent="0" algn="l">
-              <a:buNone/>
-            </a:pPr>
-            <a:r>
-              <a:rPr lang="en-US" sz="1000" dirty="0">
-                <a:solidFill>
-                  <a:srgbClr val="E8EEF2"/>
-                </a:solidFill>
-                <a:latin typeface="Courier New" pitchFamily="34" charset="0"/>
-                <a:ea typeface="Courier New" pitchFamily="34" charset="-122"/>
-                <a:cs typeface="Courier New" pitchFamily="34" charset="-120"/>
-              </a:rPr>
-              <a:t>  }</a:t>
-            </a:r>
-            <a:endParaRPr lang="en-US" sz="1000" dirty="0"/>
-          </a:p>
-        </p:txBody>
-      </p:sp>
-      <p:sp>
-        <p:nvSpPr>
-          <p:cNvPr id="38" name="Text 36"/>
-          <p:cNvSpPr/>
-          <p:nvPr/>
-        </p:nvSpPr>
-        <p:spPr>
-          <a:xfrm>
-            <a:off x="6583680" y="5271516"/>
-            <a:ext cx="4800600" cy="210312"/>
-          </a:xfrm>
-          <a:prstGeom prst="rect">
-            <a:avLst/>
-          </a:prstGeom>
-          <a:noFill/>
-          <a:ln/>
-        </p:spPr>
-        <p:txBody>
-          <a:bodyPr wrap="square" lIns="0" tIns="0" rIns="0" bIns="0" rtlCol="0" anchor="ctr"/>
-          <a:lstStyle/>
-          <a:p>
-            <a:pPr marL="0" indent="0" algn="l">
-              <a:buNone/>
-            </a:pPr>
-            <a:r>
-              <a:rPr lang="en-US" sz="1000" dirty="0">
-                <a:solidFill>
-                  <a:srgbClr val="E8EEF2"/>
-                </a:solidFill>
-                <a:latin typeface="Courier New" pitchFamily="34" charset="0"/>
-                <a:ea typeface="Courier New" pitchFamily="34" charset="-122"/>
-                <a:cs typeface="Courier New" pitchFamily="34" charset="-120"/>
-              </a:rPr>
-              <a:t>}</a:t>
-            </a:r>
-            <a:endParaRPr lang="en-US" sz="1000" dirty="0"/>
-          </a:p>
-        </p:txBody>
-      </p:sp>
-      <p:sp>
-        <p:nvSpPr>
-          <p:cNvPr id="39" name="Text 37"/>
-          <p:cNvSpPr/>
-          <p:nvPr/>
-        </p:nvSpPr>
-        <p:spPr>
-          <a:xfrm>
-            <a:off x="6583680" y="5349240"/>
-            <a:ext cx="4800600" cy="457200"/>
-          </a:xfrm>
-          <a:prstGeom prst="rect">
-            <a:avLst/>
-          </a:prstGeom>
-          <a:noFill/>
-          <a:ln/>
-        </p:spPr>
-        <p:txBody>
-          <a:bodyPr wrap="square" lIns="0" tIns="0" rIns="0" bIns="0" rtlCol="0" anchor="ctr"/>
-          <a:lstStyle/>
-          <a:p>
-            <a:pPr marL="0" indent="0" algn="l">
-              <a:buNone/>
-            </a:pPr>
-            <a:r>
-              <a:rPr lang="en-US" sz="950" i="1" dirty="0">
-                <a:solidFill>
-                  <a:srgbClr val="CADCFC"/>
+                  <a:srgbClr val="EAF3F8"/>
                 </a:solidFill>
                 <a:latin typeface="Calibri" pitchFamily="34" charset="0"/>
                 <a:ea typeface="Calibri" pitchFamily="34" charset="-122"/>
                 <a:cs typeface="Calibri" pitchFamily="34" charset="-120"/>
               </a:rPr>
-              <a:t>ProjectTo, a diferencia de Map, arma el SELECT solo con las columnas que el DTO necesita.</a:t>
-            </a:r>
-            <a:endParaRPr lang="en-US" sz="950" dirty="0"/>
+              <a:t>El esquema interno puede cambiar sin romper el contrato público de la API.</a:t>
+            </a:r>
+            <a:endParaRPr lang="en-US" sz="1000" dirty="0"/>
+          </a:p>
+        </p:txBody>
+      </p:sp>
+      <p:sp>
+        <p:nvSpPr>
+          <p:cNvPr id="20" name="Shape 18"/>
+          <p:cNvSpPr/>
+          <p:nvPr/>
+        </p:nvSpPr>
+        <p:spPr>
+          <a:xfrm>
+            <a:off x="6272784" y="3977640"/>
+            <a:ext cx="2606040" cy="1737360"/>
+          </a:xfrm>
+          <a:prstGeom prst="roundRect">
+            <a:avLst>
+              <a:gd name="adj" fmla="val 4211"/>
+            </a:avLst>
+          </a:prstGeom>
+          <a:solidFill>
+            <a:srgbClr val="065A82"/>
+          </a:solidFill>
+          <a:ln/>
+        </p:spPr>
+        <p:txBody>
+          <a:bodyPr/>
+          <a:lstStyle/>
+          <a:p>
+            <a:endParaRPr lang="es-AR"/>
+          </a:p>
+        </p:txBody>
+      </p:sp>
+      <p:sp>
+        <p:nvSpPr>
+          <p:cNvPr id="21" name="Text 19"/>
+          <p:cNvSpPr/>
+          <p:nvPr/>
+        </p:nvSpPr>
+        <p:spPr>
+          <a:xfrm>
+            <a:off x="6437376" y="4160520"/>
+            <a:ext cx="2276856" cy="548640"/>
+          </a:xfrm>
+          <a:prstGeom prst="rect">
+            <a:avLst/>
+          </a:prstGeom>
+          <a:noFill/>
+          <a:ln/>
+        </p:spPr>
+        <p:txBody>
+          <a:bodyPr wrap="square" lIns="0" tIns="0" rIns="0" bIns="0" rtlCol="0" anchor="ctr"/>
+          <a:lstStyle/>
+          <a:p>
+            <a:pPr marL="0" indent="0" algn="l">
+              <a:buNone/>
+            </a:pPr>
+            <a:r>
+              <a:rPr lang="en-US" sz="1250" b="1" dirty="0">
+                <a:solidFill>
+                  <a:srgbClr val="FFFFFF"/>
+                </a:solidFill>
+                <a:latin typeface="Cambria" pitchFamily="34" charset="0"/>
+                <a:ea typeface="Cambria" pitchFamily="34" charset="-122"/>
+                <a:cs typeface="Cambria" pitchFamily="34" charset="-120"/>
+              </a:rPr>
+              <a:t>Convención + configuración</a:t>
+            </a:r>
+            <a:endParaRPr lang="en-US" sz="1250" dirty="0"/>
+          </a:p>
+        </p:txBody>
+      </p:sp>
+      <p:sp>
+        <p:nvSpPr>
+          <p:cNvPr id="22" name="Text 20"/>
+          <p:cNvSpPr/>
+          <p:nvPr/>
+        </p:nvSpPr>
+        <p:spPr>
+          <a:xfrm>
+            <a:off x="6437376" y="4754880"/>
+            <a:ext cx="2276856" cy="914400"/>
+          </a:xfrm>
+          <a:prstGeom prst="rect">
+            <a:avLst/>
+          </a:prstGeom>
+          <a:noFill/>
+          <a:ln/>
+        </p:spPr>
+        <p:txBody>
+          <a:bodyPr wrap="square" lIns="0" tIns="0" rIns="0" bIns="0" rtlCol="0" anchor="ctr"/>
+          <a:lstStyle/>
+          <a:p>
+            <a:pPr marL="0" indent="0" algn="l">
+              <a:buNone/>
+            </a:pPr>
+            <a:r>
+              <a:rPr lang="en-US" sz="1000" dirty="0">
+                <a:solidFill>
+                  <a:srgbClr val="EAF3F8"/>
+                </a:solidFill>
+                <a:latin typeface="Calibri" pitchFamily="34" charset="0"/>
+                <a:ea typeface="Calibri" pitchFamily="34" charset="-122"/>
+                <a:cs typeface="Calibri" pitchFamily="34" charset="-120"/>
+              </a:rPr>
+              <a:t>Mapea automáticamente propiedades con el mismo nombre, y permite reglas a medida para el resto.</a:t>
+            </a:r>
+            <a:endParaRPr lang="en-US" sz="1000" dirty="0"/>
+          </a:p>
+        </p:txBody>
+      </p:sp>
+      <p:sp>
+        <p:nvSpPr>
+          <p:cNvPr id="23" name="Shape 21"/>
+          <p:cNvSpPr/>
+          <p:nvPr/>
+        </p:nvSpPr>
+        <p:spPr>
+          <a:xfrm>
+            <a:off x="9134856" y="3977640"/>
+            <a:ext cx="2606040" cy="1737360"/>
+          </a:xfrm>
+          <a:prstGeom prst="roundRect">
+            <a:avLst>
+              <a:gd name="adj" fmla="val 4211"/>
+            </a:avLst>
+          </a:prstGeom>
+          <a:solidFill>
+            <a:srgbClr val="1C7293"/>
+          </a:solidFill>
+          <a:ln/>
+        </p:spPr>
+        <p:txBody>
+          <a:bodyPr/>
+          <a:lstStyle/>
+          <a:p>
+            <a:endParaRPr lang="es-AR"/>
+          </a:p>
+        </p:txBody>
+      </p:sp>
+      <p:sp>
+        <p:nvSpPr>
+          <p:cNvPr id="24" name="Text 22"/>
+          <p:cNvSpPr/>
+          <p:nvPr/>
+        </p:nvSpPr>
+        <p:spPr>
+          <a:xfrm>
+            <a:off x="9299448" y="4160520"/>
+            <a:ext cx="2276856" cy="548640"/>
+          </a:xfrm>
+          <a:prstGeom prst="rect">
+            <a:avLst/>
+          </a:prstGeom>
+          <a:noFill/>
+          <a:ln/>
+        </p:spPr>
+        <p:txBody>
+          <a:bodyPr wrap="square" lIns="0" tIns="0" rIns="0" bIns="0" rtlCol="0" anchor="ctr"/>
+          <a:lstStyle/>
+          <a:p>
+            <a:pPr marL="0" indent="0" algn="l">
+              <a:buNone/>
+            </a:pPr>
+            <a:r>
+              <a:rPr lang="en-US" sz="1250" b="1" dirty="0">
+                <a:solidFill>
+                  <a:srgbClr val="FFFFFF"/>
+                </a:solidFill>
+                <a:latin typeface="Cambria" pitchFamily="34" charset="0"/>
+                <a:ea typeface="Cambria" pitchFamily="34" charset="-122"/>
+                <a:cs typeface="Cambria" pitchFamily="34" charset="-120"/>
+              </a:rPr>
+              <a:t>Se integra con LINQ</a:t>
+            </a:r>
+            <a:endParaRPr lang="en-US" sz="1250" dirty="0"/>
+          </a:p>
+        </p:txBody>
+      </p:sp>
+      <p:sp>
+        <p:nvSpPr>
+          <p:cNvPr id="25" name="Text 23"/>
+          <p:cNvSpPr/>
+          <p:nvPr/>
+        </p:nvSpPr>
+        <p:spPr>
+          <a:xfrm>
+            <a:off x="9299448" y="4754880"/>
+            <a:ext cx="2276856" cy="914400"/>
+          </a:xfrm>
+          <a:prstGeom prst="rect">
+            <a:avLst/>
+          </a:prstGeom>
+          <a:noFill/>
+          <a:ln/>
+        </p:spPr>
+        <p:txBody>
+          <a:bodyPr wrap="square" lIns="0" tIns="0" rIns="0" bIns="0" rtlCol="0" anchor="ctr"/>
+          <a:lstStyle/>
+          <a:p>
+            <a:pPr marL="0" indent="0" algn="l">
+              <a:buNone/>
+            </a:pPr>
+            <a:r>
+              <a:rPr lang="en-US" sz="1000" dirty="0">
+                <a:solidFill>
+                  <a:srgbClr val="EAF3F8"/>
+                </a:solidFill>
+                <a:latin typeface="Calibri" pitchFamily="34" charset="0"/>
+                <a:ea typeface="Calibri" pitchFamily="34" charset="-122"/>
+                <a:cs typeface="Calibri" pitchFamily="34" charset="-120"/>
+              </a:rPr>
+              <a:t>ProjectTo&lt;T&gt;() traduce el mapeo a la consulta SQL, trayendo solo las columnas necesarias.</a:t>
+            </a:r>
+            <a:endParaRPr lang="en-US" sz="1000" dirty="0"/>
           </a:p>
         </p:txBody>
       </p:sp>
@@ -7190,6 +7108,1460 @@
 </file>
 
 <file path=ppt/slides/slide15.xml><?xml version="1.0" encoding="utf-8"?>
+<p:sld xmlns:a="http://schemas.openxmlformats.org/drawingml/2006/main" xmlns:r="http://schemas.openxmlformats.org/officeDocument/2006/relationships" xmlns:p="http://schemas.openxmlformats.org/presentationml/2006/main">
+  <p:cSld>
+    <p:spTree>
+      <p:nvGrpSpPr>
+        <p:cNvPr id="1" name=""/>
+        <p:cNvGrpSpPr/>
+        <p:nvPr/>
+      </p:nvGrpSpPr>
+      <p:grpSpPr>
+        <a:xfrm>
+          <a:off x="0" y="0"/>
+          <a:ext cx="0" cy="0"/>
+          <a:chOff x="0" y="0"/>
+          <a:chExt cx="0" cy="0"/>
+        </a:xfrm>
+      </p:grpSpPr>
+      <p:sp>
+        <p:nvSpPr>
+          <p:cNvPr id="2" name="Text 0"/>
+          <p:cNvSpPr/>
+          <p:nvPr/>
+        </p:nvSpPr>
+        <p:spPr>
+          <a:xfrm>
+            <a:off x="548640" y="411480"/>
+            <a:ext cx="11091672" cy="685800"/>
+          </a:xfrm>
+          <a:prstGeom prst="rect">
+            <a:avLst/>
+          </a:prstGeom>
+          <a:noFill/>
+          <a:ln/>
+        </p:spPr>
+        <p:txBody>
+          <a:bodyPr wrap="square" lIns="0" tIns="0" rIns="0" bIns="0" rtlCol="0" anchor="ctr"/>
+          <a:lstStyle/>
+          <a:p>
+            <a:pPr marL="0" indent="0" algn="l">
+              <a:buNone/>
+            </a:pPr>
+            <a:r>
+              <a:rPr lang="en-US" sz="3000" b="1" dirty="0">
+                <a:solidFill>
+                  <a:srgbClr val="21295C"/>
+                </a:solidFill>
+                <a:latin typeface="Cambria" pitchFamily="34" charset="0"/>
+                <a:ea typeface="Cambria" pitchFamily="34" charset="-122"/>
+                <a:cs typeface="Cambria" pitchFamily="34" charset="-120"/>
+              </a:rPr>
+              <a:t>AutoMapper en la práctica</a:t>
+            </a:r>
+            <a:endParaRPr lang="en-US" sz="3000" dirty="0"/>
+          </a:p>
+        </p:txBody>
+      </p:sp>
+      <p:sp>
+        <p:nvSpPr>
+          <p:cNvPr id="3" name="Text 1"/>
+          <p:cNvSpPr/>
+          <p:nvPr/>
+        </p:nvSpPr>
+        <p:spPr>
+          <a:xfrm>
+            <a:off x="548640" y="1024128"/>
+            <a:ext cx="11091672" cy="365760"/>
+          </a:xfrm>
+          <a:prstGeom prst="rect">
+            <a:avLst/>
+          </a:prstGeom>
+          <a:noFill/>
+          <a:ln/>
+        </p:spPr>
+        <p:txBody>
+          <a:bodyPr wrap="square" lIns="0" tIns="0" rIns="0" bIns="0" rtlCol="0" anchor="ctr"/>
+          <a:lstStyle/>
+          <a:p>
+            <a:pPr marL="0" indent="0" algn="l">
+              <a:buNone/>
+            </a:pPr>
+            <a:r>
+              <a:rPr lang="en-US" sz="1400" i="1" dirty="0">
+                <a:solidFill>
+                  <a:srgbClr val="1C7293"/>
+                </a:solidFill>
+                <a:latin typeface="Calibri" pitchFamily="34" charset="0"/>
+                <a:ea typeface="Calibri" pitchFamily="34" charset="-122"/>
+                <a:cs typeface="Calibri" pitchFamily="34" charset="-120"/>
+              </a:rPr>
+              <a:t>Profiles, registro en DI y proyección eficiente con EF Core</a:t>
+            </a:r>
+            <a:endParaRPr lang="en-US" sz="1400" dirty="0"/>
+          </a:p>
+        </p:txBody>
+      </p:sp>
+      <p:sp>
+        <p:nvSpPr>
+          <p:cNvPr id="4" name="Shape 2"/>
+          <p:cNvSpPr/>
+          <p:nvPr/>
+        </p:nvSpPr>
+        <p:spPr>
+          <a:xfrm>
+            <a:off x="548640" y="1828800"/>
+            <a:ext cx="5486400" cy="4023360"/>
+          </a:xfrm>
+          <a:prstGeom prst="roundRect">
+            <a:avLst>
+              <a:gd name="adj" fmla="val 1818"/>
+            </a:avLst>
+          </a:prstGeom>
+          <a:solidFill>
+            <a:srgbClr val="132139"/>
+          </a:solidFill>
+          <a:ln/>
+        </p:spPr>
+        <p:txBody>
+          <a:bodyPr/>
+          <a:lstStyle/>
+          <a:p>
+            <a:endParaRPr lang="es-AR"/>
+          </a:p>
+        </p:txBody>
+      </p:sp>
+      <p:sp>
+        <p:nvSpPr>
+          <p:cNvPr id="5" name="Text 3"/>
+          <p:cNvSpPr/>
+          <p:nvPr/>
+        </p:nvSpPr>
+        <p:spPr>
+          <a:xfrm>
+            <a:off x="822960" y="2011680"/>
+            <a:ext cx="4937760" cy="292608"/>
+          </a:xfrm>
+          <a:prstGeom prst="rect">
+            <a:avLst/>
+          </a:prstGeom>
+          <a:noFill/>
+          <a:ln/>
+        </p:spPr>
+        <p:txBody>
+          <a:bodyPr wrap="square" lIns="0" tIns="0" rIns="0" bIns="0" rtlCol="0" anchor="ctr"/>
+          <a:lstStyle/>
+          <a:p>
+            <a:pPr marL="0" indent="0" algn="l">
+              <a:buNone/>
+            </a:pPr>
+            <a:r>
+              <a:rPr lang="en-US" sz="1200" b="1" dirty="0">
+                <a:solidFill>
+                  <a:srgbClr val="8FA3C9"/>
+                </a:solidFill>
+                <a:latin typeface="Calibri" pitchFamily="34" charset="0"/>
+                <a:ea typeface="Calibri" pitchFamily="34" charset="-122"/>
+                <a:cs typeface="Calibri" pitchFamily="34" charset="-120"/>
+              </a:rPr>
+              <a:t>Definir el mapeo (Profile)</a:t>
+            </a:r>
+            <a:endParaRPr lang="en-US" sz="1200" dirty="0"/>
+          </a:p>
+        </p:txBody>
+      </p:sp>
+      <p:sp>
+        <p:nvSpPr>
+          <p:cNvPr id="6" name="Text 4"/>
+          <p:cNvSpPr/>
+          <p:nvPr/>
+        </p:nvSpPr>
+        <p:spPr>
+          <a:xfrm>
+            <a:off x="822960" y="2359152"/>
+            <a:ext cx="4937760" cy="192024"/>
+          </a:xfrm>
+          <a:prstGeom prst="rect">
+            <a:avLst/>
+          </a:prstGeom>
+          <a:noFill/>
+          <a:ln/>
+        </p:spPr>
+        <p:txBody>
+          <a:bodyPr wrap="square" lIns="0" tIns="0" rIns="0" bIns="0" rtlCol="0" anchor="ctr"/>
+          <a:lstStyle/>
+          <a:p>
+            <a:pPr marL="0" indent="0" algn="l">
+              <a:buNone/>
+            </a:pPr>
+            <a:r>
+              <a:rPr lang="en-US" sz="970" dirty="0">
+                <a:solidFill>
+                  <a:srgbClr val="8FC7E8"/>
+                </a:solidFill>
+                <a:latin typeface="Courier New" pitchFamily="34" charset="0"/>
+                <a:ea typeface="Courier New" pitchFamily="34" charset="-122"/>
+                <a:cs typeface="Courier New" pitchFamily="34" charset="-120"/>
+              </a:rPr>
+              <a:t>public class MappingProfile</a:t>
+            </a:r>
+            <a:endParaRPr lang="en-US" sz="970" dirty="0"/>
+          </a:p>
+        </p:txBody>
+      </p:sp>
+      <p:sp>
+        <p:nvSpPr>
+          <p:cNvPr id="7" name="Text 5"/>
+          <p:cNvSpPr/>
+          <p:nvPr/>
+        </p:nvSpPr>
+        <p:spPr>
+          <a:xfrm>
+            <a:off x="822960" y="2562149"/>
+            <a:ext cx="4937760" cy="192024"/>
+          </a:xfrm>
+          <a:prstGeom prst="rect">
+            <a:avLst/>
+          </a:prstGeom>
+          <a:noFill/>
+          <a:ln/>
+        </p:spPr>
+        <p:txBody>
+          <a:bodyPr wrap="square" lIns="0" tIns="0" rIns="0" bIns="0" rtlCol="0" anchor="ctr"/>
+          <a:lstStyle/>
+          <a:p>
+            <a:pPr marL="0" indent="0" algn="l">
+              <a:buNone/>
+            </a:pPr>
+            <a:r>
+              <a:rPr lang="en-US" sz="970" dirty="0">
+                <a:solidFill>
+                  <a:srgbClr val="8FC7E8"/>
+                </a:solidFill>
+                <a:latin typeface="Courier New" pitchFamily="34" charset="0"/>
+                <a:ea typeface="Courier New" pitchFamily="34" charset="-122"/>
+                <a:cs typeface="Courier New" pitchFamily="34" charset="-120"/>
+              </a:rPr>
+              <a:t>  : Profile</a:t>
+            </a:r>
+            <a:endParaRPr lang="en-US" sz="970" dirty="0"/>
+          </a:p>
+        </p:txBody>
+      </p:sp>
+      <p:sp>
+        <p:nvSpPr>
+          <p:cNvPr id="8" name="Text 6"/>
+          <p:cNvSpPr/>
+          <p:nvPr/>
+        </p:nvSpPr>
+        <p:spPr>
+          <a:xfrm>
+            <a:off x="822960" y="2765146"/>
+            <a:ext cx="4937760" cy="192024"/>
+          </a:xfrm>
+          <a:prstGeom prst="rect">
+            <a:avLst/>
+          </a:prstGeom>
+          <a:noFill/>
+          <a:ln/>
+        </p:spPr>
+        <p:txBody>
+          <a:bodyPr wrap="square" lIns="0" tIns="0" rIns="0" bIns="0" rtlCol="0" anchor="ctr"/>
+          <a:lstStyle/>
+          <a:p>
+            <a:pPr marL="0" indent="0" algn="l">
+              <a:buNone/>
+            </a:pPr>
+            <a:r>
+              <a:rPr lang="en-US" sz="970" dirty="0">
+                <a:solidFill>
+                  <a:srgbClr val="E8EEF2"/>
+                </a:solidFill>
+                <a:latin typeface="Courier New" pitchFamily="34" charset="0"/>
+                <a:ea typeface="Courier New" pitchFamily="34" charset="-122"/>
+                <a:cs typeface="Courier New" pitchFamily="34" charset="-120"/>
+              </a:rPr>
+              <a:t>{</a:t>
+            </a:r>
+            <a:endParaRPr lang="en-US" sz="970" dirty="0"/>
+          </a:p>
+        </p:txBody>
+      </p:sp>
+      <p:sp>
+        <p:nvSpPr>
+          <p:cNvPr id="9" name="Text 7"/>
+          <p:cNvSpPr/>
+          <p:nvPr/>
+        </p:nvSpPr>
+        <p:spPr>
+          <a:xfrm>
+            <a:off x="822960" y="2968142"/>
+            <a:ext cx="4937760" cy="192024"/>
+          </a:xfrm>
+          <a:prstGeom prst="rect">
+            <a:avLst/>
+          </a:prstGeom>
+          <a:noFill/>
+          <a:ln/>
+        </p:spPr>
+        <p:txBody>
+          <a:bodyPr wrap="square" lIns="0" tIns="0" rIns="0" bIns="0" rtlCol="0" anchor="ctr"/>
+          <a:lstStyle/>
+          <a:p>
+            <a:pPr marL="0" indent="0" algn="l">
+              <a:buNone/>
+            </a:pPr>
+            <a:r>
+              <a:rPr lang="en-US" sz="970" dirty="0">
+                <a:solidFill>
+                  <a:srgbClr val="E8EEF2"/>
+                </a:solidFill>
+                <a:latin typeface="Courier New" pitchFamily="34" charset="0"/>
+                <a:ea typeface="Courier New" pitchFamily="34" charset="-122"/>
+                <a:cs typeface="Courier New" pitchFamily="34" charset="-120"/>
+              </a:rPr>
+              <a:t>  public MappingProfile()</a:t>
+            </a:r>
+            <a:endParaRPr lang="en-US" sz="970" dirty="0"/>
+          </a:p>
+        </p:txBody>
+      </p:sp>
+      <p:sp>
+        <p:nvSpPr>
+          <p:cNvPr id="10" name="Text 8"/>
+          <p:cNvSpPr/>
+          <p:nvPr/>
+        </p:nvSpPr>
+        <p:spPr>
+          <a:xfrm>
+            <a:off x="822960" y="3171139"/>
+            <a:ext cx="4937760" cy="192024"/>
+          </a:xfrm>
+          <a:prstGeom prst="rect">
+            <a:avLst/>
+          </a:prstGeom>
+          <a:noFill/>
+          <a:ln/>
+        </p:spPr>
+        <p:txBody>
+          <a:bodyPr wrap="square" lIns="0" tIns="0" rIns="0" bIns="0" rtlCol="0" anchor="ctr"/>
+          <a:lstStyle/>
+          <a:p>
+            <a:pPr marL="0" indent="0" algn="l">
+              <a:buNone/>
+            </a:pPr>
+            <a:r>
+              <a:rPr lang="en-US" sz="970" dirty="0">
+                <a:solidFill>
+                  <a:srgbClr val="E8EEF2"/>
+                </a:solidFill>
+                <a:latin typeface="Courier New" pitchFamily="34" charset="0"/>
+                <a:ea typeface="Courier New" pitchFamily="34" charset="-122"/>
+                <a:cs typeface="Courier New" pitchFamily="34" charset="-120"/>
+              </a:rPr>
+              <a:t>  {</a:t>
+            </a:r>
+            <a:endParaRPr lang="en-US" sz="970" dirty="0"/>
+          </a:p>
+        </p:txBody>
+      </p:sp>
+      <p:sp>
+        <p:nvSpPr>
+          <p:cNvPr id="11" name="Text 9"/>
+          <p:cNvSpPr/>
+          <p:nvPr/>
+        </p:nvSpPr>
+        <p:spPr>
+          <a:xfrm>
+            <a:off x="822960" y="3374136"/>
+            <a:ext cx="4937760" cy="192024"/>
+          </a:xfrm>
+          <a:prstGeom prst="rect">
+            <a:avLst/>
+          </a:prstGeom>
+          <a:noFill/>
+          <a:ln/>
+        </p:spPr>
+        <p:txBody>
+          <a:bodyPr wrap="square" lIns="0" tIns="0" rIns="0" bIns="0" rtlCol="0" anchor="ctr"/>
+          <a:lstStyle/>
+          <a:p>
+            <a:pPr marL="0" indent="0" algn="l">
+              <a:buNone/>
+            </a:pPr>
+            <a:r>
+              <a:rPr lang="en-US" sz="970" dirty="0">
+                <a:solidFill>
+                  <a:srgbClr val="8FD694"/>
+                </a:solidFill>
+                <a:latin typeface="Courier New" pitchFamily="34" charset="0"/>
+                <a:ea typeface="Courier New" pitchFamily="34" charset="-122"/>
+                <a:cs typeface="Courier New" pitchFamily="34" charset="-120"/>
+              </a:rPr>
+              <a:t>    CreateMap&lt;Libro, LibroDto&gt;();</a:t>
+            </a:r>
+            <a:endParaRPr lang="en-US" sz="970" dirty="0"/>
+          </a:p>
+        </p:txBody>
+      </p:sp>
+      <p:sp>
+        <p:nvSpPr>
+          <p:cNvPr id="12" name="Text 10"/>
+          <p:cNvSpPr/>
+          <p:nvPr/>
+        </p:nvSpPr>
+        <p:spPr>
+          <a:xfrm>
+            <a:off x="822960" y="3577133"/>
+            <a:ext cx="4937760" cy="192024"/>
+          </a:xfrm>
+          <a:prstGeom prst="rect">
+            <a:avLst/>
+          </a:prstGeom>
+          <a:noFill/>
+          <a:ln/>
+        </p:spPr>
+        <p:txBody>
+          <a:bodyPr wrap="square" lIns="0" tIns="0" rIns="0" bIns="0" rtlCol="0" anchor="ctr"/>
+          <a:lstStyle/>
+          <a:p>
+            <a:pPr marL="0" indent="0" algn="l">
+              <a:buNone/>
+            </a:pPr>
+            <a:endParaRPr lang="en-US" sz="970" dirty="0"/>
+          </a:p>
+        </p:txBody>
+      </p:sp>
+      <p:sp>
+        <p:nvSpPr>
+          <p:cNvPr id="13" name="Text 11"/>
+          <p:cNvSpPr/>
+          <p:nvPr/>
+        </p:nvSpPr>
+        <p:spPr>
+          <a:xfrm>
+            <a:off x="822960" y="3780130"/>
+            <a:ext cx="4937760" cy="192024"/>
+          </a:xfrm>
+          <a:prstGeom prst="rect">
+            <a:avLst/>
+          </a:prstGeom>
+          <a:noFill/>
+          <a:ln/>
+        </p:spPr>
+        <p:txBody>
+          <a:bodyPr wrap="square" lIns="0" tIns="0" rIns="0" bIns="0" rtlCol="0" anchor="ctr"/>
+          <a:lstStyle/>
+          <a:p>
+            <a:pPr marL="0" indent="0" algn="l">
+              <a:buNone/>
+            </a:pPr>
+            <a:r>
+              <a:rPr lang="en-US" sz="970" dirty="0">
+                <a:solidFill>
+                  <a:srgbClr val="8FD694"/>
+                </a:solidFill>
+                <a:latin typeface="Courier New" pitchFamily="34" charset="0"/>
+                <a:ea typeface="Courier New" pitchFamily="34" charset="-122"/>
+                <a:cs typeface="Courier New" pitchFamily="34" charset="-120"/>
+              </a:rPr>
+              <a:t>    CreateMap&lt;Autor, AutorDto&gt;()</a:t>
+            </a:r>
+            <a:endParaRPr lang="en-US" sz="970" dirty="0"/>
+          </a:p>
+        </p:txBody>
+      </p:sp>
+      <p:sp>
+        <p:nvSpPr>
+          <p:cNvPr id="14" name="Text 12"/>
+          <p:cNvSpPr/>
+          <p:nvPr/>
+        </p:nvSpPr>
+        <p:spPr>
+          <a:xfrm>
+            <a:off x="822960" y="3983126"/>
+            <a:ext cx="4937760" cy="192024"/>
+          </a:xfrm>
+          <a:prstGeom prst="rect">
+            <a:avLst/>
+          </a:prstGeom>
+          <a:noFill/>
+          <a:ln/>
+        </p:spPr>
+        <p:txBody>
+          <a:bodyPr wrap="square" lIns="0" tIns="0" rIns="0" bIns="0" rtlCol="0" anchor="ctr"/>
+          <a:lstStyle/>
+          <a:p>
+            <a:pPr marL="0" indent="0" algn="l">
+              <a:buNone/>
+            </a:pPr>
+            <a:r>
+              <a:rPr lang="en-US" sz="970" dirty="0">
+                <a:solidFill>
+                  <a:srgbClr val="8FD694"/>
+                </a:solidFill>
+                <a:latin typeface="Courier New" pitchFamily="34" charset="0"/>
+                <a:ea typeface="Courier New" pitchFamily="34" charset="-122"/>
+                <a:cs typeface="Courier New" pitchFamily="34" charset="-120"/>
+              </a:rPr>
+              <a:t>      .ForMember(d =&gt; d.CantidadLibros,</a:t>
+            </a:r>
+            <a:endParaRPr lang="en-US" sz="970" dirty="0"/>
+          </a:p>
+        </p:txBody>
+      </p:sp>
+      <p:sp>
+        <p:nvSpPr>
+          <p:cNvPr id="15" name="Text 13"/>
+          <p:cNvSpPr/>
+          <p:nvPr/>
+        </p:nvSpPr>
+        <p:spPr>
+          <a:xfrm>
+            <a:off x="822960" y="4186123"/>
+            <a:ext cx="4937760" cy="192024"/>
+          </a:xfrm>
+          <a:prstGeom prst="rect">
+            <a:avLst/>
+          </a:prstGeom>
+          <a:noFill/>
+          <a:ln/>
+        </p:spPr>
+        <p:txBody>
+          <a:bodyPr wrap="square" lIns="0" tIns="0" rIns="0" bIns="0" rtlCol="0" anchor="ctr"/>
+          <a:lstStyle/>
+          <a:p>
+            <a:pPr marL="0" indent="0" algn="l">
+              <a:buNone/>
+            </a:pPr>
+            <a:r>
+              <a:rPr lang="en-US" sz="970" dirty="0">
+                <a:solidFill>
+                  <a:srgbClr val="8FD694"/>
+                </a:solidFill>
+                <a:latin typeface="Courier New" pitchFamily="34" charset="0"/>
+                <a:ea typeface="Courier New" pitchFamily="34" charset="-122"/>
+                <a:cs typeface="Courier New" pitchFamily="34" charset="-120"/>
+              </a:rPr>
+              <a:t>        opt =&gt; opt.MapFrom(</a:t>
+            </a:r>
+            <a:endParaRPr lang="en-US" sz="970" dirty="0"/>
+          </a:p>
+        </p:txBody>
+      </p:sp>
+      <p:sp>
+        <p:nvSpPr>
+          <p:cNvPr id="16" name="Text 14"/>
+          <p:cNvSpPr/>
+          <p:nvPr/>
+        </p:nvSpPr>
+        <p:spPr>
+          <a:xfrm>
+            <a:off x="822960" y="4389120"/>
+            <a:ext cx="4937760" cy="192024"/>
+          </a:xfrm>
+          <a:prstGeom prst="rect">
+            <a:avLst/>
+          </a:prstGeom>
+          <a:noFill/>
+          <a:ln/>
+        </p:spPr>
+        <p:txBody>
+          <a:bodyPr wrap="square" lIns="0" tIns="0" rIns="0" bIns="0" rtlCol="0" anchor="ctr"/>
+          <a:lstStyle/>
+          <a:p>
+            <a:pPr marL="0" indent="0" algn="l">
+              <a:buNone/>
+            </a:pPr>
+            <a:r>
+              <a:rPr lang="en-US" sz="970" dirty="0">
+                <a:solidFill>
+                  <a:srgbClr val="8FD694"/>
+                </a:solidFill>
+                <a:latin typeface="Courier New" pitchFamily="34" charset="0"/>
+                <a:ea typeface="Courier New" pitchFamily="34" charset="-122"/>
+                <a:cs typeface="Courier New" pitchFamily="34" charset="-120"/>
+              </a:rPr>
+              <a:t>          src =&gt; src.Libros.Count));</a:t>
+            </a:r>
+            <a:endParaRPr lang="en-US" sz="970" dirty="0"/>
+          </a:p>
+        </p:txBody>
+      </p:sp>
+      <p:sp>
+        <p:nvSpPr>
+          <p:cNvPr id="17" name="Text 15"/>
+          <p:cNvSpPr/>
+          <p:nvPr/>
+        </p:nvSpPr>
+        <p:spPr>
+          <a:xfrm>
+            <a:off x="822960" y="4592117"/>
+            <a:ext cx="4937760" cy="192024"/>
+          </a:xfrm>
+          <a:prstGeom prst="rect">
+            <a:avLst/>
+          </a:prstGeom>
+          <a:noFill/>
+          <a:ln/>
+        </p:spPr>
+        <p:txBody>
+          <a:bodyPr wrap="square" lIns="0" tIns="0" rIns="0" bIns="0" rtlCol="0" anchor="ctr"/>
+          <a:lstStyle/>
+          <a:p>
+            <a:pPr marL="0" indent="0" algn="l">
+              <a:buNone/>
+            </a:pPr>
+            <a:r>
+              <a:rPr lang="en-US" sz="970" dirty="0">
+                <a:solidFill>
+                  <a:srgbClr val="E8EEF2"/>
+                </a:solidFill>
+                <a:latin typeface="Courier New" pitchFamily="34" charset="0"/>
+                <a:ea typeface="Courier New" pitchFamily="34" charset="-122"/>
+                <a:cs typeface="Courier New" pitchFamily="34" charset="-120"/>
+              </a:rPr>
+              <a:t>  }</a:t>
+            </a:r>
+            <a:endParaRPr lang="en-US" sz="970" dirty="0"/>
+          </a:p>
+        </p:txBody>
+      </p:sp>
+      <p:sp>
+        <p:nvSpPr>
+          <p:cNvPr id="18" name="Text 16"/>
+          <p:cNvSpPr/>
+          <p:nvPr/>
+        </p:nvSpPr>
+        <p:spPr>
+          <a:xfrm>
+            <a:off x="822960" y="4795114"/>
+            <a:ext cx="4937760" cy="192024"/>
+          </a:xfrm>
+          <a:prstGeom prst="rect">
+            <a:avLst/>
+          </a:prstGeom>
+          <a:noFill/>
+          <a:ln/>
+        </p:spPr>
+        <p:txBody>
+          <a:bodyPr wrap="square" lIns="0" tIns="0" rIns="0" bIns="0" rtlCol="0" anchor="ctr"/>
+          <a:lstStyle/>
+          <a:p>
+            <a:pPr marL="0" indent="0" algn="l">
+              <a:buNone/>
+            </a:pPr>
+            <a:r>
+              <a:rPr lang="en-US" sz="970" dirty="0">
+                <a:solidFill>
+                  <a:srgbClr val="E8EEF2"/>
+                </a:solidFill>
+                <a:latin typeface="Courier New" pitchFamily="34" charset="0"/>
+                <a:ea typeface="Courier New" pitchFamily="34" charset="-122"/>
+                <a:cs typeface="Courier New" pitchFamily="34" charset="-120"/>
+              </a:rPr>
+              <a:t>}</a:t>
+            </a:r>
+            <a:endParaRPr lang="en-US" sz="970" dirty="0"/>
+          </a:p>
+        </p:txBody>
+      </p:sp>
+      <p:sp>
+        <p:nvSpPr>
+          <p:cNvPr id="19" name="Text 17"/>
+          <p:cNvSpPr/>
+          <p:nvPr/>
+        </p:nvSpPr>
+        <p:spPr>
+          <a:xfrm>
+            <a:off x="822960" y="4998110"/>
+            <a:ext cx="4937760" cy="192024"/>
+          </a:xfrm>
+          <a:prstGeom prst="rect">
+            <a:avLst/>
+          </a:prstGeom>
+          <a:noFill/>
+          <a:ln/>
+        </p:spPr>
+        <p:txBody>
+          <a:bodyPr wrap="square" lIns="0" tIns="0" rIns="0" bIns="0" rtlCol="0" anchor="ctr"/>
+          <a:lstStyle/>
+          <a:p>
+            <a:pPr marL="0" indent="0" algn="l">
+              <a:buNone/>
+            </a:pPr>
+            <a:endParaRPr lang="en-US" sz="970" dirty="0"/>
+          </a:p>
+        </p:txBody>
+      </p:sp>
+      <p:sp>
+        <p:nvSpPr>
+          <p:cNvPr id="20" name="Text 18"/>
+          <p:cNvSpPr/>
+          <p:nvPr/>
+        </p:nvSpPr>
+        <p:spPr>
+          <a:xfrm>
+            <a:off x="822960" y="5201107"/>
+            <a:ext cx="4937760" cy="192024"/>
+          </a:xfrm>
+          <a:prstGeom prst="rect">
+            <a:avLst/>
+          </a:prstGeom>
+          <a:noFill/>
+          <a:ln/>
+        </p:spPr>
+        <p:txBody>
+          <a:bodyPr wrap="square" lIns="0" tIns="0" rIns="0" bIns="0" rtlCol="0" anchor="ctr"/>
+          <a:lstStyle/>
+          <a:p>
+            <a:pPr marL="0" indent="0" algn="l">
+              <a:buNone/>
+            </a:pPr>
+            <a:r>
+              <a:rPr lang="en-US" sz="970" dirty="0">
+                <a:solidFill>
+                  <a:srgbClr val="8FA3C9"/>
+                </a:solidFill>
+                <a:latin typeface="Courier New" pitchFamily="34" charset="0"/>
+                <a:ea typeface="Courier New" pitchFamily="34" charset="-122"/>
+                <a:cs typeface="Courier New" pitchFamily="34" charset="-120"/>
+              </a:rPr>
+              <a:t>// Program.cs</a:t>
+            </a:r>
+            <a:endParaRPr lang="en-US" sz="970" dirty="0"/>
+          </a:p>
+        </p:txBody>
+      </p:sp>
+      <p:sp>
+        <p:nvSpPr>
+          <p:cNvPr id="21" name="Text 19"/>
+          <p:cNvSpPr/>
+          <p:nvPr/>
+        </p:nvSpPr>
+        <p:spPr>
+          <a:xfrm>
+            <a:off x="822960" y="5404104"/>
+            <a:ext cx="4937760" cy="192024"/>
+          </a:xfrm>
+          <a:prstGeom prst="rect">
+            <a:avLst/>
+          </a:prstGeom>
+          <a:noFill/>
+          <a:ln/>
+        </p:spPr>
+        <p:txBody>
+          <a:bodyPr wrap="square" lIns="0" tIns="0" rIns="0" bIns="0" rtlCol="0" anchor="ctr"/>
+          <a:lstStyle/>
+          <a:p>
+            <a:pPr marL="0" indent="0" algn="l">
+              <a:buNone/>
+            </a:pPr>
+            <a:r>
+              <a:rPr lang="en-US" sz="970" dirty="0">
+                <a:solidFill>
+                  <a:srgbClr val="C9A9E8"/>
+                </a:solidFill>
+                <a:latin typeface="Courier New" pitchFamily="34" charset="0"/>
+                <a:ea typeface="Courier New" pitchFamily="34" charset="-122"/>
+                <a:cs typeface="Courier New" pitchFamily="34" charset="-120"/>
+              </a:rPr>
+              <a:t>builder.Services.AddAutoMapper(</a:t>
+            </a:r>
+            <a:endParaRPr lang="en-US" sz="970" dirty="0"/>
+          </a:p>
+        </p:txBody>
+      </p:sp>
+      <p:sp>
+        <p:nvSpPr>
+          <p:cNvPr id="22" name="Text 20"/>
+          <p:cNvSpPr/>
+          <p:nvPr/>
+        </p:nvSpPr>
+        <p:spPr>
+          <a:xfrm>
+            <a:off x="822960" y="5607101"/>
+            <a:ext cx="4937760" cy="192024"/>
+          </a:xfrm>
+          <a:prstGeom prst="rect">
+            <a:avLst/>
+          </a:prstGeom>
+          <a:noFill/>
+          <a:ln/>
+        </p:spPr>
+        <p:txBody>
+          <a:bodyPr wrap="square" lIns="0" tIns="0" rIns="0" bIns="0" rtlCol="0" anchor="ctr"/>
+          <a:lstStyle/>
+          <a:p>
+            <a:pPr marL="0" indent="0" algn="l">
+              <a:buNone/>
+            </a:pPr>
+            <a:r>
+              <a:rPr lang="en-US" sz="970" dirty="0">
+                <a:solidFill>
+                  <a:srgbClr val="C9A9E8"/>
+                </a:solidFill>
+                <a:latin typeface="Courier New" pitchFamily="34" charset="0"/>
+                <a:ea typeface="Courier New" pitchFamily="34" charset="-122"/>
+                <a:cs typeface="Courier New" pitchFamily="34" charset="-120"/>
+              </a:rPr>
+              <a:t>  typeof(MappingProfile));</a:t>
+            </a:r>
+            <a:endParaRPr lang="en-US" sz="970" dirty="0"/>
+          </a:p>
+        </p:txBody>
+      </p:sp>
+      <p:sp>
+        <p:nvSpPr>
+          <p:cNvPr id="23" name="Shape 21"/>
+          <p:cNvSpPr/>
+          <p:nvPr/>
+        </p:nvSpPr>
+        <p:spPr>
+          <a:xfrm>
+            <a:off x="6309360" y="1828800"/>
+            <a:ext cx="5349240" cy="4023360"/>
+          </a:xfrm>
+          <a:prstGeom prst="roundRect">
+            <a:avLst>
+              <a:gd name="adj" fmla="val 1818"/>
+            </a:avLst>
+          </a:prstGeom>
+          <a:solidFill>
+            <a:srgbClr val="132139"/>
+          </a:solidFill>
+          <a:ln/>
+        </p:spPr>
+        <p:txBody>
+          <a:bodyPr/>
+          <a:lstStyle/>
+          <a:p>
+            <a:endParaRPr lang="es-AR"/>
+          </a:p>
+        </p:txBody>
+      </p:sp>
+      <p:sp>
+        <p:nvSpPr>
+          <p:cNvPr id="24" name="Text 22"/>
+          <p:cNvSpPr/>
+          <p:nvPr/>
+        </p:nvSpPr>
+        <p:spPr>
+          <a:xfrm>
+            <a:off x="6583680" y="2011680"/>
+            <a:ext cx="4800600" cy="292608"/>
+          </a:xfrm>
+          <a:prstGeom prst="rect">
+            <a:avLst/>
+          </a:prstGeom>
+          <a:noFill/>
+          <a:ln/>
+        </p:spPr>
+        <p:txBody>
+          <a:bodyPr wrap="square" lIns="0" tIns="0" rIns="0" bIns="0" rtlCol="0" anchor="ctr"/>
+          <a:lstStyle/>
+          <a:p>
+            <a:pPr marL="0" indent="0" algn="l">
+              <a:buNone/>
+            </a:pPr>
+            <a:r>
+              <a:rPr lang="en-US" sz="1200" b="1" dirty="0">
+                <a:solidFill>
+                  <a:srgbClr val="8FA3C9"/>
+                </a:solidFill>
+                <a:latin typeface="Calibri" pitchFamily="34" charset="0"/>
+                <a:ea typeface="Calibri" pitchFamily="34" charset="-122"/>
+                <a:cs typeface="Calibri" pitchFamily="34" charset="-120"/>
+              </a:rPr>
+              <a:t>Usarlo con inyección de dependencias</a:t>
+            </a:r>
+            <a:endParaRPr lang="en-US" sz="1200" dirty="0"/>
+          </a:p>
+        </p:txBody>
+      </p:sp>
+      <p:sp>
+        <p:nvSpPr>
+          <p:cNvPr id="25" name="Text 23"/>
+          <p:cNvSpPr/>
+          <p:nvPr/>
+        </p:nvSpPr>
+        <p:spPr>
+          <a:xfrm>
+            <a:off x="6583680" y="2359152"/>
+            <a:ext cx="4800600" cy="210312"/>
+          </a:xfrm>
+          <a:prstGeom prst="rect">
+            <a:avLst/>
+          </a:prstGeom>
+          <a:noFill/>
+          <a:ln/>
+        </p:spPr>
+        <p:txBody>
+          <a:bodyPr wrap="square" lIns="0" tIns="0" rIns="0" bIns="0" rtlCol="0" anchor="ctr"/>
+          <a:lstStyle/>
+          <a:p>
+            <a:pPr marL="0" indent="0" algn="l">
+              <a:buNone/>
+            </a:pPr>
+            <a:r>
+              <a:rPr lang="en-US" sz="1000" dirty="0">
+                <a:solidFill>
+                  <a:srgbClr val="8FC7E8"/>
+                </a:solidFill>
+                <a:latin typeface="Courier New" pitchFamily="34" charset="0"/>
+                <a:ea typeface="Courier New" pitchFamily="34" charset="-122"/>
+                <a:cs typeface="Courier New" pitchFamily="34" charset="-120"/>
+              </a:rPr>
+              <a:t>public class LibrosController</a:t>
+            </a:r>
+            <a:endParaRPr lang="en-US" sz="1000" dirty="0"/>
+          </a:p>
+        </p:txBody>
+      </p:sp>
+      <p:sp>
+        <p:nvSpPr>
+          <p:cNvPr id="26" name="Text 24"/>
+          <p:cNvSpPr/>
+          <p:nvPr/>
+        </p:nvSpPr>
+        <p:spPr>
+          <a:xfrm>
+            <a:off x="6583680" y="2583180"/>
+            <a:ext cx="4800600" cy="210312"/>
+          </a:xfrm>
+          <a:prstGeom prst="rect">
+            <a:avLst/>
+          </a:prstGeom>
+          <a:noFill/>
+          <a:ln/>
+        </p:spPr>
+        <p:txBody>
+          <a:bodyPr wrap="square" lIns="0" tIns="0" rIns="0" bIns="0" rtlCol="0" anchor="ctr"/>
+          <a:lstStyle/>
+          <a:p>
+            <a:pPr marL="0" indent="0" algn="l">
+              <a:buNone/>
+            </a:pPr>
+            <a:r>
+              <a:rPr lang="en-US" sz="1000" dirty="0">
+                <a:solidFill>
+                  <a:srgbClr val="E8EEF2"/>
+                </a:solidFill>
+                <a:latin typeface="Courier New" pitchFamily="34" charset="0"/>
+                <a:ea typeface="Courier New" pitchFamily="34" charset="-122"/>
+                <a:cs typeface="Courier New" pitchFamily="34" charset="-120"/>
+              </a:rPr>
+              <a:t>{</a:t>
+            </a:r>
+            <a:endParaRPr lang="en-US" sz="1000" dirty="0"/>
+          </a:p>
+        </p:txBody>
+      </p:sp>
+      <p:sp>
+        <p:nvSpPr>
+          <p:cNvPr id="27" name="Text 25"/>
+          <p:cNvSpPr/>
+          <p:nvPr/>
+        </p:nvSpPr>
+        <p:spPr>
+          <a:xfrm>
+            <a:off x="6583680" y="2807208"/>
+            <a:ext cx="4800600" cy="210312"/>
+          </a:xfrm>
+          <a:prstGeom prst="rect">
+            <a:avLst/>
+          </a:prstGeom>
+          <a:noFill/>
+          <a:ln/>
+        </p:spPr>
+        <p:txBody>
+          <a:bodyPr wrap="square" lIns="0" tIns="0" rIns="0" bIns="0" rtlCol="0" anchor="ctr"/>
+          <a:lstStyle/>
+          <a:p>
+            <a:pPr marL="0" indent="0" algn="l">
+              <a:buNone/>
+            </a:pPr>
+            <a:r>
+              <a:rPr lang="en-US" sz="1000" dirty="0">
+                <a:solidFill>
+                  <a:srgbClr val="E8EEF2"/>
+                </a:solidFill>
+                <a:latin typeface="Courier New" pitchFamily="34" charset="0"/>
+                <a:ea typeface="Courier New" pitchFamily="34" charset="-122"/>
+                <a:cs typeface="Courier New" pitchFamily="34" charset="-120"/>
+              </a:rPr>
+              <a:t>  private readonly AppDbContext _ctx;</a:t>
+            </a:r>
+            <a:endParaRPr lang="en-US" sz="1000" dirty="0"/>
+          </a:p>
+        </p:txBody>
+      </p:sp>
+      <p:sp>
+        <p:nvSpPr>
+          <p:cNvPr id="28" name="Text 26"/>
+          <p:cNvSpPr/>
+          <p:nvPr/>
+        </p:nvSpPr>
+        <p:spPr>
+          <a:xfrm>
+            <a:off x="6583680" y="3031236"/>
+            <a:ext cx="4800600" cy="210312"/>
+          </a:xfrm>
+          <a:prstGeom prst="rect">
+            <a:avLst/>
+          </a:prstGeom>
+          <a:noFill/>
+          <a:ln/>
+        </p:spPr>
+        <p:txBody>
+          <a:bodyPr wrap="square" lIns="0" tIns="0" rIns="0" bIns="0" rtlCol="0" anchor="ctr"/>
+          <a:lstStyle/>
+          <a:p>
+            <a:pPr marL="0" indent="0" algn="l">
+              <a:buNone/>
+            </a:pPr>
+            <a:r>
+              <a:rPr lang="en-US" sz="1000" dirty="0">
+                <a:solidFill>
+                  <a:srgbClr val="E8EEF2"/>
+                </a:solidFill>
+                <a:latin typeface="Courier New" pitchFamily="34" charset="0"/>
+                <a:ea typeface="Courier New" pitchFamily="34" charset="-122"/>
+                <a:cs typeface="Courier New" pitchFamily="34" charset="-120"/>
+              </a:rPr>
+              <a:t>  private readonly IMapper _mapper;</a:t>
+            </a:r>
+            <a:endParaRPr lang="en-US" sz="1000" dirty="0"/>
+          </a:p>
+        </p:txBody>
+      </p:sp>
+      <p:sp>
+        <p:nvSpPr>
+          <p:cNvPr id="29" name="Text 27"/>
+          <p:cNvSpPr/>
+          <p:nvPr/>
+        </p:nvSpPr>
+        <p:spPr>
+          <a:xfrm>
+            <a:off x="6583680" y="3255264"/>
+            <a:ext cx="4800600" cy="210312"/>
+          </a:xfrm>
+          <a:prstGeom prst="rect">
+            <a:avLst/>
+          </a:prstGeom>
+          <a:noFill/>
+          <a:ln/>
+        </p:spPr>
+        <p:txBody>
+          <a:bodyPr wrap="square" lIns="0" tIns="0" rIns="0" bIns="0" rtlCol="0" anchor="ctr"/>
+          <a:lstStyle/>
+          <a:p>
+            <a:pPr marL="0" indent="0" algn="l">
+              <a:buNone/>
+            </a:pPr>
+            <a:endParaRPr lang="en-US" sz="1000" dirty="0"/>
+          </a:p>
+        </p:txBody>
+      </p:sp>
+      <p:sp>
+        <p:nvSpPr>
+          <p:cNvPr id="30" name="Text 28"/>
+          <p:cNvSpPr/>
+          <p:nvPr/>
+        </p:nvSpPr>
+        <p:spPr>
+          <a:xfrm>
+            <a:off x="6583680" y="3479292"/>
+            <a:ext cx="4800600" cy="210312"/>
+          </a:xfrm>
+          <a:prstGeom prst="rect">
+            <a:avLst/>
+          </a:prstGeom>
+          <a:noFill/>
+          <a:ln/>
+        </p:spPr>
+        <p:txBody>
+          <a:bodyPr wrap="square" lIns="0" tIns="0" rIns="0" bIns="0" rtlCol="0" anchor="ctr"/>
+          <a:lstStyle/>
+          <a:p>
+            <a:pPr marL="0" indent="0" algn="l">
+              <a:buNone/>
+            </a:pPr>
+            <a:r>
+              <a:rPr lang="en-US" sz="1000" dirty="0">
+                <a:solidFill>
+                  <a:srgbClr val="8FD694"/>
+                </a:solidFill>
+                <a:latin typeface="Courier New" pitchFamily="34" charset="0"/>
+                <a:ea typeface="Courier New" pitchFamily="34" charset="-122"/>
+                <a:cs typeface="Courier New" pitchFamily="34" charset="-120"/>
+              </a:rPr>
+              <a:t>  public async Task&lt;List&lt;LibroDto&gt;&gt;</a:t>
+            </a:r>
+            <a:endParaRPr lang="en-US" sz="1000" dirty="0"/>
+          </a:p>
+        </p:txBody>
+      </p:sp>
+      <p:sp>
+        <p:nvSpPr>
+          <p:cNvPr id="31" name="Text 29"/>
+          <p:cNvSpPr/>
+          <p:nvPr/>
+        </p:nvSpPr>
+        <p:spPr>
+          <a:xfrm>
+            <a:off x="6583680" y="3703320"/>
+            <a:ext cx="4800600" cy="210312"/>
+          </a:xfrm>
+          <a:prstGeom prst="rect">
+            <a:avLst/>
+          </a:prstGeom>
+          <a:noFill/>
+          <a:ln/>
+        </p:spPr>
+        <p:txBody>
+          <a:bodyPr wrap="square" lIns="0" tIns="0" rIns="0" bIns="0" rtlCol="0" anchor="ctr"/>
+          <a:lstStyle/>
+          <a:p>
+            <a:pPr marL="0" indent="0" algn="l">
+              <a:buNone/>
+            </a:pPr>
+            <a:r>
+              <a:rPr lang="en-US" sz="1000" dirty="0">
+                <a:solidFill>
+                  <a:srgbClr val="8FD694"/>
+                </a:solidFill>
+                <a:latin typeface="Courier New" pitchFamily="34" charset="0"/>
+                <a:ea typeface="Courier New" pitchFamily="34" charset="-122"/>
+                <a:cs typeface="Courier New" pitchFamily="34" charset="-120"/>
+              </a:rPr>
+              <a:t>    GetLibros()</a:t>
+            </a:r>
+            <a:endParaRPr lang="en-US" sz="1000" dirty="0"/>
+          </a:p>
+        </p:txBody>
+      </p:sp>
+      <p:sp>
+        <p:nvSpPr>
+          <p:cNvPr id="32" name="Text 30"/>
+          <p:cNvSpPr/>
+          <p:nvPr/>
+        </p:nvSpPr>
+        <p:spPr>
+          <a:xfrm>
+            <a:off x="6583680" y="3927348"/>
+            <a:ext cx="4800600" cy="210312"/>
+          </a:xfrm>
+          <a:prstGeom prst="rect">
+            <a:avLst/>
+          </a:prstGeom>
+          <a:noFill/>
+          <a:ln/>
+        </p:spPr>
+        <p:txBody>
+          <a:bodyPr wrap="square" lIns="0" tIns="0" rIns="0" bIns="0" rtlCol="0" anchor="ctr"/>
+          <a:lstStyle/>
+          <a:p>
+            <a:pPr marL="0" indent="0" algn="l">
+              <a:buNone/>
+            </a:pPr>
+            <a:r>
+              <a:rPr lang="en-US" sz="1000" dirty="0">
+                <a:solidFill>
+                  <a:srgbClr val="E8EEF2"/>
+                </a:solidFill>
+                <a:latin typeface="Courier New" pitchFamily="34" charset="0"/>
+                <a:ea typeface="Courier New" pitchFamily="34" charset="-122"/>
+                <a:cs typeface="Courier New" pitchFamily="34" charset="-120"/>
+              </a:rPr>
+              <a:t>  {</a:t>
+            </a:r>
+            <a:endParaRPr lang="en-US" sz="1000" dirty="0"/>
+          </a:p>
+        </p:txBody>
+      </p:sp>
+      <p:sp>
+        <p:nvSpPr>
+          <p:cNvPr id="33" name="Text 31"/>
+          <p:cNvSpPr/>
+          <p:nvPr/>
+        </p:nvSpPr>
+        <p:spPr>
+          <a:xfrm>
+            <a:off x="6583680" y="4151376"/>
+            <a:ext cx="4800600" cy="210312"/>
+          </a:xfrm>
+          <a:prstGeom prst="rect">
+            <a:avLst/>
+          </a:prstGeom>
+          <a:noFill/>
+          <a:ln/>
+        </p:spPr>
+        <p:txBody>
+          <a:bodyPr wrap="square" lIns="0" tIns="0" rIns="0" bIns="0" rtlCol="0" anchor="ctr"/>
+          <a:lstStyle/>
+          <a:p>
+            <a:pPr marL="0" indent="0" algn="l">
+              <a:buNone/>
+            </a:pPr>
+            <a:r>
+              <a:rPr lang="en-US" sz="1000" dirty="0">
+                <a:solidFill>
+                  <a:srgbClr val="8FD694"/>
+                </a:solidFill>
+                <a:latin typeface="Courier New" pitchFamily="34" charset="0"/>
+                <a:ea typeface="Courier New" pitchFamily="34" charset="-122"/>
+                <a:cs typeface="Courier New" pitchFamily="34" charset="-120"/>
+              </a:rPr>
+              <a:t>    return await _ctx.Libros</a:t>
+            </a:r>
+            <a:endParaRPr lang="en-US" sz="1000" dirty="0"/>
+          </a:p>
+        </p:txBody>
+      </p:sp>
+      <p:sp>
+        <p:nvSpPr>
+          <p:cNvPr id="34" name="Text 32"/>
+          <p:cNvSpPr/>
+          <p:nvPr/>
+        </p:nvSpPr>
+        <p:spPr>
+          <a:xfrm>
+            <a:off x="6583680" y="4375404"/>
+            <a:ext cx="4800600" cy="210312"/>
+          </a:xfrm>
+          <a:prstGeom prst="rect">
+            <a:avLst/>
+          </a:prstGeom>
+          <a:noFill/>
+          <a:ln/>
+        </p:spPr>
+        <p:txBody>
+          <a:bodyPr wrap="square" lIns="0" tIns="0" rIns="0" bIns="0" rtlCol="0" anchor="ctr"/>
+          <a:lstStyle/>
+          <a:p>
+            <a:pPr marL="0" indent="0" algn="l">
+              <a:buNone/>
+            </a:pPr>
+            <a:r>
+              <a:rPr lang="en-US" sz="1000" dirty="0">
+                <a:solidFill>
+                  <a:srgbClr val="8FD694"/>
+                </a:solidFill>
+                <a:latin typeface="Courier New" pitchFamily="34" charset="0"/>
+                <a:ea typeface="Courier New" pitchFamily="34" charset="-122"/>
+                <a:cs typeface="Courier New" pitchFamily="34" charset="-120"/>
+              </a:rPr>
+              <a:t>      .ProjectTo&lt;LibroDto&gt;(</a:t>
+            </a:r>
+            <a:endParaRPr lang="en-US" sz="1000" dirty="0"/>
+          </a:p>
+        </p:txBody>
+      </p:sp>
+      <p:sp>
+        <p:nvSpPr>
+          <p:cNvPr id="35" name="Text 33"/>
+          <p:cNvSpPr/>
+          <p:nvPr/>
+        </p:nvSpPr>
+        <p:spPr>
+          <a:xfrm>
+            <a:off x="6583680" y="4599432"/>
+            <a:ext cx="4800600" cy="210312"/>
+          </a:xfrm>
+          <a:prstGeom prst="rect">
+            <a:avLst/>
+          </a:prstGeom>
+          <a:noFill/>
+          <a:ln/>
+        </p:spPr>
+        <p:txBody>
+          <a:bodyPr wrap="square" lIns="0" tIns="0" rIns="0" bIns="0" rtlCol="0" anchor="ctr"/>
+          <a:lstStyle/>
+          <a:p>
+            <a:pPr marL="0" indent="0" algn="l">
+              <a:buNone/>
+            </a:pPr>
+            <a:r>
+              <a:rPr lang="en-US" sz="1000" dirty="0">
+                <a:solidFill>
+                  <a:srgbClr val="8FD694"/>
+                </a:solidFill>
+                <a:latin typeface="Courier New" pitchFamily="34" charset="0"/>
+                <a:ea typeface="Courier New" pitchFamily="34" charset="-122"/>
+                <a:cs typeface="Courier New" pitchFamily="34" charset="-120"/>
+              </a:rPr>
+              <a:t>        _mapper.ConfigurationProvider)</a:t>
+            </a:r>
+            <a:endParaRPr lang="en-US" sz="1000" dirty="0"/>
+          </a:p>
+        </p:txBody>
+      </p:sp>
+      <p:sp>
+        <p:nvSpPr>
+          <p:cNvPr id="36" name="Text 34"/>
+          <p:cNvSpPr/>
+          <p:nvPr/>
+        </p:nvSpPr>
+        <p:spPr>
+          <a:xfrm>
+            <a:off x="6583680" y="4823460"/>
+            <a:ext cx="4800600" cy="210312"/>
+          </a:xfrm>
+          <a:prstGeom prst="rect">
+            <a:avLst/>
+          </a:prstGeom>
+          <a:noFill/>
+          <a:ln/>
+        </p:spPr>
+        <p:txBody>
+          <a:bodyPr wrap="square" lIns="0" tIns="0" rIns="0" bIns="0" rtlCol="0" anchor="ctr"/>
+          <a:lstStyle/>
+          <a:p>
+            <a:pPr marL="0" indent="0" algn="l">
+              <a:buNone/>
+            </a:pPr>
+            <a:r>
+              <a:rPr lang="en-US" sz="1000" dirty="0">
+                <a:solidFill>
+                  <a:srgbClr val="8FD694"/>
+                </a:solidFill>
+                <a:latin typeface="Courier New" pitchFamily="34" charset="0"/>
+                <a:ea typeface="Courier New" pitchFamily="34" charset="-122"/>
+                <a:cs typeface="Courier New" pitchFamily="34" charset="-120"/>
+              </a:rPr>
+              <a:t>      .ToListAsync();</a:t>
+            </a:r>
+            <a:endParaRPr lang="en-US" sz="1000" dirty="0"/>
+          </a:p>
+        </p:txBody>
+      </p:sp>
+      <p:sp>
+        <p:nvSpPr>
+          <p:cNvPr id="37" name="Text 35"/>
+          <p:cNvSpPr/>
+          <p:nvPr/>
+        </p:nvSpPr>
+        <p:spPr>
+          <a:xfrm>
+            <a:off x="6583680" y="5047488"/>
+            <a:ext cx="4800600" cy="210312"/>
+          </a:xfrm>
+          <a:prstGeom prst="rect">
+            <a:avLst/>
+          </a:prstGeom>
+          <a:noFill/>
+          <a:ln/>
+        </p:spPr>
+        <p:txBody>
+          <a:bodyPr wrap="square" lIns="0" tIns="0" rIns="0" bIns="0" rtlCol="0" anchor="ctr"/>
+          <a:lstStyle/>
+          <a:p>
+            <a:pPr marL="0" indent="0" algn="l">
+              <a:buNone/>
+            </a:pPr>
+            <a:r>
+              <a:rPr lang="en-US" sz="1000" dirty="0">
+                <a:solidFill>
+                  <a:srgbClr val="E8EEF2"/>
+                </a:solidFill>
+                <a:latin typeface="Courier New" pitchFamily="34" charset="0"/>
+                <a:ea typeface="Courier New" pitchFamily="34" charset="-122"/>
+                <a:cs typeface="Courier New" pitchFamily="34" charset="-120"/>
+              </a:rPr>
+              <a:t>  }</a:t>
+            </a:r>
+            <a:endParaRPr lang="en-US" sz="1000" dirty="0"/>
+          </a:p>
+        </p:txBody>
+      </p:sp>
+      <p:sp>
+        <p:nvSpPr>
+          <p:cNvPr id="38" name="Text 36"/>
+          <p:cNvSpPr/>
+          <p:nvPr/>
+        </p:nvSpPr>
+        <p:spPr>
+          <a:xfrm>
+            <a:off x="6583680" y="5271516"/>
+            <a:ext cx="4800600" cy="210312"/>
+          </a:xfrm>
+          <a:prstGeom prst="rect">
+            <a:avLst/>
+          </a:prstGeom>
+          <a:noFill/>
+          <a:ln/>
+        </p:spPr>
+        <p:txBody>
+          <a:bodyPr wrap="square" lIns="0" tIns="0" rIns="0" bIns="0" rtlCol="0" anchor="ctr"/>
+          <a:lstStyle/>
+          <a:p>
+            <a:pPr marL="0" indent="0" algn="l">
+              <a:buNone/>
+            </a:pPr>
+            <a:r>
+              <a:rPr lang="en-US" sz="1000" dirty="0">
+                <a:solidFill>
+                  <a:srgbClr val="E8EEF2"/>
+                </a:solidFill>
+                <a:latin typeface="Courier New" pitchFamily="34" charset="0"/>
+                <a:ea typeface="Courier New" pitchFamily="34" charset="-122"/>
+                <a:cs typeface="Courier New" pitchFamily="34" charset="-120"/>
+              </a:rPr>
+              <a:t>}</a:t>
+            </a:r>
+            <a:endParaRPr lang="en-US" sz="1000" dirty="0"/>
+          </a:p>
+        </p:txBody>
+      </p:sp>
+      <p:sp>
+        <p:nvSpPr>
+          <p:cNvPr id="39" name="Text 37"/>
+          <p:cNvSpPr/>
+          <p:nvPr/>
+        </p:nvSpPr>
+        <p:spPr>
+          <a:xfrm>
+            <a:off x="6583680" y="5349240"/>
+            <a:ext cx="4800600" cy="457200"/>
+          </a:xfrm>
+          <a:prstGeom prst="rect">
+            <a:avLst/>
+          </a:prstGeom>
+          <a:noFill/>
+          <a:ln/>
+        </p:spPr>
+        <p:txBody>
+          <a:bodyPr wrap="square" lIns="0" tIns="0" rIns="0" bIns="0" rtlCol="0" anchor="ctr"/>
+          <a:lstStyle/>
+          <a:p>
+            <a:pPr marL="0" indent="0" algn="l">
+              <a:buNone/>
+            </a:pPr>
+            <a:r>
+              <a:rPr lang="en-US" sz="950" i="1" dirty="0">
+                <a:solidFill>
+                  <a:srgbClr val="CADCFC"/>
+                </a:solidFill>
+                <a:latin typeface="Calibri" pitchFamily="34" charset="0"/>
+                <a:ea typeface="Calibri" pitchFamily="34" charset="-122"/>
+                <a:cs typeface="Calibri" pitchFamily="34" charset="-120"/>
+              </a:rPr>
+              <a:t>ProjectTo, a diferencia de Map, arma el SELECT solo con las columnas que el DTO necesita.</a:t>
+            </a:r>
+            <a:endParaRPr lang="en-US" sz="950" dirty="0"/>
+          </a:p>
+        </p:txBody>
+      </p:sp>
+    </p:spTree>
+  </p:cSld>
+  <p:clrMapOvr>
+    <a:masterClrMapping/>
+  </p:clrMapOvr>
+</p:sld>
+</file>
+
+<file path=ppt/slides/slide16.xml><?xml version="1.0" encoding="utf-8"?>
 <p:sld xmlns:a="http://schemas.openxmlformats.org/drawingml/2006/main" xmlns:r="http://schemas.openxmlformats.org/officeDocument/2006/relationships" xmlns:p="http://schemas.openxmlformats.org/presentationml/2006/main">
   <p:cSld name="Slide 14">
     <p:bg>
@@ -8299,7 +9671,7 @@
 </p:sld>
 </file>
 
-<file path=ppt/slides/slide16.xml><?xml version="1.0" encoding="utf-8"?>
+<file path=ppt/slides/slide17.xml><?xml version="1.0" encoding="utf-8"?>
 <p:sld xmlns:a="http://schemas.openxmlformats.org/drawingml/2006/main" xmlns:r="http://schemas.openxmlformats.org/officeDocument/2006/relationships" xmlns:p="http://schemas.openxmlformats.org/presentationml/2006/main">
   <p:cSld name="Slide 15">
     <p:bg>
